--- a/docs/midterm/midterm-deck.pptx
+++ b/docs/midterm/midterm-deck.pptx
@@ -515,7 +515,917 @@
           <a:lstStyle/>
           <a:p>
             <a:r>
-              <a:t>한 문장으로 시작한다. 우리는 Claude Code보다 코딩을 잘하는 걸 만들지 않는다. 질문이 맞는 사람에게 가게 만든다.</a:t>
+              <a:t>우리는 Claude Code보다 코딩을 잘하는 걸 만들지 않습니다. 여러 사람이 각자 에이전트를 돌릴 때, 에이전트의 질문이 정할 권한이 있는 사람에게 바로 가게 만듭니다.</a:t>
+            </a:r>
+          </a:p>
+        </p:txBody>
+      </p:sp>
+      <p:sp>
+        <p:nvSpPr>
+          <p:cNvPr id="4" name="Slide Number Placeholder 3"/>
+          <p:cNvSpPr>
+            <a:spLocks noGrp="1"/>
+          </p:cNvSpPr>
+          <p:nvPr>
+            <p:ph type="sldNum" idx="5" sz="quarter"/>
+          </p:nvPr>
+        </p:nvSpPr>
+        <p:spPr/>
+      </p:sp>
+    </p:spTree>
+  </p:cSld>
+  <p:clrMapOvr>
+    <a:masterClrMapping/>
+  </p:clrMapOvr>
+</p:notes>
+</file>
+
+<file path=ppt/notesSlides/notesSlide10.xml><?xml version="1.0" encoding="utf-8"?>
+<p:notes xmlns:a="http://schemas.openxmlformats.org/drawingml/2006/main" xmlns:p="http://schemas.openxmlformats.org/presentationml/2006/main" xmlns:r="http://schemas.openxmlformats.org/officeDocument/2006/relationships">
+  <p:cSld>
+    <p:spTree>
+      <p:nvGrpSpPr>
+        <p:cNvPr id="1" name=""/>
+        <p:cNvGrpSpPr/>
+        <p:nvPr/>
+      </p:nvGrpSpPr>
+      <p:grpSpPr>
+        <a:xfrm>
+          <a:off x="0" y="0"/>
+          <a:ext cx="0" cy="0"/>
+          <a:chOff x="0" y="0"/>
+          <a:chExt cx="0" cy="0"/>
+        </a:xfrm>
+      </p:grpSpPr>
+      <p:sp>
+        <p:nvSpPr>
+          <p:cNvPr id="2" name="Slide Image Placeholder 1"/>
+          <p:cNvSpPr>
+            <a:spLocks noGrp="1"/>
+          </p:cNvSpPr>
+          <p:nvPr>
+            <p:ph type="sldImg" idx="2"/>
+          </p:nvPr>
+        </p:nvSpPr>
+        <p:spPr/>
+      </p:sp>
+      <p:sp>
+        <p:nvSpPr>
+          <p:cNvPr id="3" name="Notes Placeholder 2"/>
+          <p:cNvSpPr>
+            <a:spLocks noGrp="1"/>
+          </p:cNvSpPr>
+          <p:nvPr>
+            <p:ph type="body" idx="3" sz="quarter"/>
+          </p:nvPr>
+        </p:nvSpPr>
+        <p:spPr/>
+        <p:txBody>
+          <a:bodyPr/>
+          <a:lstStyle/>
+          <a:p>
+            <a:r>
+              <a:t>질문 중계는 이미 서버에 들어가 있습니다. 상담 실행은 26번 시험에서 틀린 확정이 한 번도 없었고, 질문 중계를 끄는 스위치가 그대로 대조군이 됩니다.</a:t>
+            </a:r>
+          </a:p>
+        </p:txBody>
+      </p:sp>
+      <p:sp>
+        <p:nvSpPr>
+          <p:cNvPr id="4" name="Slide Number Placeholder 3"/>
+          <p:cNvSpPr>
+            <a:spLocks noGrp="1"/>
+          </p:cNvSpPr>
+          <p:nvPr>
+            <p:ph type="sldNum" idx="5" sz="quarter"/>
+          </p:nvPr>
+        </p:nvSpPr>
+        <p:spPr/>
+      </p:sp>
+    </p:spTree>
+  </p:cSld>
+  <p:clrMapOvr>
+    <a:masterClrMapping/>
+  </p:clrMapOvr>
+</p:notes>
+</file>
+
+<file path=ppt/notesSlides/notesSlide11.xml><?xml version="1.0" encoding="utf-8"?>
+<p:notes xmlns:a="http://schemas.openxmlformats.org/drawingml/2006/main" xmlns:p="http://schemas.openxmlformats.org/presentationml/2006/main" xmlns:r="http://schemas.openxmlformats.org/officeDocument/2006/relationships">
+  <p:cSld>
+    <p:spTree>
+      <p:nvGrpSpPr>
+        <p:cNvPr id="1" name=""/>
+        <p:cNvGrpSpPr/>
+        <p:nvPr/>
+      </p:nvGrpSpPr>
+      <p:grpSpPr>
+        <a:xfrm>
+          <a:off x="0" y="0"/>
+          <a:ext cx="0" cy="0"/>
+          <a:chOff x="0" y="0"/>
+          <a:chExt cx="0" cy="0"/>
+        </a:xfrm>
+      </p:grpSpPr>
+      <p:sp>
+        <p:nvSpPr>
+          <p:cNvPr id="2" name="Slide Image Placeholder 1"/>
+          <p:cNvSpPr>
+            <a:spLocks noGrp="1"/>
+          </p:cNvSpPr>
+          <p:nvPr>
+            <p:ph type="sldImg" idx="2"/>
+          </p:nvPr>
+        </p:nvSpPr>
+        <p:spPr/>
+      </p:sp>
+      <p:sp>
+        <p:nvSpPr>
+          <p:cNvPr id="3" name="Notes Placeholder 2"/>
+          <p:cNvSpPr>
+            <a:spLocks noGrp="1"/>
+          </p:cNvSpPr>
+          <p:nvPr>
+            <p:ph type="body" idx="3" sz="quarter"/>
+          </p:nvPr>
+        </p:nvSpPr>
+        <p:spPr/>
+        <p:txBody>
+          <a:bodyPr/>
+          <a:lstStyle/>
+          <a:p>
+            <a:r>
+              <a:t>기말에는 같은 과제를 네 조건으로 돌립니다. Claude Code 한 세션, agent teams, NOMOS 질문 중계 끔, 켬. 지표는 성공, 시간, 토큰, 결정 재작업 네 개로 고정합니다.</a:t>
+            </a:r>
+          </a:p>
+        </p:txBody>
+      </p:sp>
+      <p:sp>
+        <p:nvSpPr>
+          <p:cNvPr id="4" name="Slide Number Placeholder 3"/>
+          <p:cNvSpPr>
+            <a:spLocks noGrp="1"/>
+          </p:cNvSpPr>
+          <p:nvPr>
+            <p:ph type="sldNum" idx="5" sz="quarter"/>
+          </p:nvPr>
+        </p:nvSpPr>
+        <p:spPr/>
+      </p:sp>
+    </p:spTree>
+  </p:cSld>
+  <p:clrMapOvr>
+    <a:masterClrMapping/>
+  </p:clrMapOvr>
+</p:notes>
+</file>
+
+<file path=ppt/notesSlides/notesSlide12.xml><?xml version="1.0" encoding="utf-8"?>
+<p:notes xmlns:a="http://schemas.openxmlformats.org/drawingml/2006/main" xmlns:p="http://schemas.openxmlformats.org/presentationml/2006/main" xmlns:r="http://schemas.openxmlformats.org/officeDocument/2006/relationships">
+  <p:cSld>
+    <p:spTree>
+      <p:nvGrpSpPr>
+        <p:cNvPr id="1" name=""/>
+        <p:cNvGrpSpPr/>
+        <p:nvPr/>
+      </p:nvGrpSpPr>
+      <p:grpSpPr>
+        <a:xfrm>
+          <a:off x="0" y="0"/>
+          <a:ext cx="0" cy="0"/>
+          <a:chOff x="0" y="0"/>
+          <a:chExt cx="0" cy="0"/>
+        </a:xfrm>
+      </p:grpSpPr>
+      <p:sp>
+        <p:nvSpPr>
+          <p:cNvPr id="2" name="Slide Image Placeholder 1"/>
+          <p:cNvSpPr>
+            <a:spLocks noGrp="1"/>
+          </p:cNvSpPr>
+          <p:nvPr>
+            <p:ph type="sldImg" idx="2"/>
+          </p:nvPr>
+        </p:nvSpPr>
+        <p:spPr/>
+      </p:sp>
+      <p:sp>
+        <p:nvSpPr>
+          <p:cNvPr id="3" name="Notes Placeholder 2"/>
+          <p:cNvSpPr>
+            <a:spLocks noGrp="1"/>
+          </p:cNvSpPr>
+          <p:nvPr>
+            <p:ph type="body" idx="3" sz="quarter"/>
+          </p:nvPr>
+        </p:nvSpPr>
+        <p:spPr/>
+        <p:txBody>
+          <a:bodyPr/>
+          <a:lstStyle/>
+          <a:p>
+            <a:r>
+              <a:t>8주 계획입니다. 첫 2주에 팀원 세 명이 300문항을 블라인드로 다시 라벨링해 숫자를 확정하고, 라우터 v2를 서버에 붙입니다.</a:t>
+            </a:r>
+          </a:p>
+        </p:txBody>
+      </p:sp>
+      <p:sp>
+        <p:nvSpPr>
+          <p:cNvPr id="4" name="Slide Number Placeholder 3"/>
+          <p:cNvSpPr>
+            <a:spLocks noGrp="1"/>
+          </p:cNvSpPr>
+          <p:nvPr>
+            <p:ph type="sldNum" idx="5" sz="quarter"/>
+          </p:nvPr>
+        </p:nvSpPr>
+        <p:spPr/>
+      </p:sp>
+    </p:spTree>
+  </p:cSld>
+  <p:clrMapOvr>
+    <a:masterClrMapping/>
+  </p:clrMapOvr>
+</p:notes>
+</file>
+
+<file path=ppt/notesSlides/notesSlide13.xml><?xml version="1.0" encoding="utf-8"?>
+<p:notes xmlns:a="http://schemas.openxmlformats.org/drawingml/2006/main" xmlns:p="http://schemas.openxmlformats.org/presentationml/2006/main" xmlns:r="http://schemas.openxmlformats.org/officeDocument/2006/relationships">
+  <p:cSld>
+    <p:spTree>
+      <p:nvGrpSpPr>
+        <p:cNvPr id="1" name=""/>
+        <p:cNvGrpSpPr/>
+        <p:nvPr/>
+      </p:nvGrpSpPr>
+      <p:grpSpPr>
+        <a:xfrm>
+          <a:off x="0" y="0"/>
+          <a:ext cx="0" cy="0"/>
+          <a:chOff x="0" y="0"/>
+          <a:chExt cx="0" cy="0"/>
+        </a:xfrm>
+      </p:grpSpPr>
+      <p:sp>
+        <p:nvSpPr>
+          <p:cNvPr id="2" name="Slide Image Placeholder 1"/>
+          <p:cNvSpPr>
+            <a:spLocks noGrp="1"/>
+          </p:cNvSpPr>
+          <p:nvPr>
+            <p:ph type="sldImg" idx="2"/>
+          </p:nvPr>
+        </p:nvSpPr>
+        <p:spPr/>
+      </p:sp>
+      <p:sp>
+        <p:nvSpPr>
+          <p:cNvPr id="3" name="Notes Placeholder 2"/>
+          <p:cNvSpPr>
+            <a:spLocks noGrp="1"/>
+          </p:cNvSpPr>
+          <p:nvPr>
+            <p:ph type="body" idx="3" sz="quarter"/>
+          </p:nvPr>
+        </p:nvSpPr>
+        <p:spPr/>
+        <p:txBody>
+          <a:bodyPr/>
+          <a:lstStyle/>
+          <a:p>
+            <a:r>
+              <a:t>추가 아이디어는 대표의 시간을 아끼는 순서로 골랐습니다. 결정 장부 재사용과 질문 묶기가 먼저이고, Jev 같은 결정 모델은 기말에 비교만 합니다.</a:t>
+            </a:r>
+          </a:p>
+        </p:txBody>
+      </p:sp>
+      <p:sp>
+        <p:nvSpPr>
+          <p:cNvPr id="4" name="Slide Number Placeholder 3"/>
+          <p:cNvSpPr>
+            <a:spLocks noGrp="1"/>
+          </p:cNvSpPr>
+          <p:nvPr>
+            <p:ph type="sldNum" idx="5" sz="quarter"/>
+          </p:nvPr>
+        </p:nvSpPr>
+        <p:spPr/>
+      </p:sp>
+    </p:spTree>
+  </p:cSld>
+  <p:clrMapOvr>
+    <a:masterClrMapping/>
+  </p:clrMapOvr>
+</p:notes>
+</file>
+
+<file path=ppt/notesSlides/notesSlide14.xml><?xml version="1.0" encoding="utf-8"?>
+<p:notes xmlns:a="http://schemas.openxmlformats.org/drawingml/2006/main" xmlns:p="http://schemas.openxmlformats.org/presentationml/2006/main" xmlns:r="http://schemas.openxmlformats.org/officeDocument/2006/relationships">
+  <p:cSld>
+    <p:spTree>
+      <p:nvGrpSpPr>
+        <p:cNvPr id="1" name=""/>
+        <p:cNvGrpSpPr/>
+        <p:nvPr/>
+      </p:nvGrpSpPr>
+      <p:grpSpPr>
+        <a:xfrm>
+          <a:off x="0" y="0"/>
+          <a:ext cx="0" cy="0"/>
+          <a:chOff x="0" y="0"/>
+          <a:chExt cx="0" cy="0"/>
+        </a:xfrm>
+      </p:grpSpPr>
+      <p:sp>
+        <p:nvSpPr>
+          <p:cNvPr id="2" name="Slide Image Placeholder 1"/>
+          <p:cNvSpPr>
+            <a:spLocks noGrp="1"/>
+          </p:cNvSpPr>
+          <p:nvPr>
+            <p:ph type="sldImg" idx="2"/>
+          </p:nvPr>
+        </p:nvSpPr>
+        <p:spPr/>
+      </p:sp>
+      <p:sp>
+        <p:nvSpPr>
+          <p:cNvPr id="3" name="Notes Placeholder 2"/>
+          <p:cNvSpPr>
+            <a:spLocks noGrp="1"/>
+          </p:cNvSpPr>
+          <p:nvPr>
+            <p:ph type="body" idx="3" sz="quarter"/>
+          </p:nvPr>
+        </p:nvSpPr>
+        <p:spPr/>
+        <p:txBody>
+          <a:bodyPr/>
+          <a:lstStyle/>
+          <a:p>
+            <a:r>
+              <a:t>정리하면, 질문의 다수는 대표에게 가야 하고, owner는 LLM이 9할 이상 맞힙니다. 남은 건 대표의 시간을 아끼는 것과 실제 팀 실험으로 증명하는 것입니다.</a:t>
+            </a:r>
+          </a:p>
+        </p:txBody>
+      </p:sp>
+      <p:sp>
+        <p:nvSpPr>
+          <p:cNvPr id="4" name="Slide Number Placeholder 3"/>
+          <p:cNvSpPr>
+            <a:spLocks noGrp="1"/>
+          </p:cNvSpPr>
+          <p:nvPr>
+            <p:ph type="sldNum" idx="5" sz="quarter"/>
+          </p:nvPr>
+        </p:nvSpPr>
+        <p:spPr/>
+      </p:sp>
+    </p:spTree>
+  </p:cSld>
+  <p:clrMapOvr>
+    <a:masterClrMapping/>
+  </p:clrMapOvr>
+</p:notes>
+</file>
+
+<file path=ppt/notesSlides/notesSlide2.xml><?xml version="1.0" encoding="utf-8"?>
+<p:notes xmlns:a="http://schemas.openxmlformats.org/drawingml/2006/main" xmlns:p="http://schemas.openxmlformats.org/presentationml/2006/main" xmlns:r="http://schemas.openxmlformats.org/officeDocument/2006/relationships">
+  <p:cSld>
+    <p:spTree>
+      <p:nvGrpSpPr>
+        <p:cNvPr id="1" name=""/>
+        <p:cNvGrpSpPr/>
+        <p:nvPr/>
+      </p:nvGrpSpPr>
+      <p:grpSpPr>
+        <a:xfrm>
+          <a:off x="0" y="0"/>
+          <a:ext cx="0" cy="0"/>
+          <a:chOff x="0" y="0"/>
+          <a:chExt cx="0" cy="0"/>
+        </a:xfrm>
+      </p:grpSpPr>
+      <p:sp>
+        <p:nvSpPr>
+          <p:cNvPr id="2" name="Slide Image Placeholder 1"/>
+          <p:cNvSpPr>
+            <a:spLocks noGrp="1"/>
+          </p:cNvSpPr>
+          <p:nvPr>
+            <p:ph type="sldImg" idx="2"/>
+          </p:nvPr>
+        </p:nvSpPr>
+        <p:spPr/>
+      </p:sp>
+      <p:sp>
+        <p:nvSpPr>
+          <p:cNvPr id="3" name="Notes Placeholder 2"/>
+          <p:cNvSpPr>
+            <a:spLocks noGrp="1"/>
+          </p:cNvSpPr>
+          <p:nvPr>
+            <p:ph type="body" idx="3" sz="quarter"/>
+          </p:nvPr>
+        </p:nvSpPr>
+        <p:spPr/>
+        <p:txBody>
+          <a:bodyPr/>
+          <a:lstStyle/>
+          <a:p>
+            <a:r>
+              <a:t>지난번 피드백은 범위가 너무 크다는 것이었습니다. 그래서 3역할 팀, 질문 owner 배정, 공통 계약 위의 병렬 개발 세 가지로 줄였습니다. 역할 쪼개기와 추가 에이전트는 미룹니다.</a:t>
+            </a:r>
+          </a:p>
+        </p:txBody>
+      </p:sp>
+      <p:sp>
+        <p:nvSpPr>
+          <p:cNvPr id="4" name="Slide Number Placeholder 3"/>
+          <p:cNvSpPr>
+            <a:spLocks noGrp="1"/>
+          </p:cNvSpPr>
+          <p:nvPr>
+            <p:ph type="sldNum" idx="5" sz="quarter"/>
+          </p:nvPr>
+        </p:nvSpPr>
+        <p:spPr/>
+      </p:sp>
+    </p:spTree>
+  </p:cSld>
+  <p:clrMapOvr>
+    <a:masterClrMapping/>
+  </p:clrMapOvr>
+</p:notes>
+</file>
+
+<file path=ppt/notesSlides/notesSlide3.xml><?xml version="1.0" encoding="utf-8"?>
+<p:notes xmlns:a="http://schemas.openxmlformats.org/drawingml/2006/main" xmlns:p="http://schemas.openxmlformats.org/presentationml/2006/main" xmlns:r="http://schemas.openxmlformats.org/officeDocument/2006/relationships">
+  <p:cSld>
+    <p:spTree>
+      <p:nvGrpSpPr>
+        <p:cNvPr id="1" name=""/>
+        <p:cNvGrpSpPr/>
+        <p:nvPr/>
+      </p:nvGrpSpPr>
+      <p:grpSpPr>
+        <a:xfrm>
+          <a:off x="0" y="0"/>
+          <a:ext cx="0" cy="0"/>
+          <a:chOff x="0" y="0"/>
+          <a:chExt cx="0" cy="0"/>
+        </a:xfrm>
+      </p:grpSpPr>
+      <p:sp>
+        <p:nvSpPr>
+          <p:cNvPr id="2" name="Slide Image Placeholder 1"/>
+          <p:cNvSpPr>
+            <a:spLocks noGrp="1"/>
+          </p:cNvSpPr>
+          <p:nvPr>
+            <p:ph type="sldImg" idx="2"/>
+          </p:nvPr>
+        </p:nvSpPr>
+        <p:spPr/>
+      </p:sp>
+      <p:sp>
+        <p:nvSpPr>
+          <p:cNvPr id="3" name="Notes Placeholder 2"/>
+          <p:cNvSpPr>
+            <a:spLocks noGrp="1"/>
+          </p:cNvSpPr>
+          <p:nvPr>
+            <p:ph type="body" idx="3" sz="quarter"/>
+          </p:nvPr>
+        </p:nvSpPr>
+        <p:spPr/>
+        <p:txBody>
+          <a:bodyPr/>
+          <a:lstStyle/>
+          <a:p>
+            <a:r>
+              <a:t>지금은 프론트 에이전트가 백엔드 질문을 해도 프론트 개발자 화면에 뜹니다. 공식 문서상 서브에이전트는 질문 도구를 못 쓰고, agent teams도 리드 한 사람에게 올립니다.</a:t>
+            </a:r>
+          </a:p>
+        </p:txBody>
+      </p:sp>
+      <p:sp>
+        <p:nvSpPr>
+          <p:cNvPr id="4" name="Slide Number Placeholder 3"/>
+          <p:cNvSpPr>
+            <a:spLocks noGrp="1"/>
+          </p:cNvSpPr>
+          <p:nvPr>
+            <p:ph type="sldNum" idx="5" sz="quarter"/>
+          </p:nvPr>
+        </p:nvSpPr>
+        <p:spPr/>
+      </p:sp>
+    </p:spTree>
+  </p:cSld>
+  <p:clrMapOvr>
+    <a:masterClrMapping/>
+  </p:clrMapOvr>
+</p:notes>
+</file>
+
+<file path=ppt/notesSlides/notesSlide4.xml><?xml version="1.0" encoding="utf-8"?>
+<p:notes xmlns:a="http://schemas.openxmlformats.org/drawingml/2006/main" xmlns:p="http://schemas.openxmlformats.org/presentationml/2006/main" xmlns:r="http://schemas.openxmlformats.org/officeDocument/2006/relationships">
+  <p:cSld>
+    <p:spTree>
+      <p:nvGrpSpPr>
+        <p:cNvPr id="1" name=""/>
+        <p:cNvGrpSpPr/>
+        <p:nvPr/>
+      </p:nvGrpSpPr>
+      <p:grpSpPr>
+        <a:xfrm>
+          <a:off x="0" y="0"/>
+          <a:ext cx="0" cy="0"/>
+          <a:chOff x="0" y="0"/>
+          <a:chExt cx="0" cy="0"/>
+        </a:xfrm>
+      </p:grpSpPr>
+      <p:sp>
+        <p:nvSpPr>
+          <p:cNvPr id="2" name="Slide Image Placeholder 1"/>
+          <p:cNvSpPr>
+            <a:spLocks noGrp="1"/>
+          </p:cNvSpPr>
+          <p:nvPr>
+            <p:ph type="sldImg" idx="2"/>
+          </p:nvPr>
+        </p:nvSpPr>
+        <p:spPr/>
+      </p:sp>
+      <p:sp>
+        <p:nvSpPr>
+          <p:cNvPr id="3" name="Notes Placeholder 2"/>
+          <p:cNvSpPr>
+            <a:spLocks noGrp="1"/>
+          </p:cNvSpPr>
+          <p:nvPr>
+            <p:ph type="body" idx="3" sz="quarter"/>
+          </p:nvPr>
+        </p:nvSpPr>
+        <p:spPr/>
+        <p:txBody>
+          <a:bodyPr/>
+          <a:lstStyle/>
+          <a:p>
+            <a:r>
+              <a:t>솔직히 말씀드리면 역할을 나눈 병렬 개발은 이미 Claude Code와 MetaGPT가 합니다. 없는 건 여러 사람의 에이전트 질문을 owner에게 보내는 것이고, 그게 우리 자리입니다.</a:t>
+            </a:r>
+          </a:p>
+        </p:txBody>
+      </p:sp>
+      <p:sp>
+        <p:nvSpPr>
+          <p:cNvPr id="4" name="Slide Number Placeholder 3"/>
+          <p:cNvSpPr>
+            <a:spLocks noGrp="1"/>
+          </p:cNvSpPr>
+          <p:nvPr>
+            <p:ph type="sldNum" idx="5" sz="quarter"/>
+          </p:nvPr>
+        </p:nvSpPr>
+        <p:spPr/>
+      </p:sp>
+    </p:spTree>
+  </p:cSld>
+  <p:clrMapOvr>
+    <a:masterClrMapping/>
+  </p:clrMapOvr>
+</p:notes>
+</file>
+
+<file path=ppt/notesSlides/notesSlide5.xml><?xml version="1.0" encoding="utf-8"?>
+<p:notes xmlns:a="http://schemas.openxmlformats.org/drawingml/2006/main" xmlns:p="http://schemas.openxmlformats.org/presentationml/2006/main" xmlns:r="http://schemas.openxmlformats.org/officeDocument/2006/relationships">
+  <p:cSld>
+    <p:spTree>
+      <p:nvGrpSpPr>
+        <p:cNvPr id="1" name=""/>
+        <p:cNvGrpSpPr/>
+        <p:nvPr/>
+      </p:nvGrpSpPr>
+      <p:grpSpPr>
+        <a:xfrm>
+          <a:off x="0" y="0"/>
+          <a:ext cx="0" cy="0"/>
+          <a:chOff x="0" y="0"/>
+          <a:chExt cx="0" cy="0"/>
+        </a:xfrm>
+      </p:grpSpPr>
+      <p:sp>
+        <p:nvSpPr>
+          <p:cNvPr id="2" name="Slide Image Placeholder 1"/>
+          <p:cNvSpPr>
+            <a:spLocks noGrp="1"/>
+          </p:cNvSpPr>
+          <p:nvPr>
+            <p:ph type="sldImg" idx="2"/>
+          </p:nvPr>
+        </p:nvSpPr>
+        <p:spPr/>
+      </p:sp>
+      <p:sp>
+        <p:nvSpPr>
+          <p:cNvPr id="3" name="Notes Placeholder 2"/>
+          <p:cNvSpPr>
+            <a:spLocks noGrp="1"/>
+          </p:cNvSpPr>
+          <p:nvPr>
+            <p:ph type="body" idx="3" sz="quarter"/>
+          </p:nvPr>
+        </p:nvSpPr>
+        <p:spPr/>
+        <p:txBody>
+          <a:bodyPr/>
+          <a:lstStyle/>
+          <a:p>
+            <a:r>
+              <a:t>실제 팀 세션에서 나온 질문 173개를 라벨링했습니다. 기획 때는 FE와 BE 사이의 질문을 생각했는데, 실제로는 60%가 대표가 정할 질문이었습니다. 우선순위와 요청 의도 확인이 많습니다.</a:t>
+            </a:r>
+          </a:p>
+        </p:txBody>
+      </p:sp>
+      <p:sp>
+        <p:nvSpPr>
+          <p:cNvPr id="4" name="Slide Number Placeholder 3"/>
+          <p:cNvSpPr>
+            <a:spLocks noGrp="1"/>
+          </p:cNvSpPr>
+          <p:nvPr>
+            <p:ph type="sldNum" idx="5" sz="quarter"/>
+          </p:nvPr>
+        </p:nvSpPr>
+        <p:spPr/>
+      </p:sp>
+    </p:spTree>
+  </p:cSld>
+  <p:clrMapOvr>
+    <a:masterClrMapping/>
+  </p:clrMapOvr>
+</p:notes>
+</file>
+
+<file path=ppt/notesSlides/notesSlide6.xml><?xml version="1.0" encoding="utf-8"?>
+<p:notes xmlns:a="http://schemas.openxmlformats.org/drawingml/2006/main" xmlns:p="http://schemas.openxmlformats.org/presentationml/2006/main" xmlns:r="http://schemas.openxmlformats.org/officeDocument/2006/relationships">
+  <p:cSld>
+    <p:spTree>
+      <p:nvGrpSpPr>
+        <p:cNvPr id="1" name=""/>
+        <p:cNvGrpSpPr/>
+        <p:nvPr/>
+      </p:nvGrpSpPr>
+      <p:grpSpPr>
+        <a:xfrm>
+          <a:off x="0" y="0"/>
+          <a:ext cx="0" cy="0"/>
+          <a:chOff x="0" y="0"/>
+          <a:chExt cx="0" cy="0"/>
+        </a:xfrm>
+      </p:grpSpPr>
+      <p:sp>
+        <p:nvSpPr>
+          <p:cNvPr id="2" name="Slide Image Placeholder 1"/>
+          <p:cNvSpPr>
+            <a:spLocks noGrp="1"/>
+          </p:cNvSpPr>
+          <p:nvPr>
+            <p:ph type="sldImg" idx="2"/>
+          </p:nvPr>
+        </p:nvSpPr>
+        <p:spPr/>
+      </p:sp>
+      <p:sp>
+        <p:nvSpPr>
+          <p:cNvPr id="3" name="Notes Placeholder 2"/>
+          <p:cNvSpPr>
+            <a:spLocks noGrp="1"/>
+          </p:cNvSpPr>
+          <p:nvPr>
+            <p:ph type="body" idx="3" sz="quarter"/>
+          </p:nvPr>
+        </p:nvSpPr>
+        <p:spPr/>
+        <p:txBody>
+          <a:bodyPr/>
+          <a:lstStyle/>
+          <a:p>
+            <a:r>
+              <a:t>그래서 지금 서버의 기본 규칙, 묻는 쪽의 반대 역할로 보내는 방식은 실제 질문에서 13%만 맞혔습니다. PM을 고를 수 없는 설계였기 때문입니다.</a:t>
+            </a:r>
+          </a:p>
+        </p:txBody>
+      </p:sp>
+      <p:sp>
+        <p:nvSpPr>
+          <p:cNvPr id="4" name="Slide Number Placeholder 3"/>
+          <p:cNvSpPr>
+            <a:spLocks noGrp="1"/>
+          </p:cNvSpPr>
+          <p:nvPr>
+            <p:ph type="sldNum" idx="5" sz="quarter"/>
+          </p:nvPr>
+        </p:nvSpPr>
+        <p:spPr/>
+      </p:sp>
+    </p:spTree>
+  </p:cSld>
+  <p:clrMapOvr>
+    <a:masterClrMapping/>
+  </p:clrMapOvr>
+</p:notes>
+</file>
+
+<file path=ppt/notesSlides/notesSlide7.xml><?xml version="1.0" encoding="utf-8"?>
+<p:notes xmlns:a="http://schemas.openxmlformats.org/drawingml/2006/main" xmlns:p="http://schemas.openxmlformats.org/presentationml/2006/main" xmlns:r="http://schemas.openxmlformats.org/officeDocument/2006/relationships">
+  <p:cSld>
+    <p:spTree>
+      <p:nvGrpSpPr>
+        <p:cNvPr id="1" name=""/>
+        <p:cNvGrpSpPr/>
+        <p:nvPr/>
+      </p:nvGrpSpPr>
+      <p:grpSpPr>
+        <a:xfrm>
+          <a:off x="0" y="0"/>
+          <a:ext cx="0" cy="0"/>
+          <a:chOff x="0" y="0"/>
+          <a:chExt cx="0" cy="0"/>
+        </a:xfrm>
+      </p:grpSpPr>
+      <p:sp>
+        <p:nvSpPr>
+          <p:cNvPr id="2" name="Slide Image Placeholder 1"/>
+          <p:cNvSpPr>
+            <a:spLocks noGrp="1"/>
+          </p:cNvSpPr>
+          <p:nvPr>
+            <p:ph type="sldImg" idx="2"/>
+          </p:nvPr>
+        </p:nvSpPr>
+        <p:spPr/>
+      </p:sp>
+      <p:sp>
+        <p:nvSpPr>
+          <p:cNvPr id="3" name="Notes Placeholder 2"/>
+          <p:cNvSpPr>
+            <a:spLocks noGrp="1"/>
+          </p:cNvSpPr>
+          <p:nvPr>
+            <p:ph type="body" idx="3" sz="quarter"/>
+          </p:nvPr>
+        </p:nvSpPr>
+        <p:spPr/>
+        <p:txBody>
+          <a:bodyPr/>
+          <a:lstStyle/>
+          <a:p>
+            <a:r>
+              <a:t>라우터 여섯 가지를 비교했습니다. LLM이 owner를 직접 고르면 실제 질문 94%, 백엔드 팀이 정답을 붙인 20문항 95%였습니다. 키워드 규칙은 처음 보는 도메인에서 53%로 떨어졌습니다.</a:t>
+            </a:r>
+          </a:p>
+        </p:txBody>
+      </p:sp>
+      <p:sp>
+        <p:nvSpPr>
+          <p:cNvPr id="4" name="Slide Number Placeholder 3"/>
+          <p:cNvSpPr>
+            <a:spLocks noGrp="1"/>
+          </p:cNvSpPr>
+          <p:nvPr>
+            <p:ph type="sldNum" idx="5" sz="quarter"/>
+          </p:nvPr>
+        </p:nvSpPr>
+        <p:spPr/>
+      </p:sp>
+    </p:spTree>
+  </p:cSld>
+  <p:clrMapOvr>
+    <a:masterClrMapping/>
+  </p:clrMapOvr>
+</p:notes>
+</file>
+
+<file path=ppt/notesSlides/notesSlide8.xml><?xml version="1.0" encoding="utf-8"?>
+<p:notes xmlns:a="http://schemas.openxmlformats.org/drawingml/2006/main" xmlns:p="http://schemas.openxmlformats.org/presentationml/2006/main" xmlns:r="http://schemas.openxmlformats.org/officeDocument/2006/relationships">
+  <p:cSld>
+    <p:spTree>
+      <p:nvGrpSpPr>
+        <p:cNvPr id="1" name=""/>
+        <p:cNvGrpSpPr/>
+        <p:nvPr/>
+      </p:nvGrpSpPr>
+      <p:grpSpPr>
+        <a:xfrm>
+          <a:off x="0" y="0"/>
+          <a:ext cx="0" cy="0"/>
+          <a:chOff x="0" y="0"/>
+          <a:chExt cx="0" cy="0"/>
+        </a:xfrm>
+      </p:grpSpPr>
+      <p:sp>
+        <p:nvSpPr>
+          <p:cNvPr id="2" name="Slide Image Placeholder 1"/>
+          <p:cNvSpPr>
+            <a:spLocks noGrp="1"/>
+          </p:cNvSpPr>
+          <p:nvPr>
+            <p:ph type="sldImg" idx="2"/>
+          </p:nvPr>
+        </p:nvSpPr>
+        <p:spPr/>
+      </p:sp>
+      <p:sp>
+        <p:nvSpPr>
+          <p:cNvPr id="3" name="Notes Placeholder 2"/>
+          <p:cNvSpPr>
+            <a:spLocks noGrp="1"/>
+          </p:cNvSpPr>
+          <p:nvPr>
+            <p:ph type="body" idx="3" sz="quarter"/>
+          </p:nvPr>
+        </p:nvSpPr>
+        <p:spPr/>
+        <p:txBody>
+          <a:bodyPr/>
+          <a:lstStyle/>
+          <a:p>
+            <a:r>
+              <a:t>정확도보다 어려운 건 대표 부하입니다. 가장 정확한 라우터도 73%를 대표에게 보냈습니다. 기획안의 확신도 낮으면 대표에게 단계는 오히려 정확도를 떨어뜨렸습니다.</a:t>
+            </a:r>
+          </a:p>
+        </p:txBody>
+      </p:sp>
+      <p:sp>
+        <p:nvSpPr>
+          <p:cNvPr id="4" name="Slide Number Placeholder 3"/>
+          <p:cNvSpPr>
+            <a:spLocks noGrp="1"/>
+          </p:cNvSpPr>
+          <p:nvPr>
+            <p:ph type="sldNum" idx="5" sz="quarter"/>
+          </p:nvPr>
+        </p:nvSpPr>
+        <p:spPr/>
+      </p:sp>
+    </p:spTree>
+  </p:cSld>
+  <p:clrMapOvr>
+    <a:masterClrMapping/>
+  </p:clrMapOvr>
+</p:notes>
+</file>
+
+<file path=ppt/notesSlides/notesSlide9.xml><?xml version="1.0" encoding="utf-8"?>
+<p:notes xmlns:a="http://schemas.openxmlformats.org/drawingml/2006/main" xmlns:p="http://schemas.openxmlformats.org/presentationml/2006/main" xmlns:r="http://schemas.openxmlformats.org/officeDocument/2006/relationships">
+  <p:cSld>
+    <p:spTree>
+      <p:nvGrpSpPr>
+        <p:cNvPr id="1" name=""/>
+        <p:cNvGrpSpPr/>
+        <p:nvPr/>
+      </p:nvGrpSpPr>
+      <p:grpSpPr>
+        <a:xfrm>
+          <a:off x="0" y="0"/>
+          <a:ext cx="0" cy="0"/>
+          <a:chOff x="0" y="0"/>
+          <a:chExt cx="0" cy="0"/>
+        </a:xfrm>
+      </p:grpSpPr>
+      <p:sp>
+        <p:nvSpPr>
+          <p:cNvPr id="2" name="Slide Image Placeholder 1"/>
+          <p:cNvSpPr>
+            <a:spLocks noGrp="1"/>
+          </p:cNvSpPr>
+          <p:nvPr>
+            <p:ph type="sldImg" idx="2"/>
+          </p:nvPr>
+        </p:nvSpPr>
+        <p:spPr/>
+      </p:sp>
+      <p:sp>
+        <p:nvSpPr>
+          <p:cNvPr id="3" name="Notes Placeholder 2"/>
+          <p:cNvSpPr>
+            <a:spLocks noGrp="1"/>
+          </p:cNvSpPr>
+          <p:nvPr>
+            <p:ph type="body" idx="3" sz="quarter"/>
+          </p:nvPr>
+        </p:nvSpPr>
+        <p:spPr/>
+        <p:txBody>
+          <a:bodyPr/>
+          <a:lstStyle/>
+          <a:p>
+            <a:r>
+              <a:t>그래서 다섯 단계로 바꿉니다. 묻기 전에 답을 찾고, 경로와 운영 반영은 규칙으로, 나머지는 LLM이, 확신이 낮아도 대표에게 몰지 않고, 넘기기 기록으로 배웁니다.</a:t>
             </a:r>
           </a:p>
         </p:txBody>

--- a/docs/midterm/midterm-deck.pptx
+++ b/docs/midterm/midterm-deck.pptx
@@ -17165,7 +17165,7 @@
                 <a:ea typeface="Pretendard"/>
                 <a:cs typeface="Pretendard"/>
               </a:rPr>
-              <a:t>2가지</a:t>
+              <a:t>9/10</a:t>
             </a:r>
           </a:p>
         </p:txBody>
@@ -17206,7 +17206,7 @@
                 <a:ea typeface="Pretendard"/>
                 <a:cs typeface="Pretendard"/>
               </a:rPr>
-              <a:t>BE가 '화면에 무슨 필드가 필요하냐'고 물으면 소비자(FE) 소관인데 자기 소관으로 판정. 운영 배포를 개발 환경으로 판정.</a:t>
+              <a:t>LLM이 틀린 10개 중 9개는 확신 0.6 이하에서 대표에게 미룬 경우. 모르면 대표에게 보내는 습관이 부하의 원인이다.</a:t>
             </a:r>
           </a:p>
         </p:txBody>

--- a/docs/midterm/midterm-deck.pptx
+++ b/docs/midterm/midterm-deck.pptx
@@ -16432,7 +16432,7 @@
         <p:spPr>
           <a:xfrm>
             <a:off x="8420100" y="5200650"/>
-            <a:ext cx="2952750" cy="1047750"/>
+            <a:ext cx="2952750" cy="1143000"/>
           </a:xfrm>
           <a:prstGeom prst="rect">
             <a:avLst/>
@@ -16451,7 +16451,7 @@
               </a:lnSpc>
             </a:pPr>
             <a:r>
-              <a:rPr sz="1050" b="0">
+              <a:rPr sz="1012" b="0">
                 <a:solidFill>
                   <a:srgbClr val="47474D"/>
                 </a:solidFill>
@@ -16459,7 +16459,7 @@
                 <a:ea typeface="Pretendard"/>
                 <a:cs typeface="Pretendard"/>
               </a:rPr>
-              <a:t>키워드 규칙은 처음 보는 도메인에서 무너진다. 정답 라벨은 사람 검수 전.</a:t>
+              <a:t>키워드 규칙은 처음 보는 도메인에서 무너진다. 백엔드 20문항은 표본이 작아 95% 구간이 LLM 76%~99%, 반대 규칙 48%~85%로 겹친다.</a:t>
             </a:r>
           </a:p>
         </p:txBody>

--- a/docs/midterm/midterm-deck.pptx
+++ b/docs/midterm/midterm-deck.pptx
@@ -16185,8 +16185,8 @@
         </p:nvSpPr>
         <p:spPr>
           <a:xfrm>
-            <a:off x="8420100" y="2533650"/>
-            <a:ext cx="2952750" cy="247650"/>
+            <a:off x="8420100" y="2495550"/>
+            <a:ext cx="2952750" cy="228600"/>
           </a:xfrm>
           <a:prstGeom prst="rect">
             <a:avLst/>
@@ -16205,7 +16205,7 @@
               </a:lnSpc>
             </a:pPr>
             <a:r>
-              <a:rPr sz="1125" b="0">
+              <a:rPr sz="1050" b="0">
                 <a:solidFill>
                   <a:srgbClr val="47474D"/>
                 </a:solidFill>
@@ -16226,8 +16226,8 @@
         </p:nvSpPr>
         <p:spPr>
           <a:xfrm>
-            <a:off x="8420100" y="2781300"/>
-            <a:ext cx="2952750" cy="571500"/>
+            <a:off x="8420100" y="2724150"/>
+            <a:ext cx="2952750" cy="285750"/>
           </a:xfrm>
           <a:prstGeom prst="rect">
             <a:avLst/>
@@ -16246,7 +16246,7 @@
               </a:lnSpc>
             </a:pPr>
             <a:r>
-              <a:rPr sz="1275" b="1">
+              <a:rPr sz="1200" b="1">
                 <a:solidFill>
                   <a:srgbClr val="16161A"/>
                 </a:solidFill>
@@ -16267,8 +16267,8 @@
         </p:nvSpPr>
         <p:spPr>
           <a:xfrm>
-            <a:off x="8420100" y="3409950"/>
-            <a:ext cx="2952750" cy="247650"/>
+            <a:off x="8420100" y="3143250"/>
+            <a:ext cx="2952750" cy="228600"/>
           </a:xfrm>
           <a:prstGeom prst="rect">
             <a:avLst/>
@@ -16287,7 +16287,7 @@
               </a:lnSpc>
             </a:pPr>
             <a:r>
-              <a:rPr sz="1125" b="0">
+              <a:rPr sz="1050" b="0">
                 <a:solidFill>
                   <a:srgbClr val="47474D"/>
                 </a:solidFill>
@@ -16308,8 +16308,8 @@
         </p:nvSpPr>
         <p:spPr>
           <a:xfrm>
-            <a:off x="8420100" y="3657600"/>
-            <a:ext cx="2952750" cy="571500"/>
+            <a:off x="8420100" y="3371850"/>
+            <a:ext cx="2952750" cy="285750"/>
           </a:xfrm>
           <a:prstGeom prst="rect">
             <a:avLst/>
@@ -16328,7 +16328,7 @@
               </a:lnSpc>
             </a:pPr>
             <a:r>
-              <a:rPr sz="1275" b="1">
+              <a:rPr sz="1200" b="1">
                 <a:solidFill>
                   <a:srgbClr val="16161A"/>
                 </a:solidFill>
@@ -16349,8 +16349,8 @@
         </p:nvSpPr>
         <p:spPr>
           <a:xfrm>
-            <a:off x="8420100" y="4286250"/>
-            <a:ext cx="2952750" cy="247650"/>
+            <a:off x="8420100" y="3790950"/>
+            <a:ext cx="2952750" cy="228600"/>
           </a:xfrm>
           <a:prstGeom prst="rect">
             <a:avLst/>
@@ -16369,7 +16369,7 @@
               </a:lnSpc>
             </a:pPr>
             <a:r>
-              <a:rPr sz="1125" b="0">
+              <a:rPr sz="1050" b="0">
                 <a:solidFill>
                   <a:srgbClr val="47474D"/>
                 </a:solidFill>
@@ -16390,8 +16390,8 @@
         </p:nvSpPr>
         <p:spPr>
           <a:xfrm>
-            <a:off x="8420100" y="4533900"/>
-            <a:ext cx="2952750" cy="571500"/>
+            <a:off x="8420100" y="4019550"/>
+            <a:ext cx="2952750" cy="285750"/>
           </a:xfrm>
           <a:prstGeom prst="rect">
             <a:avLst/>
@@ -16410,7 +16410,7 @@
               </a:lnSpc>
             </a:pPr>
             <a:r>
-              <a:rPr sz="1275" b="1">
+              <a:rPr sz="1200" b="1">
                 <a:solidFill>
                   <a:srgbClr val="16161A"/>
                 </a:solidFill>
@@ -16431,7 +16431,89 @@
         </p:nvSpPr>
         <p:spPr>
           <a:xfrm>
-            <a:off x="8420100" y="5200650"/>
+            <a:off x="8420100" y="4438650"/>
+            <a:ext cx="2952750" cy="228600"/>
+          </a:xfrm>
+          <a:prstGeom prst="rect">
+            <a:avLst/>
+          </a:prstGeom>
+          <a:noFill/>
+        </p:spPr>
+        <p:txBody>
+          <a:bodyPr wrap="square" lIns="0" rIns="0" tIns="0" bIns="0" anchor="t">
+            <a:spAutoFit/>
+          </a:bodyPr>
+          <a:lstStyle/>
+          <a:p>
+            <a:pPr algn="l">
+              <a:lnSpc>
+                <a:spcPct val="124200"/>
+              </a:lnSpc>
+            </a:pPr>
+            <a:r>
+              <a:rPr sz="1050" b="0">
+                <a:solidFill>
+                  <a:srgbClr val="47474D"/>
+                </a:solidFill>
+                <a:latin typeface="Pretendard"/>
+                <a:ea typeface="Pretendard"/>
+                <a:cs typeface="Pretendard"/>
+              </a:rPr>
+              <a:t>초대 수락 어려운 보류 30문항</a:t>
+            </a:r>
+          </a:p>
+        </p:txBody>
+      </p:sp>
+      <p:sp>
+        <p:nvSpPr>
+          <p:cNvPr id="39" name="TextBox 38"/>
+          <p:cNvSpPr txBox="1"/>
+          <p:nvPr/>
+        </p:nvSpPr>
+        <p:spPr>
+          <a:xfrm>
+            <a:off x="8420100" y="4667250"/>
+            <a:ext cx="2952750" cy="285750"/>
+          </a:xfrm>
+          <a:prstGeom prst="rect">
+            <a:avLst/>
+          </a:prstGeom>
+          <a:noFill/>
+        </p:spPr>
+        <p:txBody>
+          <a:bodyPr wrap="square" lIns="0" rIns="0" tIns="0" bIns="0" anchor="t">
+            <a:spAutoFit/>
+          </a:bodyPr>
+          <a:lstStyle/>
+          <a:p>
+            <a:pPr algn="l">
+              <a:lnSpc>
+                <a:spcPct val="124200"/>
+              </a:lnSpc>
+            </a:pPr>
+            <a:r>
+              <a:rPr sz="1200" b="1">
+                <a:solidFill>
+                  <a:srgbClr val="16161A"/>
+                </a:solidFill>
+                <a:latin typeface="Pretendard"/>
+                <a:ea typeface="Pretendard"/>
+                <a:cs typeface="Pretendard"/>
+              </a:rPr>
+              <a:t>LLM 직접 97%   키워드 규칙 63%</a:t>
+            </a:r>
+          </a:p>
+        </p:txBody>
+      </p:sp>
+      <p:sp>
+        <p:nvSpPr>
+          <p:cNvPr id="40" name="TextBox 39"/>
+          <p:cNvSpPr txBox="1"/>
+          <p:nvPr/>
+        </p:nvSpPr>
+        <p:spPr>
+          <a:xfrm>
+            <a:off x="8420100" y="5124450"/>
             <a:ext cx="2952750" cy="1143000"/>
           </a:xfrm>
           <a:prstGeom prst="rect">

--- a/docs/midterm/midterm-deck.pptx
+++ b/docs/midterm/midterm-deck.pptx
@@ -19,6 +19,7 @@
     <p:sldId id="267" r:id="rId19"/>
     <p:sldId id="268" r:id="rId20"/>
     <p:sldId id="269" r:id="rId21"/>
+    <p:sldId id="270" r:id="rId22"/>
   </p:sldIdLst>
   <p:sldSz cx="12192000" cy="6858000" type="screen4x3"/>
   <p:notesSz cx="6858000" cy="9144000"/>
@@ -655,7 +656,7 @@
           <a:lstStyle/>
           <a:p>
             <a:r>
-              <a:t>기말에는 같은 과제를 네 조건으로 돌립니다. Claude Code 한 세션, agent teams, NOMOS 질문 중계 끔, 켬. 지표는 성공, 시간, 토큰, 결정 재작업 네 개로 고정합니다.</a:t>
+              <a:t>두 번째 목표인 공통 계약입니다. 공개 레포에서도 스펙 변경의 46%에 깨지는 변경이 있었고, 깨뜨리는 쪽은 대개 백엔드였습니다. 최소 계약 먼저, 결정 기록, 경로 검사는 이미 동작합니다. 빈칸은 실제 응답을 계약과 비교하는 V1A이고, 기말까지 이걸 켭니다.</a:t>
             </a:r>
           </a:p>
         </p:txBody>
@@ -725,7 +726,7 @@
           <a:lstStyle/>
           <a:p>
             <a:r>
-              <a:t>8주 계획입니다. 첫 2주에 팀원 세 명이 300문항을 블라인드로 다시 라벨링해 숫자를 확정하고, 라우터 v2를 서버에 붙입니다.</a:t>
+              <a:t>기말에는 같은 과제를 네 조건으로 돌립니다. Claude Code 한 세션, agent teams, NOMOS 질문 중계 끔, 켬. 지표는 성공, 시간, 토큰, 결정 재작업 네 개로 고정합니다.</a:t>
             </a:r>
           </a:p>
         </p:txBody>
@@ -795,7 +796,7 @@
           <a:lstStyle/>
           <a:p>
             <a:r>
-              <a:t>추가 아이디어는 대표의 시간을 아끼는 순서로 골랐습니다. 결정 장부 재사용과 질문 묶기가 먼저이고, Jev 같은 결정 모델은 기말에 비교만 합니다.</a:t>
+              <a:t>8주 계획입니다. 첫 2주에 팀원 세 명이 300문항을 블라인드로 다시 라벨링해 숫자를 확정하고, 라우터 v2를 서버에 붙입니다.</a:t>
             </a:r>
           </a:p>
         </p:txBody>
@@ -821,6 +822,76 @@
 </file>
 
 <file path=ppt/notesSlides/notesSlide14.xml><?xml version="1.0" encoding="utf-8"?>
+<p:notes xmlns:a="http://schemas.openxmlformats.org/drawingml/2006/main" xmlns:p="http://schemas.openxmlformats.org/presentationml/2006/main" xmlns:r="http://schemas.openxmlformats.org/officeDocument/2006/relationships">
+  <p:cSld>
+    <p:spTree>
+      <p:nvGrpSpPr>
+        <p:cNvPr id="1" name=""/>
+        <p:cNvGrpSpPr/>
+        <p:nvPr/>
+      </p:nvGrpSpPr>
+      <p:grpSpPr>
+        <a:xfrm>
+          <a:off x="0" y="0"/>
+          <a:ext cx="0" cy="0"/>
+          <a:chOff x="0" y="0"/>
+          <a:chExt cx="0" cy="0"/>
+        </a:xfrm>
+      </p:grpSpPr>
+      <p:sp>
+        <p:nvSpPr>
+          <p:cNvPr id="2" name="Slide Image Placeholder 1"/>
+          <p:cNvSpPr>
+            <a:spLocks noGrp="1"/>
+          </p:cNvSpPr>
+          <p:nvPr>
+            <p:ph type="sldImg" idx="2"/>
+          </p:nvPr>
+        </p:nvSpPr>
+        <p:spPr/>
+      </p:sp>
+      <p:sp>
+        <p:nvSpPr>
+          <p:cNvPr id="3" name="Notes Placeholder 2"/>
+          <p:cNvSpPr>
+            <a:spLocks noGrp="1"/>
+          </p:cNvSpPr>
+          <p:nvPr>
+            <p:ph type="body" idx="3" sz="quarter"/>
+          </p:nvPr>
+        </p:nvSpPr>
+        <p:spPr/>
+        <p:txBody>
+          <a:bodyPr/>
+          <a:lstStyle/>
+          <a:p>
+            <a:r>
+              <a:t>추가 아이디어는 대표의 시간을 아끼는 순서로 골랐습니다. 결정 장부 재사용과 질문 묶기가 먼저이고, Jev 같은 결정 모델은 기말에 비교만 합니다.</a:t>
+            </a:r>
+          </a:p>
+        </p:txBody>
+      </p:sp>
+      <p:sp>
+        <p:nvSpPr>
+          <p:cNvPr id="4" name="Slide Number Placeholder 3"/>
+          <p:cNvSpPr>
+            <a:spLocks noGrp="1"/>
+          </p:cNvSpPr>
+          <p:nvPr>
+            <p:ph type="sldNum" idx="5" sz="quarter"/>
+          </p:nvPr>
+        </p:nvSpPr>
+        <p:spPr/>
+      </p:sp>
+    </p:spTree>
+  </p:cSld>
+  <p:clrMapOvr>
+    <a:masterClrMapping/>
+  </p:clrMapOvr>
+</p:notes>
+</file>
+
+<file path=ppt/notesSlides/notesSlide15.xml><?xml version="1.0" encoding="utf-8"?>
 <p:notes xmlns:a="http://schemas.openxmlformats.org/drawingml/2006/main" xmlns:p="http://schemas.openxmlformats.org/presentationml/2006/main" xmlns:r="http://schemas.openxmlformats.org/officeDocument/2006/relationships">
   <p:cSld>
     <p:spTree>
@@ -4786,7 +4857,7 @@
                 <a:ea typeface="Pretendard"/>
                 <a:cs typeface="Pretendard"/>
               </a:rPr>
-              <a:t>10 / 14</a:t>
+              <a:t>10 / 15</a:t>
             </a:r>
           </a:p>
         </p:txBody>
@@ -5653,7 +5724,7 @@
                 <a:ea typeface="Pretendard"/>
                 <a:cs typeface="Pretendard"/>
               </a:rPr>
-              <a:t>기말까지</a:t>
+              <a:t>두 번째 축</a:t>
             </a:r>
           </a:p>
         </p:txBody>
@@ -5694,7 +5765,7 @@
                 <a:ea typeface="Pretendard"/>
                 <a:cs typeface="Pretendard"/>
               </a:rPr>
-              <a:t>11 / 14</a:t>
+              <a:t>11 / 15</a:t>
             </a:r>
           </a:p>
         </p:txBody>
@@ -5735,7 +5806,7 @@
                 <a:ea typeface="Pretendard"/>
                 <a:cs typeface="Pretendard"/>
               </a:rPr>
-              <a:t>같은 과제를 네 조건으로 돌립니다</a:t>
+              <a:t>공통 계약: 장치는 거의 있고, 빈칸은 하나입니다</a:t>
             </a:r>
           </a:p>
         </p:txBody>
@@ -5827,739 +5898,55 @@
       </p:sp>
       <p:sp>
         <p:nvSpPr>
-          <p:cNvPr id="7" name="Rounded Rectangle 6"/>
+          <p:cNvPr id="7" name="TextBox 6"/>
+          <p:cNvSpPr txBox="1"/>
+          <p:nvPr/>
+        </p:nvSpPr>
+        <p:spPr>
+          <a:xfrm>
+            <a:off x="609600" y="1866900"/>
+            <a:ext cx="3429000" cy="285750"/>
+          </a:xfrm>
+          <a:prstGeom prst="rect">
+            <a:avLst/>
+          </a:prstGeom>
+          <a:noFill/>
+        </p:spPr>
+        <p:txBody>
+          <a:bodyPr wrap="square" lIns="0" rIns="0" tIns="0" bIns="0" anchor="t">
+            <a:spAutoFit/>
+          </a:bodyPr>
+          <a:lstStyle/>
+          <a:p>
+            <a:pPr algn="l">
+              <a:lnSpc>
+                <a:spcPct val="124200"/>
+              </a:lnSpc>
+            </a:pPr>
+            <a:r>
+              <a:rPr sz="1125" b="1">
+                <a:solidFill>
+                  <a:srgbClr val="7A7A80"/>
+                </a:solidFill>
+                <a:latin typeface="Pretendard"/>
+                <a:ea typeface="Pretendard"/>
+                <a:cs typeface="Pretendard"/>
+              </a:rPr>
+              <a:t>계약은 자주 깨진다(연구 허브 M4)</a:t>
+            </a:r>
+          </a:p>
+        </p:txBody>
+      </p:sp>
+      <p:sp>
+        <p:nvSpPr>
+          <p:cNvPr id="8" name="Rectangle 7"/>
           <p:cNvSpPr/>
           <p:nvPr/>
         </p:nvSpPr>
         <p:spPr>
           <a:xfrm>
-            <a:off x="609600" y="1962150"/>
-            <a:ext cx="2590800" cy="1905000"/>
-          </a:xfrm>
-          <a:prstGeom prst="roundRect">
-            <a:avLst>
-              <a:gd name="adj" fmla="val 3000"/>
-            </a:avLst>
-          </a:prstGeom>
-          <a:solidFill>
-            <a:srgbClr val="FFFFFD"/>
-          </a:solidFill>
-          <a:ln w="9525">
-            <a:solidFill>
-              <a:srgbClr val="DEDCD5"/>
-            </a:solidFill>
-          </a:ln>
-          <a:effectLst/>
-        </p:spPr>
-        <p:style>
-          <a:lnRef idx="1">
-            <a:schemeClr val="accent1"/>
-          </a:lnRef>
-          <a:fillRef idx="3">
-            <a:schemeClr val="accent1"/>
-          </a:fillRef>
-          <a:effectRef idx="2">
-            <a:schemeClr val="accent1"/>
-          </a:effectRef>
-          <a:fontRef idx="minor">
-            <a:schemeClr val="lt1"/>
-          </a:fontRef>
-        </p:style>
-        <p:txBody>
-          <a:bodyPr rtlCol="0" anchor="ctr"/>
-          <a:lstStyle/>
-          <a:p>
-            <a:pPr algn="ctr"/>
-          </a:p>
-        </p:txBody>
-      </p:sp>
-      <p:sp>
-        <p:nvSpPr>
-          <p:cNvPr id="8" name="TextBox 7"/>
-          <p:cNvSpPr txBox="1"/>
-          <p:nvPr/>
-        </p:nvSpPr>
-        <p:spPr>
-          <a:xfrm>
-            <a:off x="819150" y="2152650"/>
-            <a:ext cx="571500" cy="476250"/>
-          </a:xfrm>
-          <a:prstGeom prst="rect">
-            <a:avLst/>
-          </a:prstGeom>
-          <a:noFill/>
-        </p:spPr>
-        <p:txBody>
-          <a:bodyPr wrap="square" lIns="0" rIns="0" tIns="0" bIns="0" anchor="t">
-            <a:spAutoFit/>
-          </a:bodyPr>
-          <a:lstStyle/>
-          <a:p>
-            <a:pPr algn="l">
-              <a:lnSpc>
-                <a:spcPct val="124200"/>
-              </a:lnSpc>
-            </a:pPr>
-            <a:r>
-              <a:rPr sz="3000" b="1">
-                <a:solidFill>
-                  <a:srgbClr val="2A78D6"/>
-                </a:solidFill>
-                <a:latin typeface="Pretendard"/>
-                <a:ea typeface="Pretendard"/>
-                <a:cs typeface="Pretendard"/>
-              </a:rPr>
-              <a:t>A</a:t>
-            </a:r>
-          </a:p>
-        </p:txBody>
-      </p:sp>
-      <p:sp>
-        <p:nvSpPr>
-          <p:cNvPr id="9" name="TextBox 8"/>
-          <p:cNvSpPr txBox="1"/>
-          <p:nvPr/>
-        </p:nvSpPr>
-        <p:spPr>
-          <a:xfrm>
-            <a:off x="819150" y="2762250"/>
-            <a:ext cx="2190750" cy="571500"/>
-          </a:xfrm>
-          <a:prstGeom prst="rect">
-            <a:avLst/>
-          </a:prstGeom>
-          <a:noFill/>
-        </p:spPr>
-        <p:txBody>
-          <a:bodyPr wrap="square" lIns="0" rIns="0" tIns="0" bIns="0" anchor="t">
-            <a:spAutoFit/>
-          </a:bodyPr>
-          <a:lstStyle/>
-          <a:p>
-            <a:pPr algn="l">
-              <a:lnSpc>
-                <a:spcPct val="124200"/>
-              </a:lnSpc>
-            </a:pPr>
-            <a:r>
-              <a:rPr sz="1425" b="1">
-                <a:solidFill>
-                  <a:srgbClr val="16161A"/>
-                </a:solidFill>
-                <a:latin typeface="Pretendard"/>
-                <a:ea typeface="Pretendard"/>
-                <a:cs typeface="Pretendard"/>
-              </a:rPr>
-              <a:t>Claude Code 한 세션</a:t>
-            </a:r>
-          </a:p>
-        </p:txBody>
-      </p:sp>
-      <p:sp>
-        <p:nvSpPr>
-          <p:cNvPr id="10" name="TextBox 9"/>
-          <p:cNvSpPr txBox="1"/>
-          <p:nvPr/>
-        </p:nvSpPr>
-        <p:spPr>
-          <a:xfrm>
-            <a:off x="819150" y="3295650"/>
-            <a:ext cx="2190750" cy="476250"/>
-          </a:xfrm>
-          <a:prstGeom prst="rect">
-            <a:avLst/>
-          </a:prstGeom>
-          <a:noFill/>
-        </p:spPr>
-        <p:txBody>
-          <a:bodyPr wrap="square" lIns="0" rIns="0" tIns="0" bIns="0" anchor="t">
-            <a:spAutoFit/>
-          </a:bodyPr>
-          <a:lstStyle/>
-          <a:p>
-            <a:pPr algn="l">
-              <a:lnSpc>
-                <a:spcPct val="124200"/>
-              </a:lnSpc>
-            </a:pPr>
-            <a:r>
-              <a:rPr sz="1125" b="0">
-                <a:solidFill>
-                  <a:srgbClr val="47474D"/>
-                </a:solidFill>
-                <a:latin typeface="Pretendard"/>
-                <a:ea typeface="Pretendard"/>
-                <a:cs typeface="Pretendard"/>
-              </a:rPr>
-              <a:t>한 사람</a:t>
-            </a:r>
-          </a:p>
-        </p:txBody>
-      </p:sp>
-      <p:sp>
-        <p:nvSpPr>
-          <p:cNvPr id="11" name="Rounded Rectangle 10"/>
-          <p:cNvSpPr/>
-          <p:nvPr/>
-        </p:nvSpPr>
-        <p:spPr>
-          <a:xfrm>
-            <a:off x="3390900" y="1962150"/>
-            <a:ext cx="2590800" cy="1905000"/>
-          </a:xfrm>
-          <a:prstGeom prst="roundRect">
-            <a:avLst>
-              <a:gd name="adj" fmla="val 3000"/>
-            </a:avLst>
-          </a:prstGeom>
-          <a:solidFill>
-            <a:srgbClr val="FFFFFD"/>
-          </a:solidFill>
-          <a:ln w="9525">
-            <a:solidFill>
-              <a:srgbClr val="DEDCD5"/>
-            </a:solidFill>
-          </a:ln>
-          <a:effectLst/>
-        </p:spPr>
-        <p:style>
-          <a:lnRef idx="1">
-            <a:schemeClr val="accent1"/>
-          </a:lnRef>
-          <a:fillRef idx="3">
-            <a:schemeClr val="accent1"/>
-          </a:fillRef>
-          <a:effectRef idx="2">
-            <a:schemeClr val="accent1"/>
-          </a:effectRef>
-          <a:fontRef idx="minor">
-            <a:schemeClr val="lt1"/>
-          </a:fontRef>
-        </p:style>
-        <p:txBody>
-          <a:bodyPr rtlCol="0" anchor="ctr"/>
-          <a:lstStyle/>
-          <a:p>
-            <a:pPr algn="ctr"/>
-          </a:p>
-        </p:txBody>
-      </p:sp>
-      <p:sp>
-        <p:nvSpPr>
-          <p:cNvPr id="12" name="TextBox 11"/>
-          <p:cNvSpPr txBox="1"/>
-          <p:nvPr/>
-        </p:nvSpPr>
-        <p:spPr>
-          <a:xfrm>
-            <a:off x="3600450" y="2152650"/>
-            <a:ext cx="571500" cy="476250"/>
-          </a:xfrm>
-          <a:prstGeom prst="rect">
-            <a:avLst/>
-          </a:prstGeom>
-          <a:noFill/>
-        </p:spPr>
-        <p:txBody>
-          <a:bodyPr wrap="square" lIns="0" rIns="0" tIns="0" bIns="0" anchor="t">
-            <a:spAutoFit/>
-          </a:bodyPr>
-          <a:lstStyle/>
-          <a:p>
-            <a:pPr algn="l">
-              <a:lnSpc>
-                <a:spcPct val="124200"/>
-              </a:lnSpc>
-            </a:pPr>
-            <a:r>
-              <a:rPr sz="3000" b="1">
-                <a:solidFill>
-                  <a:srgbClr val="2A78D6"/>
-                </a:solidFill>
-                <a:latin typeface="Pretendard"/>
-                <a:ea typeface="Pretendard"/>
-                <a:cs typeface="Pretendard"/>
-              </a:rPr>
-              <a:t>B</a:t>
-            </a:r>
-          </a:p>
-        </p:txBody>
-      </p:sp>
-      <p:sp>
-        <p:nvSpPr>
-          <p:cNvPr id="13" name="TextBox 12"/>
-          <p:cNvSpPr txBox="1"/>
-          <p:nvPr/>
-        </p:nvSpPr>
-        <p:spPr>
-          <a:xfrm>
-            <a:off x="3600450" y="2762250"/>
-            <a:ext cx="2190750" cy="571500"/>
-          </a:xfrm>
-          <a:prstGeom prst="rect">
-            <a:avLst/>
-          </a:prstGeom>
-          <a:noFill/>
-        </p:spPr>
-        <p:txBody>
-          <a:bodyPr wrap="square" lIns="0" rIns="0" tIns="0" bIns="0" anchor="t">
-            <a:spAutoFit/>
-          </a:bodyPr>
-          <a:lstStyle/>
-          <a:p>
-            <a:pPr algn="l">
-              <a:lnSpc>
-                <a:spcPct val="124200"/>
-              </a:lnSpc>
-            </a:pPr>
-            <a:r>
-              <a:rPr sz="1425" b="1">
-                <a:solidFill>
-                  <a:srgbClr val="16161A"/>
-                </a:solidFill>
-                <a:latin typeface="Pretendard"/>
-                <a:ea typeface="Pretendard"/>
-                <a:cs typeface="Pretendard"/>
-              </a:rPr>
-              <a:t>Claude Code agent teams</a:t>
-            </a:r>
-          </a:p>
-        </p:txBody>
-      </p:sp>
-      <p:sp>
-        <p:nvSpPr>
-          <p:cNvPr id="14" name="TextBox 13"/>
-          <p:cNvSpPr txBox="1"/>
-          <p:nvPr/>
-        </p:nvSpPr>
-        <p:spPr>
-          <a:xfrm>
-            <a:off x="3600450" y="3295650"/>
-            <a:ext cx="2190750" cy="476250"/>
-          </a:xfrm>
-          <a:prstGeom prst="rect">
-            <a:avLst/>
-          </a:prstGeom>
-          <a:noFill/>
-        </p:spPr>
-        <p:txBody>
-          <a:bodyPr wrap="square" lIns="0" rIns="0" tIns="0" bIns="0" anchor="t">
-            <a:spAutoFit/>
-          </a:bodyPr>
-          <a:lstStyle/>
-          <a:p>
-            <a:pPr algn="l">
-              <a:lnSpc>
-                <a:spcPct val="124200"/>
-              </a:lnSpc>
-            </a:pPr>
-            <a:r>
-              <a:rPr sz="1125" b="0">
-                <a:solidFill>
-                  <a:srgbClr val="47474D"/>
-                </a:solidFill>
-                <a:latin typeface="Pretendard"/>
-                <a:ea typeface="Pretendard"/>
-                <a:cs typeface="Pretendard"/>
-              </a:rPr>
-              <a:t>FE, BE 팀원, 한 사람</a:t>
-            </a:r>
-          </a:p>
-        </p:txBody>
-      </p:sp>
-      <p:sp>
-        <p:nvSpPr>
-          <p:cNvPr id="15" name="Rounded Rectangle 14"/>
-          <p:cNvSpPr/>
-          <p:nvPr/>
-        </p:nvSpPr>
-        <p:spPr>
-          <a:xfrm>
-            <a:off x="6172200" y="1962150"/>
-            <a:ext cx="2590800" cy="1905000"/>
-          </a:xfrm>
-          <a:prstGeom prst="roundRect">
-            <a:avLst>
-              <a:gd name="adj" fmla="val 3000"/>
-            </a:avLst>
-          </a:prstGeom>
-          <a:solidFill>
-            <a:srgbClr val="FFFFFD"/>
-          </a:solidFill>
-          <a:ln w="9525">
-            <a:solidFill>
-              <a:srgbClr val="DEDCD5"/>
-            </a:solidFill>
-          </a:ln>
-          <a:effectLst/>
-        </p:spPr>
-        <p:style>
-          <a:lnRef idx="1">
-            <a:schemeClr val="accent1"/>
-          </a:lnRef>
-          <a:fillRef idx="3">
-            <a:schemeClr val="accent1"/>
-          </a:fillRef>
-          <a:effectRef idx="2">
-            <a:schemeClr val="accent1"/>
-          </a:effectRef>
-          <a:fontRef idx="minor">
-            <a:schemeClr val="lt1"/>
-          </a:fontRef>
-        </p:style>
-        <p:txBody>
-          <a:bodyPr rtlCol="0" anchor="ctr"/>
-          <a:lstStyle/>
-          <a:p>
-            <a:pPr algn="ctr"/>
-          </a:p>
-        </p:txBody>
-      </p:sp>
-      <p:sp>
-        <p:nvSpPr>
-          <p:cNvPr id="16" name="TextBox 15"/>
-          <p:cNvSpPr txBox="1"/>
-          <p:nvPr/>
-        </p:nvSpPr>
-        <p:spPr>
-          <a:xfrm>
-            <a:off x="6381750" y="2152650"/>
-            <a:ext cx="571500" cy="476250"/>
-          </a:xfrm>
-          <a:prstGeom prst="rect">
-            <a:avLst/>
-          </a:prstGeom>
-          <a:noFill/>
-        </p:spPr>
-        <p:txBody>
-          <a:bodyPr wrap="square" lIns="0" rIns="0" tIns="0" bIns="0" anchor="t">
-            <a:spAutoFit/>
-          </a:bodyPr>
-          <a:lstStyle/>
-          <a:p>
-            <a:pPr algn="l">
-              <a:lnSpc>
-                <a:spcPct val="124200"/>
-              </a:lnSpc>
-            </a:pPr>
-            <a:r>
-              <a:rPr sz="3000" b="1">
-                <a:solidFill>
-                  <a:srgbClr val="2A78D6"/>
-                </a:solidFill>
-                <a:latin typeface="Pretendard"/>
-                <a:ea typeface="Pretendard"/>
-                <a:cs typeface="Pretendard"/>
-              </a:rPr>
-              <a:t>C</a:t>
-            </a:r>
-          </a:p>
-        </p:txBody>
-      </p:sp>
-      <p:sp>
-        <p:nvSpPr>
-          <p:cNvPr id="17" name="TextBox 16"/>
-          <p:cNvSpPr txBox="1"/>
-          <p:nvPr/>
-        </p:nvSpPr>
-        <p:spPr>
-          <a:xfrm>
-            <a:off x="6381750" y="2762250"/>
-            <a:ext cx="2190750" cy="571500"/>
-          </a:xfrm>
-          <a:prstGeom prst="rect">
-            <a:avLst/>
-          </a:prstGeom>
-          <a:noFill/>
-        </p:spPr>
-        <p:txBody>
-          <a:bodyPr wrap="square" lIns="0" rIns="0" tIns="0" bIns="0" anchor="t">
-            <a:spAutoFit/>
-          </a:bodyPr>
-          <a:lstStyle/>
-          <a:p>
-            <a:pPr algn="l">
-              <a:lnSpc>
-                <a:spcPct val="124200"/>
-              </a:lnSpc>
-            </a:pPr>
-            <a:r>
-              <a:rPr sz="1425" b="1">
-                <a:solidFill>
-                  <a:srgbClr val="16161A"/>
-                </a:solidFill>
-                <a:latin typeface="Pretendard"/>
-                <a:ea typeface="Pretendard"/>
-                <a:cs typeface="Pretendard"/>
-              </a:rPr>
-              <a:t>NOMOS, 질문 중계 끔</a:t>
-            </a:r>
-          </a:p>
-        </p:txBody>
-      </p:sp>
-      <p:sp>
-        <p:nvSpPr>
-          <p:cNvPr id="18" name="TextBox 17"/>
-          <p:cNvSpPr txBox="1"/>
-          <p:nvPr/>
-        </p:nvSpPr>
-        <p:spPr>
-          <a:xfrm>
-            <a:off x="6381750" y="3295650"/>
-            <a:ext cx="2190750" cy="476250"/>
-          </a:xfrm>
-          <a:prstGeom prst="rect">
-            <a:avLst/>
-          </a:prstGeom>
-          <a:noFill/>
-        </p:spPr>
-        <p:txBody>
-          <a:bodyPr wrap="square" lIns="0" rIns="0" tIns="0" bIns="0" anchor="t">
-            <a:spAutoFit/>
-          </a:bodyPr>
-          <a:lstStyle/>
-          <a:p>
-            <a:pPr algn="l">
-              <a:lnSpc>
-                <a:spcPct val="124200"/>
-              </a:lnSpc>
-            </a:pPr>
-            <a:r>
-              <a:rPr sz="1125" b="0">
-                <a:solidFill>
-                  <a:srgbClr val="47474D"/>
-                </a:solidFill>
-                <a:latin typeface="Pretendard"/>
-                <a:ea typeface="Pretendard"/>
-                <a:cs typeface="Pretendard"/>
-              </a:rPr>
-              <a:t>가정하고 진행(대조군)</a:t>
-            </a:r>
-          </a:p>
-        </p:txBody>
-      </p:sp>
-      <p:sp>
-        <p:nvSpPr>
-          <p:cNvPr id="19" name="Rounded Rectangle 18"/>
-          <p:cNvSpPr/>
-          <p:nvPr/>
-        </p:nvSpPr>
-        <p:spPr>
-          <a:xfrm>
-            <a:off x="8953500" y="1962150"/>
-            <a:ext cx="2590800" cy="1905000"/>
-          </a:xfrm>
-          <a:prstGeom prst="roundRect">
-            <a:avLst>
-              <a:gd name="adj" fmla="val 3000"/>
-            </a:avLst>
-          </a:prstGeom>
-          <a:solidFill>
-            <a:srgbClr val="E3EDFA"/>
-          </a:solidFill>
-          <a:ln w="9525">
-            <a:solidFill>
-              <a:srgbClr val="DEDCD5"/>
-            </a:solidFill>
-          </a:ln>
-          <a:effectLst/>
-        </p:spPr>
-        <p:style>
-          <a:lnRef idx="1">
-            <a:schemeClr val="accent1"/>
-          </a:lnRef>
-          <a:fillRef idx="3">
-            <a:schemeClr val="accent1"/>
-          </a:fillRef>
-          <a:effectRef idx="2">
-            <a:schemeClr val="accent1"/>
-          </a:effectRef>
-          <a:fontRef idx="minor">
-            <a:schemeClr val="lt1"/>
-          </a:fontRef>
-        </p:style>
-        <p:txBody>
-          <a:bodyPr rtlCol="0" anchor="ctr"/>
-          <a:lstStyle/>
-          <a:p>
-            <a:pPr algn="ctr"/>
-          </a:p>
-        </p:txBody>
-      </p:sp>
-      <p:sp>
-        <p:nvSpPr>
-          <p:cNvPr id="20" name="TextBox 19"/>
-          <p:cNvSpPr txBox="1"/>
-          <p:nvPr/>
-        </p:nvSpPr>
-        <p:spPr>
-          <a:xfrm>
-            <a:off x="9163050" y="2152650"/>
-            <a:ext cx="571500" cy="476250"/>
-          </a:xfrm>
-          <a:prstGeom prst="rect">
-            <a:avLst/>
-          </a:prstGeom>
-          <a:noFill/>
-        </p:spPr>
-        <p:txBody>
-          <a:bodyPr wrap="square" lIns="0" rIns="0" tIns="0" bIns="0" anchor="t">
-            <a:spAutoFit/>
-          </a:bodyPr>
-          <a:lstStyle/>
-          <a:p>
-            <a:pPr algn="l">
-              <a:lnSpc>
-                <a:spcPct val="124200"/>
-              </a:lnSpc>
-            </a:pPr>
-            <a:r>
-              <a:rPr sz="3000" b="1">
-                <a:solidFill>
-                  <a:srgbClr val="2A78D6"/>
-                </a:solidFill>
-                <a:latin typeface="Pretendard"/>
-                <a:ea typeface="Pretendard"/>
-                <a:cs typeface="Pretendard"/>
-              </a:rPr>
-              <a:t>D</a:t>
-            </a:r>
-          </a:p>
-        </p:txBody>
-      </p:sp>
-      <p:sp>
-        <p:nvSpPr>
-          <p:cNvPr id="21" name="TextBox 20"/>
-          <p:cNvSpPr txBox="1"/>
-          <p:nvPr/>
-        </p:nvSpPr>
-        <p:spPr>
-          <a:xfrm>
-            <a:off x="9163050" y="2762250"/>
-            <a:ext cx="2190750" cy="571500"/>
-          </a:xfrm>
-          <a:prstGeom prst="rect">
-            <a:avLst/>
-          </a:prstGeom>
-          <a:noFill/>
-        </p:spPr>
-        <p:txBody>
-          <a:bodyPr wrap="square" lIns="0" rIns="0" tIns="0" bIns="0" anchor="t">
-            <a:spAutoFit/>
-          </a:bodyPr>
-          <a:lstStyle/>
-          <a:p>
-            <a:pPr algn="l">
-              <a:lnSpc>
-                <a:spcPct val="124200"/>
-              </a:lnSpc>
-            </a:pPr>
-            <a:r>
-              <a:rPr sz="1425" b="1">
-                <a:solidFill>
-                  <a:srgbClr val="16161A"/>
-                </a:solidFill>
-                <a:latin typeface="Pretendard"/>
-                <a:ea typeface="Pretendard"/>
-                <a:cs typeface="Pretendard"/>
-              </a:rPr>
-              <a:t>NOMOS, 질문 중계 켬</a:t>
-            </a:r>
-          </a:p>
-        </p:txBody>
-      </p:sp>
-      <p:sp>
-        <p:nvSpPr>
-          <p:cNvPr id="22" name="TextBox 21"/>
-          <p:cNvSpPr txBox="1"/>
-          <p:nvPr/>
-        </p:nvSpPr>
-        <p:spPr>
-          <a:xfrm>
-            <a:off x="9163050" y="3295650"/>
-            <a:ext cx="2190750" cy="476250"/>
-          </a:xfrm>
-          <a:prstGeom prst="rect">
-            <a:avLst/>
-          </a:prstGeom>
-          <a:noFill/>
-        </p:spPr>
-        <p:txBody>
-          <a:bodyPr wrap="square" lIns="0" rIns="0" tIns="0" bIns="0" anchor="t">
-            <a:spAutoFit/>
-          </a:bodyPr>
-          <a:lstStyle/>
-          <a:p>
-            <a:pPr algn="l">
-              <a:lnSpc>
-                <a:spcPct val="124200"/>
-              </a:lnSpc>
-            </a:pPr>
-            <a:r>
-              <a:rPr sz="1125" b="0">
-                <a:solidFill>
-                  <a:srgbClr val="47474D"/>
-                </a:solidFill>
-                <a:latin typeface="Pretendard"/>
-                <a:ea typeface="Pretendard"/>
-                <a:cs typeface="Pretendard"/>
-              </a:rPr>
-              <a:t>owner 라우터 v2 + 최소 계약 먼저</a:t>
-            </a:r>
-          </a:p>
-        </p:txBody>
-      </p:sp>
-      <p:sp>
-        <p:nvSpPr>
-          <p:cNvPr id="23" name="TextBox 22"/>
-          <p:cNvSpPr txBox="1"/>
-          <p:nvPr/>
-        </p:nvSpPr>
-        <p:spPr>
-          <a:xfrm>
-            <a:off x="609600" y="4191000"/>
-            <a:ext cx="5715000" cy="285750"/>
-          </a:xfrm>
-          <a:prstGeom prst="rect">
-            <a:avLst/>
-          </a:prstGeom>
-          <a:noFill/>
-        </p:spPr>
-        <p:txBody>
-          <a:bodyPr wrap="square" lIns="0" rIns="0" tIns="0" bIns="0" anchor="t">
-            <a:spAutoFit/>
-          </a:bodyPr>
-          <a:lstStyle/>
-          <a:p>
-            <a:pPr algn="l">
-              <a:lnSpc>
-                <a:spcPct val="124200"/>
-              </a:lnSpc>
-            </a:pPr>
-            <a:r>
-              <a:rPr sz="1200" b="1">
-                <a:solidFill>
-                  <a:srgbClr val="7A7A80"/>
-                </a:solidFill>
-                <a:latin typeface="Pretendard"/>
-                <a:ea typeface="Pretendard"/>
-                <a:cs typeface="Pretendard"/>
-              </a:rPr>
-              <a:t>지표 네 개로 고정</a:t>
-            </a:r>
-          </a:p>
-        </p:txBody>
-      </p:sp>
-      <p:sp>
-        <p:nvSpPr>
-          <p:cNvPr id="24" name="Rectangle 23"/>
-          <p:cNvSpPr/>
-          <p:nvPr/>
-        </p:nvSpPr>
-        <p:spPr>
-          <a:xfrm>
-            <a:off x="609600" y="4572000"/>
-            <a:ext cx="2590800" cy="9525"/>
+            <a:off x="609600" y="2209800"/>
+            <a:ext cx="3200400" cy="9525"/>
           </a:xfrm>
           <a:prstGeom prst="rect">
             <a:avLst/>
@@ -6596,14 +5983,14 @@
       </p:sp>
       <p:sp>
         <p:nvSpPr>
-          <p:cNvPr id="25" name="TextBox 24"/>
-          <p:cNvSpPr txBox="1"/>
-          <p:nvPr/>
-        </p:nvSpPr>
-        <p:spPr>
-          <a:xfrm>
-            <a:off x="609600" y="4705350"/>
-            <a:ext cx="2590800" cy="381000"/>
+          <p:cNvPr id="9" name="TextBox 8"/>
+          <p:cNvSpPr txBox="1"/>
+          <p:nvPr/>
+        </p:nvSpPr>
+        <p:spPr>
+          <a:xfrm>
+            <a:off x="609600" y="2343150"/>
+            <a:ext cx="3238500" cy="571500"/>
           </a:xfrm>
           <a:prstGeom prst="rect">
             <a:avLst/>
@@ -6622,44 +6009,44 @@
               </a:lnSpc>
             </a:pPr>
             <a:r>
-              <a:rPr sz="1650" b="1">
-                <a:solidFill>
-                  <a:srgbClr val="16161A"/>
-                </a:solidFill>
-                <a:latin typeface="Pretendard"/>
-                <a:ea typeface="Pretendard"/>
-                <a:cs typeface="Pretendard"/>
-              </a:rPr>
-              <a:t>과제 성공</a:t>
-            </a:r>
-          </a:p>
-        </p:txBody>
-      </p:sp>
-      <p:sp>
-        <p:nvSpPr>
-          <p:cNvPr id="26" name="TextBox 25"/>
-          <p:cNvSpPr txBox="1"/>
-          <p:nvPr/>
-        </p:nvSpPr>
-        <p:spPr>
-          <a:xfrm>
-            <a:off x="609600" y="5105400"/>
-            <a:ext cx="2590800" cy="381000"/>
-          </a:xfrm>
-          <a:prstGeom prst="rect">
-            <a:avLst/>
-          </a:prstGeom>
-          <a:noFill/>
-        </p:spPr>
-        <p:txBody>
-          <a:bodyPr wrap="square" lIns="0" rIns="0" tIns="0" bIns="0" anchor="t">
-            <a:spAutoFit/>
-          </a:bodyPr>
-          <a:lstStyle/>
-          <a:p>
-            <a:pPr algn="l">
-              <a:lnSpc>
-                <a:spcPct val="124200"/>
+              <a:rPr sz="3900" b="1">
+                <a:solidFill>
+                  <a:srgbClr val="EB6834"/>
+                </a:solidFill>
+                <a:latin typeface="Pretendard"/>
+                <a:ea typeface="Pretendard"/>
+                <a:cs typeface="Pretendard"/>
+              </a:rPr>
+              <a:t>46%</a:t>
+            </a:r>
+          </a:p>
+        </p:txBody>
+      </p:sp>
+      <p:sp>
+        <p:nvSpPr>
+          <p:cNvPr id="10" name="TextBox 9"/>
+          <p:cNvSpPr txBox="1"/>
+          <p:nvPr/>
+        </p:nvSpPr>
+        <p:spPr>
+          <a:xfrm>
+            <a:off x="609600" y="3009900"/>
+            <a:ext cx="3238500" cy="762000"/>
+          </a:xfrm>
+          <a:prstGeom prst="rect">
+            <a:avLst/>
+          </a:prstGeom>
+          <a:noFill/>
+        </p:spPr>
+        <p:txBody>
+          <a:bodyPr wrap="square" lIns="0" rIns="0" tIns="0" bIns="0" anchor="t">
+            <a:spAutoFit/>
+          </a:bodyPr>
+          <a:lstStyle/>
+          <a:p>
+            <a:pPr algn="l">
+              <a:lnSpc>
+                <a:spcPct val="138000"/>
               </a:lnSpc>
             </a:pPr>
             <a:r>
@@ -6671,21 +6058,21 @@
                 <a:ea typeface="Pretendard"/>
                 <a:cs typeface="Pretendard"/>
               </a:rPr>
-              <a:t>인수 테스트 통과</a:t>
-            </a:r>
-          </a:p>
-        </p:txBody>
-      </p:sp>
-      <p:sp>
-        <p:nvSpPr>
-          <p:cNvPr id="27" name="Rectangle 26"/>
+              <a:t>공개 웹앱 8개 레포에서 OpenAPI 스펙을 바꾼 커밋 중 깨지는 변경이 있는 비율(95% 구간 38~54%)</a:t>
+            </a:r>
+          </a:p>
+        </p:txBody>
+      </p:sp>
+      <p:sp>
+        <p:nvSpPr>
+          <p:cNvPr id="11" name="Rectangle 10"/>
           <p:cNvSpPr/>
           <p:nvPr/>
         </p:nvSpPr>
         <p:spPr>
           <a:xfrm>
-            <a:off x="3390900" y="4572000"/>
-            <a:ext cx="2590800" cy="9525"/>
+            <a:off x="609600" y="4000500"/>
+            <a:ext cx="3200400" cy="9525"/>
           </a:xfrm>
           <a:prstGeom prst="rect">
             <a:avLst/>
@@ -6722,14 +6109,14 @@
       </p:sp>
       <p:sp>
         <p:nvSpPr>
-          <p:cNvPr id="28" name="TextBox 27"/>
-          <p:cNvSpPr txBox="1"/>
-          <p:nvPr/>
-        </p:nvSpPr>
-        <p:spPr>
-          <a:xfrm>
-            <a:off x="3390900" y="4705350"/>
-            <a:ext cx="2590800" cy="381000"/>
+          <p:cNvPr id="12" name="TextBox 11"/>
+          <p:cNvSpPr txBox="1"/>
+          <p:nvPr/>
+        </p:nvSpPr>
+        <p:spPr>
+          <a:xfrm>
+            <a:off x="609600" y="4133850"/>
+            <a:ext cx="3238500" cy="571500"/>
           </a:xfrm>
           <a:prstGeom prst="rect">
             <a:avLst/>
@@ -6748,44 +6135,44 @@
               </a:lnSpc>
             </a:pPr>
             <a:r>
-              <a:rPr sz="1650" b="1">
-                <a:solidFill>
-                  <a:srgbClr val="16161A"/>
-                </a:solidFill>
-                <a:latin typeface="Pretendard"/>
-                <a:ea typeface="Pretendard"/>
-                <a:cs typeface="Pretendard"/>
-              </a:rPr>
-              <a:t>완료 시간</a:t>
-            </a:r>
-          </a:p>
-        </p:txBody>
-      </p:sp>
-      <p:sp>
-        <p:nvSpPr>
-          <p:cNvPr id="29" name="TextBox 28"/>
-          <p:cNvSpPr txBox="1"/>
-          <p:nvPr/>
-        </p:nvSpPr>
-        <p:spPr>
-          <a:xfrm>
-            <a:off x="3390900" y="5105400"/>
-            <a:ext cx="2590800" cy="381000"/>
-          </a:xfrm>
-          <a:prstGeom prst="rect">
-            <a:avLst/>
-          </a:prstGeom>
-          <a:noFill/>
-        </p:spPr>
-        <p:txBody>
-          <a:bodyPr wrap="square" lIns="0" rIns="0" tIns="0" bIns="0" anchor="t">
-            <a:spAutoFit/>
-          </a:bodyPr>
-          <a:lstStyle/>
-          <a:p>
-            <a:pPr algn="l">
-              <a:lnSpc>
-                <a:spcPct val="124200"/>
+              <a:rPr sz="3900" b="1">
+                <a:solidFill>
+                  <a:srgbClr val="EB6834"/>
+                </a:solidFill>
+                <a:latin typeface="Pretendard"/>
+                <a:ea typeface="Pretendard"/>
+                <a:cs typeface="Pretendard"/>
+              </a:rPr>
+              <a:t>74%</a:t>
+            </a:r>
+          </a:p>
+        </p:txBody>
+      </p:sp>
+      <p:sp>
+        <p:nvSpPr>
+          <p:cNvPr id="13" name="TextBox 12"/>
+          <p:cNvSpPr txBox="1"/>
+          <p:nvPr/>
+        </p:nvSpPr>
+        <p:spPr>
+          <a:xfrm>
+            <a:off x="609600" y="4800600"/>
+            <a:ext cx="3238500" cy="762000"/>
+          </a:xfrm>
+          <a:prstGeom prst="rect">
+            <a:avLst/>
+          </a:prstGeom>
+          <a:noFill/>
+        </p:spPr>
+        <p:txBody>
+          <a:bodyPr wrap="square" lIns="0" rIns="0" tIns="0" bIns="0" anchor="t">
+            <a:spAutoFit/>
+          </a:bodyPr>
+          <a:lstStyle/>
+          <a:p>
+            <a:pPr algn="l">
+              <a:lnSpc>
+                <a:spcPct val="138000"/>
               </a:lnSpc>
             </a:pPr>
             <a:r>
@@ -6797,21 +6184,21 @@
                 <a:ea typeface="Pretendard"/>
                 <a:cs typeface="Pretendard"/>
               </a:rPr>
-              <a:t>시작부터 끝까지</a:t>
-            </a:r>
-          </a:p>
-        </p:txBody>
-      </p:sp>
-      <p:sp>
-        <p:nvSpPr>
-          <p:cNvPr id="30" name="Rectangle 29"/>
+              <a:t>리뷰에서 지적된 FE와 BE 계약 불일치 중 백엔드 쪽이 깨뜨린 비율</a:t>
+            </a:r>
+          </a:p>
+        </p:txBody>
+      </p:sp>
+      <p:sp>
+        <p:nvSpPr>
+          <p:cNvPr id="14" name="Rectangle 13"/>
           <p:cNvSpPr/>
           <p:nvPr/>
         </p:nvSpPr>
         <p:spPr>
           <a:xfrm>
-            <a:off x="6172200" y="4572000"/>
-            <a:ext cx="2590800" cy="9525"/>
+            <a:off x="4476750" y="1905000"/>
+            <a:ext cx="7105650" cy="9525"/>
           </a:xfrm>
           <a:prstGeom prst="rect">
             <a:avLst/>
@@ -6848,14 +6235,14 @@
       </p:sp>
       <p:sp>
         <p:nvSpPr>
-          <p:cNvPr id="31" name="TextBox 30"/>
-          <p:cNvSpPr txBox="1"/>
-          <p:nvPr/>
-        </p:nvSpPr>
-        <p:spPr>
-          <a:xfrm>
-            <a:off x="6172200" y="4705350"/>
-            <a:ext cx="2590800" cy="381000"/>
+          <p:cNvPr id="15" name="TextBox 14"/>
+          <p:cNvSpPr txBox="1"/>
+          <p:nvPr/>
+        </p:nvSpPr>
+        <p:spPr>
+          <a:xfrm>
+            <a:off x="4476750" y="2076450"/>
+            <a:ext cx="2095500" cy="476250"/>
           </a:xfrm>
           <a:prstGeom prst="rect">
             <a:avLst/>
@@ -6874,7 +6261,7 @@
               </a:lnSpc>
             </a:pPr>
             <a:r>
-              <a:rPr sz="1650" b="1">
+              <a:rPr sz="1350" b="1">
                 <a:solidFill>
                   <a:srgbClr val="16161A"/>
                 </a:solidFill>
@@ -6882,68 +6269,29 @@
                 <a:ea typeface="Pretendard"/>
                 <a:cs typeface="Pretendard"/>
               </a:rPr>
-              <a:t>토큰</a:t>
-            </a:r>
-          </a:p>
-        </p:txBody>
-      </p:sp>
-      <p:sp>
-        <p:nvSpPr>
-          <p:cNvPr id="32" name="TextBox 31"/>
-          <p:cNvSpPr txBox="1"/>
-          <p:nvPr/>
-        </p:nvSpPr>
-        <p:spPr>
-          <a:xfrm>
-            <a:off x="6172200" y="5105400"/>
-            <a:ext cx="2590800" cy="381000"/>
-          </a:xfrm>
-          <a:prstGeom prst="rect">
-            <a:avLst/>
-          </a:prstGeom>
-          <a:noFill/>
-        </p:spPr>
-        <p:txBody>
-          <a:bodyPr wrap="square" lIns="0" rIns="0" tIns="0" bIns="0" anchor="t">
-            <a:spAutoFit/>
-          </a:bodyPr>
-          <a:lstStyle/>
-          <a:p>
-            <a:pPr algn="l">
-              <a:lnSpc>
-                <a:spcPct val="124200"/>
-              </a:lnSpc>
-            </a:pPr>
-            <a:r>
-              <a:rPr sz="1125" b="0">
-                <a:solidFill>
-                  <a:srgbClr val="47474D"/>
-                </a:solidFill>
-                <a:latin typeface="Pretendard"/>
-                <a:ea typeface="Pretendard"/>
-                <a:cs typeface="Pretendard"/>
-              </a:rPr>
-              <a:t>비용</a:t>
-            </a:r>
-          </a:p>
-        </p:txBody>
-      </p:sp>
-      <p:sp>
-        <p:nvSpPr>
-          <p:cNvPr id="33" name="Rectangle 32"/>
+              <a:t>최소 계약 먼저</a:t>
+            </a:r>
+          </a:p>
+        </p:txBody>
+      </p:sp>
+      <p:sp>
+        <p:nvSpPr>
+          <p:cNvPr id="16" name="Rounded Rectangle 15"/>
           <p:cNvSpPr/>
           <p:nvPr/>
         </p:nvSpPr>
         <p:spPr>
           <a:xfrm>
-            <a:off x="8953500" y="4572000"/>
-            <a:ext cx="2590800" cy="9525"/>
-          </a:xfrm>
-          <a:prstGeom prst="rect">
-            <a:avLst/>
+            <a:off x="6667500" y="2076450"/>
+            <a:ext cx="609600" cy="285750"/>
+          </a:xfrm>
+          <a:prstGeom prst="roundRect">
+            <a:avLst>
+              <a:gd name="adj" fmla="val 50000"/>
+            </a:avLst>
           </a:prstGeom>
           <a:solidFill>
-            <a:srgbClr val="16161A"/>
+            <a:srgbClr val="EFEDE7"/>
           </a:solidFill>
           <a:ln>
             <a:noFill/>
@@ -6974,33 +6322,159 @@
       </p:sp>
       <p:sp>
         <p:nvSpPr>
-          <p:cNvPr id="34" name="TextBox 33"/>
-          <p:cNvSpPr txBox="1"/>
-          <p:nvPr/>
-        </p:nvSpPr>
-        <p:spPr>
-          <a:xfrm>
-            <a:off x="8953500" y="4705350"/>
-            <a:ext cx="2590800" cy="381000"/>
-          </a:xfrm>
-          <a:prstGeom prst="rect">
-            <a:avLst/>
-          </a:prstGeom>
-          <a:noFill/>
-        </p:spPr>
-        <p:txBody>
-          <a:bodyPr wrap="square" lIns="0" rIns="0" tIns="0" bIns="0" anchor="t">
-            <a:spAutoFit/>
-          </a:bodyPr>
-          <a:lstStyle/>
-          <a:p>
-            <a:pPr algn="l">
+          <p:cNvPr id="17" name="TextBox 16"/>
+          <p:cNvSpPr txBox="1"/>
+          <p:nvPr/>
+        </p:nvSpPr>
+        <p:spPr>
+          <a:xfrm>
+            <a:off x="6667500" y="2114550"/>
+            <a:ext cx="609600" cy="247650"/>
+          </a:xfrm>
+          <a:prstGeom prst="rect">
+            <a:avLst/>
+          </a:prstGeom>
+          <a:noFill/>
+        </p:spPr>
+        <p:txBody>
+          <a:bodyPr wrap="square" lIns="0" rIns="0" tIns="0" bIns="0" anchor="t">
+            <a:spAutoFit/>
+          </a:bodyPr>
+          <a:lstStyle/>
+          <a:p>
+            <a:pPr algn="ctr">
               <a:lnSpc>
                 <a:spcPct val="124200"/>
               </a:lnSpc>
             </a:pPr>
             <a:r>
-              <a:rPr sz="1650" b="1">
+              <a:rPr sz="975" b="1">
+                <a:solidFill>
+                  <a:srgbClr val="47474D"/>
+                </a:solidFill>
+                <a:latin typeface="Pretendard"/>
+                <a:ea typeface="Pretendard"/>
+                <a:cs typeface="Pretendard"/>
+              </a:rPr>
+              <a:t>동작</a:t>
+            </a:r>
+          </a:p>
+        </p:txBody>
+      </p:sp>
+      <p:sp>
+        <p:nvSpPr>
+          <p:cNvPr id="18" name="TextBox 17"/>
+          <p:cNvSpPr txBox="1"/>
+          <p:nvPr/>
+        </p:nvSpPr>
+        <p:spPr>
+          <a:xfrm>
+            <a:off x="7467600" y="2057400"/>
+            <a:ext cx="4114800" cy="666750"/>
+          </a:xfrm>
+          <a:prstGeom prst="rect">
+            <a:avLst/>
+          </a:prstGeom>
+          <a:noFill/>
+        </p:spPr>
+        <p:txBody>
+          <a:bodyPr wrap="square" lIns="0" rIns="0" tIns="0" bIns="0" anchor="t">
+            <a:spAutoFit/>
+          </a:bodyPr>
+          <a:lstStyle/>
+          <a:p>
+            <a:pPr algn="l">
+              <a:lnSpc>
+                <a:spcPct val="138000"/>
+              </a:lnSpc>
+            </a:pPr>
+            <a:r>
+              <a:rPr sz="1125" b="0">
+                <a:solidFill>
+                  <a:srgbClr val="47474D"/>
+                </a:solidFill>
+                <a:latin typeface="Pretendard"/>
+                <a:ea typeface="Pretendard"/>
+                <a:cs typeface="Pretendard"/>
+              </a:rPr>
+              <a:t>계약만 보고 만들 수 있으면 병행, 아니면 '계약 확정' 태스크로 쪼개 상대는 거기에만 선행</a:t>
+            </a:r>
+          </a:p>
+        </p:txBody>
+      </p:sp>
+      <p:sp>
+        <p:nvSpPr>
+          <p:cNvPr id="19" name="Rectangle 18"/>
+          <p:cNvSpPr/>
+          <p:nvPr/>
+        </p:nvSpPr>
+        <p:spPr>
+          <a:xfrm>
+            <a:off x="4476750" y="2781300"/>
+            <a:ext cx="7105650" cy="9525"/>
+          </a:xfrm>
+          <a:prstGeom prst="rect">
+            <a:avLst/>
+          </a:prstGeom>
+          <a:solidFill>
+            <a:srgbClr val="DEDCD5"/>
+          </a:solidFill>
+          <a:ln>
+            <a:noFill/>
+          </a:ln>
+          <a:effectLst/>
+        </p:spPr>
+        <p:style>
+          <a:lnRef idx="1">
+            <a:schemeClr val="accent1"/>
+          </a:lnRef>
+          <a:fillRef idx="3">
+            <a:schemeClr val="accent1"/>
+          </a:fillRef>
+          <a:effectRef idx="2">
+            <a:schemeClr val="accent1"/>
+          </a:effectRef>
+          <a:fontRef idx="minor">
+            <a:schemeClr val="lt1"/>
+          </a:fontRef>
+        </p:style>
+        <p:txBody>
+          <a:bodyPr rtlCol="0" anchor="ctr"/>
+          <a:lstStyle/>
+          <a:p>
+            <a:pPr algn="ctr"/>
+          </a:p>
+        </p:txBody>
+      </p:sp>
+      <p:sp>
+        <p:nvSpPr>
+          <p:cNvPr id="20" name="TextBox 19"/>
+          <p:cNvSpPr txBox="1"/>
+          <p:nvPr/>
+        </p:nvSpPr>
+        <p:spPr>
+          <a:xfrm>
+            <a:off x="4476750" y="2952750"/>
+            <a:ext cx="2095500" cy="476250"/>
+          </a:xfrm>
+          <a:prstGeom prst="rect">
+            <a:avLst/>
+          </a:prstGeom>
+          <a:noFill/>
+        </p:spPr>
+        <p:txBody>
+          <a:bodyPr wrap="square" lIns="0" rIns="0" tIns="0" bIns="0" anchor="t">
+            <a:spAutoFit/>
+          </a:bodyPr>
+          <a:lstStyle/>
+          <a:p>
+            <a:pPr algn="l">
+              <a:lnSpc>
+                <a:spcPct val="124200"/>
+              </a:lnSpc>
+            </a:pPr>
+            <a:r>
+              <a:rPr sz="1350" b="1">
                 <a:solidFill>
                   <a:srgbClr val="16161A"/>
                 </a:solidFill>
@@ -7008,8 +6482,606 @@
                 <a:ea typeface="Pretendard"/>
                 <a:cs typeface="Pretendard"/>
               </a:rPr>
-              <a:t>결정 재작업</a:t>
-            </a:r>
+              <a:t>결정 기록</a:t>
+            </a:r>
+          </a:p>
+        </p:txBody>
+      </p:sp>
+      <p:sp>
+        <p:nvSpPr>
+          <p:cNvPr id="21" name="Rounded Rectangle 20"/>
+          <p:cNvSpPr/>
+          <p:nvPr/>
+        </p:nvSpPr>
+        <p:spPr>
+          <a:xfrm>
+            <a:off x="6667500" y="2952750"/>
+            <a:ext cx="609600" cy="285750"/>
+          </a:xfrm>
+          <a:prstGeom prst="roundRect">
+            <a:avLst>
+              <a:gd name="adj" fmla="val 50000"/>
+            </a:avLst>
+          </a:prstGeom>
+          <a:solidFill>
+            <a:srgbClr val="EFEDE7"/>
+          </a:solidFill>
+          <a:ln>
+            <a:noFill/>
+          </a:ln>
+          <a:effectLst/>
+        </p:spPr>
+        <p:style>
+          <a:lnRef idx="1">
+            <a:schemeClr val="accent1"/>
+          </a:lnRef>
+          <a:fillRef idx="3">
+            <a:schemeClr val="accent1"/>
+          </a:fillRef>
+          <a:effectRef idx="2">
+            <a:schemeClr val="accent1"/>
+          </a:effectRef>
+          <a:fontRef idx="minor">
+            <a:schemeClr val="lt1"/>
+          </a:fontRef>
+        </p:style>
+        <p:txBody>
+          <a:bodyPr rtlCol="0" anchor="ctr"/>
+          <a:lstStyle/>
+          <a:p>
+            <a:pPr algn="ctr"/>
+          </a:p>
+        </p:txBody>
+      </p:sp>
+      <p:sp>
+        <p:nvSpPr>
+          <p:cNvPr id="22" name="TextBox 21"/>
+          <p:cNvSpPr txBox="1"/>
+          <p:nvPr/>
+        </p:nvSpPr>
+        <p:spPr>
+          <a:xfrm>
+            <a:off x="6667500" y="2990850"/>
+            <a:ext cx="609600" cy="247650"/>
+          </a:xfrm>
+          <a:prstGeom prst="rect">
+            <a:avLst/>
+          </a:prstGeom>
+          <a:noFill/>
+        </p:spPr>
+        <p:txBody>
+          <a:bodyPr wrap="square" lIns="0" rIns="0" tIns="0" bIns="0" anchor="t">
+            <a:spAutoFit/>
+          </a:bodyPr>
+          <a:lstStyle/>
+          <a:p>
+            <a:pPr algn="ctr">
+              <a:lnSpc>
+                <a:spcPct val="124200"/>
+              </a:lnSpc>
+            </a:pPr>
+            <a:r>
+              <a:rPr sz="975" b="1">
+                <a:solidFill>
+                  <a:srgbClr val="47474D"/>
+                </a:solidFill>
+                <a:latin typeface="Pretendard"/>
+                <a:ea typeface="Pretendard"/>
+                <a:cs typeface="Pretendard"/>
+              </a:rPr>
+              <a:t>동작</a:t>
+            </a:r>
+          </a:p>
+        </p:txBody>
+      </p:sp>
+      <p:sp>
+        <p:nvSpPr>
+          <p:cNvPr id="23" name="TextBox 22"/>
+          <p:cNvSpPr txBox="1"/>
+          <p:nvPr/>
+        </p:nvSpPr>
+        <p:spPr>
+          <a:xfrm>
+            <a:off x="7467600" y="2933700"/>
+            <a:ext cx="4114800" cy="666750"/>
+          </a:xfrm>
+          <a:prstGeom prst="rect">
+            <a:avLst/>
+          </a:prstGeom>
+          <a:noFill/>
+        </p:spPr>
+        <p:txBody>
+          <a:bodyPr wrap="square" lIns="0" rIns="0" tIns="0" bIns="0" anchor="t">
+            <a:spAutoFit/>
+          </a:bodyPr>
+          <a:lstStyle/>
+          <a:p>
+            <a:pPr algn="l">
+              <a:lnSpc>
+                <a:spcPct val="138000"/>
+              </a:lnSpc>
+            </a:pPr>
+            <a:r>
+              <a:rPr sz="1125" b="0">
+                <a:solidFill>
+                  <a:srgbClr val="47474D"/>
+                </a:solidFill>
+                <a:latin typeface="Pretendard"/>
+                <a:ea typeface="Pretendard"/>
+                <a:cs typeface="Pretendard"/>
+              </a:rPr>
+              <a:t>확정은 DECIDED 노트로 전체 전달, 남의 소관을 가정했으면 '가정함, 확인 필요'</a:t>
+            </a:r>
+          </a:p>
+        </p:txBody>
+      </p:sp>
+      <p:sp>
+        <p:nvSpPr>
+          <p:cNvPr id="24" name="Rectangle 23"/>
+          <p:cNvSpPr/>
+          <p:nvPr/>
+        </p:nvSpPr>
+        <p:spPr>
+          <a:xfrm>
+            <a:off x="4476750" y="3657600"/>
+            <a:ext cx="7105650" cy="9525"/>
+          </a:xfrm>
+          <a:prstGeom prst="rect">
+            <a:avLst/>
+          </a:prstGeom>
+          <a:solidFill>
+            <a:srgbClr val="DEDCD5"/>
+          </a:solidFill>
+          <a:ln>
+            <a:noFill/>
+          </a:ln>
+          <a:effectLst/>
+        </p:spPr>
+        <p:style>
+          <a:lnRef idx="1">
+            <a:schemeClr val="accent1"/>
+          </a:lnRef>
+          <a:fillRef idx="3">
+            <a:schemeClr val="accent1"/>
+          </a:fillRef>
+          <a:effectRef idx="2">
+            <a:schemeClr val="accent1"/>
+          </a:effectRef>
+          <a:fontRef idx="minor">
+            <a:schemeClr val="lt1"/>
+          </a:fontRef>
+        </p:style>
+        <p:txBody>
+          <a:bodyPr rtlCol="0" anchor="ctr"/>
+          <a:lstStyle/>
+          <a:p>
+            <a:pPr algn="ctr"/>
+          </a:p>
+        </p:txBody>
+      </p:sp>
+      <p:sp>
+        <p:nvSpPr>
+          <p:cNvPr id="25" name="TextBox 24"/>
+          <p:cNvSpPr txBox="1"/>
+          <p:nvPr/>
+        </p:nvSpPr>
+        <p:spPr>
+          <a:xfrm>
+            <a:off x="4476750" y="3829050"/>
+            <a:ext cx="2095500" cy="476250"/>
+          </a:xfrm>
+          <a:prstGeom prst="rect">
+            <a:avLst/>
+          </a:prstGeom>
+          <a:noFill/>
+        </p:spPr>
+        <p:txBody>
+          <a:bodyPr wrap="square" lIns="0" rIns="0" tIns="0" bIns="0" anchor="t">
+            <a:spAutoFit/>
+          </a:bodyPr>
+          <a:lstStyle/>
+          <a:p>
+            <a:pPr algn="l">
+              <a:lnSpc>
+                <a:spcPct val="124200"/>
+              </a:lnSpc>
+            </a:pPr>
+            <a:r>
+              <a:rPr sz="1350" b="1">
+                <a:solidFill>
+                  <a:srgbClr val="16161A"/>
+                </a:solidFill>
+                <a:latin typeface="Pretendard"/>
+                <a:ea typeface="Pretendard"/>
+                <a:cs typeface="Pretendard"/>
+              </a:rPr>
+              <a:t>경로 소유와 diff 검사</a:t>
+            </a:r>
+          </a:p>
+        </p:txBody>
+      </p:sp>
+      <p:sp>
+        <p:nvSpPr>
+          <p:cNvPr id="26" name="Rounded Rectangle 25"/>
+          <p:cNvSpPr/>
+          <p:nvPr/>
+        </p:nvSpPr>
+        <p:spPr>
+          <a:xfrm>
+            <a:off x="6667500" y="3829050"/>
+            <a:ext cx="609600" cy="285750"/>
+          </a:xfrm>
+          <a:prstGeom prst="roundRect">
+            <a:avLst>
+              <a:gd name="adj" fmla="val 50000"/>
+            </a:avLst>
+          </a:prstGeom>
+          <a:solidFill>
+            <a:srgbClr val="EFEDE7"/>
+          </a:solidFill>
+          <a:ln>
+            <a:noFill/>
+          </a:ln>
+          <a:effectLst/>
+        </p:spPr>
+        <p:style>
+          <a:lnRef idx="1">
+            <a:schemeClr val="accent1"/>
+          </a:lnRef>
+          <a:fillRef idx="3">
+            <a:schemeClr val="accent1"/>
+          </a:fillRef>
+          <a:effectRef idx="2">
+            <a:schemeClr val="accent1"/>
+          </a:effectRef>
+          <a:fontRef idx="minor">
+            <a:schemeClr val="lt1"/>
+          </a:fontRef>
+        </p:style>
+        <p:txBody>
+          <a:bodyPr rtlCol="0" anchor="ctr"/>
+          <a:lstStyle/>
+          <a:p>
+            <a:pPr algn="ctr"/>
+          </a:p>
+        </p:txBody>
+      </p:sp>
+      <p:sp>
+        <p:nvSpPr>
+          <p:cNvPr id="27" name="TextBox 26"/>
+          <p:cNvSpPr txBox="1"/>
+          <p:nvPr/>
+        </p:nvSpPr>
+        <p:spPr>
+          <a:xfrm>
+            <a:off x="6667500" y="3867150"/>
+            <a:ext cx="609600" cy="247650"/>
+          </a:xfrm>
+          <a:prstGeom prst="rect">
+            <a:avLst/>
+          </a:prstGeom>
+          <a:noFill/>
+        </p:spPr>
+        <p:txBody>
+          <a:bodyPr wrap="square" lIns="0" rIns="0" tIns="0" bIns="0" anchor="t">
+            <a:spAutoFit/>
+          </a:bodyPr>
+          <a:lstStyle/>
+          <a:p>
+            <a:pPr algn="ctr">
+              <a:lnSpc>
+                <a:spcPct val="124200"/>
+              </a:lnSpc>
+            </a:pPr>
+            <a:r>
+              <a:rPr sz="975" b="1">
+                <a:solidFill>
+                  <a:srgbClr val="47474D"/>
+                </a:solidFill>
+                <a:latin typeface="Pretendard"/>
+                <a:ea typeface="Pretendard"/>
+                <a:cs typeface="Pretendard"/>
+              </a:rPr>
+              <a:t>동작</a:t>
+            </a:r>
+          </a:p>
+        </p:txBody>
+      </p:sp>
+      <p:sp>
+        <p:nvSpPr>
+          <p:cNvPr id="28" name="TextBox 27"/>
+          <p:cNvSpPr txBox="1"/>
+          <p:nvPr/>
+        </p:nvSpPr>
+        <p:spPr>
+          <a:xfrm>
+            <a:off x="7467600" y="3810000"/>
+            <a:ext cx="4114800" cy="666750"/>
+          </a:xfrm>
+          <a:prstGeom prst="rect">
+            <a:avLst/>
+          </a:prstGeom>
+          <a:noFill/>
+        </p:spPr>
+        <p:txBody>
+          <a:bodyPr wrap="square" lIns="0" rIns="0" tIns="0" bIns="0" anchor="t">
+            <a:spAutoFit/>
+          </a:bodyPr>
+          <a:lstStyle/>
+          <a:p>
+            <a:pPr algn="l">
+              <a:lnSpc>
+                <a:spcPct val="138000"/>
+              </a:lnSpc>
+            </a:pPr>
+            <a:r>
+              <a:rPr sz="1125" b="0">
+                <a:solidFill>
+                  <a:srgbClr val="47474D"/>
+                </a:solidFill>
+                <a:latin typeface="Pretendard"/>
+                <a:ea typeface="Pretendard"/>
+                <a:cs typeface="Pretendard"/>
+              </a:rPr>
+              <a:t>남의 영역 파일을 고친 커밋은 제출에서 반려(V3)</a:t>
+            </a:r>
+          </a:p>
+        </p:txBody>
+      </p:sp>
+      <p:sp>
+        <p:nvSpPr>
+          <p:cNvPr id="29" name="Rectangle 28"/>
+          <p:cNvSpPr/>
+          <p:nvPr/>
+        </p:nvSpPr>
+        <p:spPr>
+          <a:xfrm>
+            <a:off x="4476750" y="4533900"/>
+            <a:ext cx="7105650" cy="9525"/>
+          </a:xfrm>
+          <a:prstGeom prst="rect">
+            <a:avLst/>
+          </a:prstGeom>
+          <a:solidFill>
+            <a:srgbClr val="DEDCD5"/>
+          </a:solidFill>
+          <a:ln>
+            <a:noFill/>
+          </a:ln>
+          <a:effectLst/>
+        </p:spPr>
+        <p:style>
+          <a:lnRef idx="1">
+            <a:schemeClr val="accent1"/>
+          </a:lnRef>
+          <a:fillRef idx="3">
+            <a:schemeClr val="accent1"/>
+          </a:fillRef>
+          <a:effectRef idx="2">
+            <a:schemeClr val="accent1"/>
+          </a:effectRef>
+          <a:fontRef idx="minor">
+            <a:schemeClr val="lt1"/>
+          </a:fontRef>
+        </p:style>
+        <p:txBody>
+          <a:bodyPr rtlCol="0" anchor="ctr"/>
+          <a:lstStyle/>
+          <a:p>
+            <a:pPr algn="ctr"/>
+          </a:p>
+        </p:txBody>
+      </p:sp>
+      <p:sp>
+        <p:nvSpPr>
+          <p:cNvPr id="30" name="TextBox 29"/>
+          <p:cNvSpPr txBox="1"/>
+          <p:nvPr/>
+        </p:nvSpPr>
+        <p:spPr>
+          <a:xfrm>
+            <a:off x="4476750" y="4705350"/>
+            <a:ext cx="2095500" cy="476250"/>
+          </a:xfrm>
+          <a:prstGeom prst="rect">
+            <a:avLst/>
+          </a:prstGeom>
+          <a:noFill/>
+        </p:spPr>
+        <p:txBody>
+          <a:bodyPr wrap="square" lIns="0" rIns="0" tIns="0" bIns="0" anchor="t">
+            <a:spAutoFit/>
+          </a:bodyPr>
+          <a:lstStyle/>
+          <a:p>
+            <a:pPr algn="l">
+              <a:lnSpc>
+                <a:spcPct val="124200"/>
+              </a:lnSpc>
+            </a:pPr>
+            <a:r>
+              <a:rPr sz="1350" b="1">
+                <a:solidFill>
+                  <a:srgbClr val="16161A"/>
+                </a:solidFill>
+                <a:latin typeface="Pretendard"/>
+                <a:ea typeface="Pretendard"/>
+                <a:cs typeface="Pretendard"/>
+              </a:rPr>
+              <a:t>계약 대조(V1A)</a:t>
+            </a:r>
+          </a:p>
+        </p:txBody>
+      </p:sp>
+      <p:sp>
+        <p:nvSpPr>
+          <p:cNvPr id="31" name="Rounded Rectangle 30"/>
+          <p:cNvSpPr/>
+          <p:nvPr/>
+        </p:nvSpPr>
+        <p:spPr>
+          <a:xfrm>
+            <a:off x="6667500" y="4705350"/>
+            <a:ext cx="609600" cy="285750"/>
+          </a:xfrm>
+          <a:prstGeom prst="roundRect">
+            <a:avLst>
+              <a:gd name="adj" fmla="val 50000"/>
+            </a:avLst>
+          </a:prstGeom>
+          <a:solidFill>
+            <a:srgbClr val="EB6834"/>
+          </a:solidFill>
+          <a:ln>
+            <a:noFill/>
+          </a:ln>
+          <a:effectLst/>
+        </p:spPr>
+        <p:style>
+          <a:lnRef idx="1">
+            <a:schemeClr val="accent1"/>
+          </a:lnRef>
+          <a:fillRef idx="3">
+            <a:schemeClr val="accent1"/>
+          </a:fillRef>
+          <a:effectRef idx="2">
+            <a:schemeClr val="accent1"/>
+          </a:effectRef>
+          <a:fontRef idx="minor">
+            <a:schemeClr val="lt1"/>
+          </a:fontRef>
+        </p:style>
+        <p:txBody>
+          <a:bodyPr rtlCol="0" anchor="ctr"/>
+          <a:lstStyle/>
+          <a:p>
+            <a:pPr algn="ctr"/>
+          </a:p>
+        </p:txBody>
+      </p:sp>
+      <p:sp>
+        <p:nvSpPr>
+          <p:cNvPr id="32" name="TextBox 31"/>
+          <p:cNvSpPr txBox="1"/>
+          <p:nvPr/>
+        </p:nvSpPr>
+        <p:spPr>
+          <a:xfrm>
+            <a:off x="6667500" y="4743450"/>
+            <a:ext cx="609600" cy="247650"/>
+          </a:xfrm>
+          <a:prstGeom prst="rect">
+            <a:avLst/>
+          </a:prstGeom>
+          <a:noFill/>
+        </p:spPr>
+        <p:txBody>
+          <a:bodyPr wrap="square" lIns="0" rIns="0" tIns="0" bIns="0" anchor="t">
+            <a:spAutoFit/>
+          </a:bodyPr>
+          <a:lstStyle/>
+          <a:p>
+            <a:pPr algn="ctr">
+              <a:lnSpc>
+                <a:spcPct val="124200"/>
+              </a:lnSpc>
+            </a:pPr>
+            <a:r>
+              <a:rPr sz="975" b="1">
+                <a:solidFill>
+                  <a:srgbClr val="FFFFFF"/>
+                </a:solidFill>
+                <a:latin typeface="Pretendard"/>
+                <a:ea typeface="Pretendard"/>
+                <a:cs typeface="Pretendard"/>
+              </a:rPr>
+              <a:t>빈칸</a:t>
+            </a:r>
+          </a:p>
+        </p:txBody>
+      </p:sp>
+      <p:sp>
+        <p:nvSpPr>
+          <p:cNvPr id="33" name="TextBox 32"/>
+          <p:cNvSpPr txBox="1"/>
+          <p:nvPr/>
+        </p:nvSpPr>
+        <p:spPr>
+          <a:xfrm>
+            <a:off x="7467600" y="4686300"/>
+            <a:ext cx="4114800" cy="666750"/>
+          </a:xfrm>
+          <a:prstGeom prst="rect">
+            <a:avLst/>
+          </a:prstGeom>
+          <a:noFill/>
+        </p:spPr>
+        <p:txBody>
+          <a:bodyPr wrap="square" lIns="0" rIns="0" tIns="0" bIns="0" anchor="t">
+            <a:spAutoFit/>
+          </a:bodyPr>
+          <a:lstStyle/>
+          <a:p>
+            <a:pPr algn="l">
+              <a:lnSpc>
+                <a:spcPct val="138000"/>
+              </a:lnSpc>
+            </a:pPr>
+            <a:r>
+              <a:rPr sz="1125" b="0">
+                <a:solidFill>
+                  <a:srgbClr val="47474D"/>
+                </a:solidFill>
+                <a:latin typeface="Pretendard"/>
+                <a:ea typeface="Pretendard"/>
+                <a:cs typeface="Pretendard"/>
+              </a:rPr>
+              <a:t>실제 응답을 OpenAPI와 기계 비교. 계약을 담을 테이블이 없어 항상 SKIPPED</a:t>
+            </a:r>
+          </a:p>
+        </p:txBody>
+      </p:sp>
+      <p:sp>
+        <p:nvSpPr>
+          <p:cNvPr id="34" name="Rectangle 33"/>
+          <p:cNvSpPr/>
+          <p:nvPr/>
+        </p:nvSpPr>
+        <p:spPr>
+          <a:xfrm>
+            <a:off x="4476750" y="5410200"/>
+            <a:ext cx="7105650" cy="9525"/>
+          </a:xfrm>
+          <a:prstGeom prst="rect">
+            <a:avLst/>
+          </a:prstGeom>
+          <a:solidFill>
+            <a:srgbClr val="DEDCD5"/>
+          </a:solidFill>
+          <a:ln>
+            <a:noFill/>
+          </a:ln>
+          <a:effectLst/>
+        </p:spPr>
+        <p:style>
+          <a:lnRef idx="1">
+            <a:schemeClr val="accent1"/>
+          </a:lnRef>
+          <a:fillRef idx="3">
+            <a:schemeClr val="accent1"/>
+          </a:fillRef>
+          <a:effectRef idx="2">
+            <a:schemeClr val="accent1"/>
+          </a:effectRef>
+          <a:fontRef idx="minor">
+            <a:schemeClr val="lt1"/>
+          </a:fontRef>
+        </p:style>
+        <p:txBody>
+          <a:bodyPr rtlCol="0" anchor="ctr"/>
+          <a:lstStyle/>
+          <a:p>
+            <a:pPr algn="ctr"/>
           </a:p>
         </p:txBody>
       </p:sp>
@@ -7021,8 +7093,8 @@
         </p:nvSpPr>
         <p:spPr>
           <a:xfrm>
-            <a:off x="8953500" y="5105400"/>
-            <a:ext cx="2590800" cy="381000"/>
+            <a:off x="4476750" y="5581650"/>
+            <a:ext cx="2095500" cy="476250"/>
           </a:xfrm>
           <a:prstGeom prst="rect">
             <a:avLst/>
@@ -7041,6 +7113,134 @@
               </a:lnSpc>
             </a:pPr>
             <a:r>
+              <a:rPr sz="1350" b="1">
+                <a:solidFill>
+                  <a:srgbClr val="16161A"/>
+                </a:solidFill>
+                <a:latin typeface="Pretendard"/>
+                <a:ea typeface="Pretendard"/>
+                <a:cs typeface="Pretendard"/>
+              </a:rPr>
+              <a:t>질문 중계</a:t>
+            </a:r>
+          </a:p>
+        </p:txBody>
+      </p:sp>
+      <p:sp>
+        <p:nvSpPr>
+          <p:cNvPr id="36" name="Rounded Rectangle 35"/>
+          <p:cNvSpPr/>
+          <p:nvPr/>
+        </p:nvSpPr>
+        <p:spPr>
+          <a:xfrm>
+            <a:off x="6667500" y="5581650"/>
+            <a:ext cx="609600" cy="285750"/>
+          </a:xfrm>
+          <a:prstGeom prst="roundRect">
+            <a:avLst>
+              <a:gd name="adj" fmla="val 50000"/>
+            </a:avLst>
+          </a:prstGeom>
+          <a:solidFill>
+            <a:srgbClr val="EFEDE7"/>
+          </a:solidFill>
+          <a:ln>
+            <a:noFill/>
+          </a:ln>
+          <a:effectLst/>
+        </p:spPr>
+        <p:style>
+          <a:lnRef idx="1">
+            <a:schemeClr val="accent1"/>
+          </a:lnRef>
+          <a:fillRef idx="3">
+            <a:schemeClr val="accent1"/>
+          </a:fillRef>
+          <a:effectRef idx="2">
+            <a:schemeClr val="accent1"/>
+          </a:effectRef>
+          <a:fontRef idx="minor">
+            <a:schemeClr val="lt1"/>
+          </a:fontRef>
+        </p:style>
+        <p:txBody>
+          <a:bodyPr rtlCol="0" anchor="ctr"/>
+          <a:lstStyle/>
+          <a:p>
+            <a:pPr algn="ctr"/>
+          </a:p>
+        </p:txBody>
+      </p:sp>
+      <p:sp>
+        <p:nvSpPr>
+          <p:cNvPr id="37" name="TextBox 36"/>
+          <p:cNvSpPr txBox="1"/>
+          <p:nvPr/>
+        </p:nvSpPr>
+        <p:spPr>
+          <a:xfrm>
+            <a:off x="6667500" y="5619750"/>
+            <a:ext cx="609600" cy="247650"/>
+          </a:xfrm>
+          <a:prstGeom prst="rect">
+            <a:avLst/>
+          </a:prstGeom>
+          <a:noFill/>
+        </p:spPr>
+        <p:txBody>
+          <a:bodyPr wrap="square" lIns="0" rIns="0" tIns="0" bIns="0" anchor="t">
+            <a:spAutoFit/>
+          </a:bodyPr>
+          <a:lstStyle/>
+          <a:p>
+            <a:pPr algn="ctr">
+              <a:lnSpc>
+                <a:spcPct val="124200"/>
+              </a:lnSpc>
+            </a:pPr>
+            <a:r>
+              <a:rPr sz="975" b="1">
+                <a:solidFill>
+                  <a:srgbClr val="47474D"/>
+                </a:solidFill>
+                <a:latin typeface="Pretendard"/>
+                <a:ea typeface="Pretendard"/>
+                <a:cs typeface="Pretendard"/>
+              </a:rPr>
+              <a:t>동작</a:t>
+            </a:r>
+          </a:p>
+        </p:txBody>
+      </p:sp>
+      <p:sp>
+        <p:nvSpPr>
+          <p:cNvPr id="38" name="TextBox 37"/>
+          <p:cNvSpPr txBox="1"/>
+          <p:nvPr/>
+        </p:nvSpPr>
+        <p:spPr>
+          <a:xfrm>
+            <a:off x="7467600" y="5562600"/>
+            <a:ext cx="4114800" cy="666750"/>
+          </a:xfrm>
+          <a:prstGeom prst="rect">
+            <a:avLst/>
+          </a:prstGeom>
+          <a:noFill/>
+        </p:spPr>
+        <p:txBody>
+          <a:bodyPr wrap="square" lIns="0" rIns="0" tIns="0" bIns="0" anchor="t">
+            <a:spAutoFit/>
+          </a:bodyPr>
+          <a:lstStyle/>
+          <a:p>
+            <a:pPr algn="l">
+              <a:lnSpc>
+                <a:spcPct val="138000"/>
+              </a:lnSpc>
+            </a:pPr>
+            <a:r>
               <a:rPr sz="1125" b="0">
                 <a:solidFill>
                   <a:srgbClr val="47474D"/>
@@ -7049,49 +7249,52 @@
                 <a:ea typeface="Pretendard"/>
                 <a:cs typeface="Pretendard"/>
               </a:rPr>
-              <a:t>계약 위반, 반려 횟수</a:t>
-            </a:r>
-          </a:p>
-        </p:txBody>
-      </p:sp>
-      <p:sp>
-        <p:nvSpPr>
-          <p:cNvPr id="36" name="TextBox 35"/>
-          <p:cNvSpPr txBox="1"/>
-          <p:nvPr/>
-        </p:nvSpPr>
-        <p:spPr>
-          <a:xfrm>
-            <a:off x="609600" y="5695950"/>
-            <a:ext cx="10953750" cy="571500"/>
-          </a:xfrm>
-          <a:prstGeom prst="rect">
-            <a:avLst/>
-          </a:prstGeom>
-          <a:noFill/>
-        </p:spPr>
-        <p:txBody>
-          <a:bodyPr wrap="square" lIns="0" rIns="0" tIns="0" bIns="0" anchor="t">
-            <a:spAutoFit/>
-          </a:bodyPr>
-          <a:lstStyle/>
-          <a:p>
-            <a:pPr algn="l">
-              <a:lnSpc>
-                <a:spcPct val="124200"/>
-              </a:lnSpc>
-            </a:pPr>
-            <a:r>
-              <a:rPr sz="1125" b="0">
-                <a:solidFill>
-                  <a:srgbClr val="47474D"/>
-                </a:solidFill>
-                <a:latin typeface="Pretendard"/>
-                <a:ea typeface="Pretendard"/>
-                <a:cs typeface="Pretendard"/>
-              </a:rPr>
-              <a:t>질문 지표(첫 수신자 정확도, 대표 부담, 답 대기 시간)는 C와 D 사이에서 본다. 과제: 정원 마감, 결제 환불, 초대 수락.</a:t>
-            </a:r>
+              <a:t>계약에 없는 결정은 정할 권한이 있는 사람에게</a:t>
+            </a:r>
+          </a:p>
+        </p:txBody>
+      </p:sp>
+      <p:sp>
+        <p:nvSpPr>
+          <p:cNvPr id="39" name="Rectangle 38"/>
+          <p:cNvSpPr/>
+          <p:nvPr/>
+        </p:nvSpPr>
+        <p:spPr>
+          <a:xfrm>
+            <a:off x="4476750" y="6286500"/>
+            <a:ext cx="7105650" cy="9525"/>
+          </a:xfrm>
+          <a:prstGeom prst="rect">
+            <a:avLst/>
+          </a:prstGeom>
+          <a:solidFill>
+            <a:srgbClr val="DEDCD5"/>
+          </a:solidFill>
+          <a:ln>
+            <a:noFill/>
+          </a:ln>
+          <a:effectLst/>
+        </p:spPr>
+        <p:style>
+          <a:lnRef idx="1">
+            <a:schemeClr val="accent1"/>
+          </a:lnRef>
+          <a:fillRef idx="3">
+            <a:schemeClr val="accent1"/>
+          </a:fillRef>
+          <a:effectRef idx="2">
+            <a:schemeClr val="accent1"/>
+          </a:effectRef>
+          <a:fontRef idx="minor">
+            <a:schemeClr val="lt1"/>
+          </a:fontRef>
+        </p:style>
+        <p:txBody>
+          <a:bodyPr rtlCol="0" anchor="ctr"/>
+          <a:lstStyle/>
+          <a:p>
+            <a:pPr algn="ctr"/>
           </a:p>
         </p:txBody>
       </p:sp>
@@ -7157,7 +7360,7 @@
                 <a:ea typeface="Pretendard"/>
                 <a:cs typeface="Pretendard"/>
               </a:rPr>
-              <a:t>일정</a:t>
+              <a:t>기말까지</a:t>
             </a:r>
           </a:p>
         </p:txBody>
@@ -7198,7 +7401,7 @@
                 <a:ea typeface="Pretendard"/>
                 <a:cs typeface="Pretendard"/>
               </a:rPr>
-              <a:t>12 / 14</a:t>
+              <a:t>12 / 15</a:t>
             </a:r>
           </a:p>
         </p:txBody>
@@ -7239,7 +7442,7 @@
                 <a:ea typeface="Pretendard"/>
                 <a:cs typeface="Pretendard"/>
               </a:rPr>
-              <a:t>8주 계획</a:t>
+              <a:t>같은 과제를 네 조건으로 돌립니다</a:t>
             </a:r>
           </a:p>
         </p:txBody>
@@ -7331,14 +7534,739 @@
       </p:sp>
       <p:sp>
         <p:nvSpPr>
-          <p:cNvPr id="7" name="Rectangle 6"/>
+          <p:cNvPr id="7" name="Rounded Rectangle 6"/>
           <p:cNvSpPr/>
           <p:nvPr/>
         </p:nvSpPr>
         <p:spPr>
           <a:xfrm>
-            <a:off x="609600" y="2857500"/>
-            <a:ext cx="10972800" cy="19050"/>
+            <a:off x="609600" y="1962150"/>
+            <a:ext cx="2590800" cy="1905000"/>
+          </a:xfrm>
+          <a:prstGeom prst="roundRect">
+            <a:avLst>
+              <a:gd name="adj" fmla="val 3000"/>
+            </a:avLst>
+          </a:prstGeom>
+          <a:solidFill>
+            <a:srgbClr val="FFFFFD"/>
+          </a:solidFill>
+          <a:ln w="9525">
+            <a:solidFill>
+              <a:srgbClr val="DEDCD5"/>
+            </a:solidFill>
+          </a:ln>
+          <a:effectLst/>
+        </p:spPr>
+        <p:style>
+          <a:lnRef idx="1">
+            <a:schemeClr val="accent1"/>
+          </a:lnRef>
+          <a:fillRef idx="3">
+            <a:schemeClr val="accent1"/>
+          </a:fillRef>
+          <a:effectRef idx="2">
+            <a:schemeClr val="accent1"/>
+          </a:effectRef>
+          <a:fontRef idx="minor">
+            <a:schemeClr val="lt1"/>
+          </a:fontRef>
+        </p:style>
+        <p:txBody>
+          <a:bodyPr rtlCol="0" anchor="ctr"/>
+          <a:lstStyle/>
+          <a:p>
+            <a:pPr algn="ctr"/>
+          </a:p>
+        </p:txBody>
+      </p:sp>
+      <p:sp>
+        <p:nvSpPr>
+          <p:cNvPr id="8" name="TextBox 7"/>
+          <p:cNvSpPr txBox="1"/>
+          <p:nvPr/>
+        </p:nvSpPr>
+        <p:spPr>
+          <a:xfrm>
+            <a:off x="819150" y="2152650"/>
+            <a:ext cx="571500" cy="476250"/>
+          </a:xfrm>
+          <a:prstGeom prst="rect">
+            <a:avLst/>
+          </a:prstGeom>
+          <a:noFill/>
+        </p:spPr>
+        <p:txBody>
+          <a:bodyPr wrap="square" lIns="0" rIns="0" tIns="0" bIns="0" anchor="t">
+            <a:spAutoFit/>
+          </a:bodyPr>
+          <a:lstStyle/>
+          <a:p>
+            <a:pPr algn="l">
+              <a:lnSpc>
+                <a:spcPct val="124200"/>
+              </a:lnSpc>
+            </a:pPr>
+            <a:r>
+              <a:rPr sz="3000" b="1">
+                <a:solidFill>
+                  <a:srgbClr val="2A78D6"/>
+                </a:solidFill>
+                <a:latin typeface="Pretendard"/>
+                <a:ea typeface="Pretendard"/>
+                <a:cs typeface="Pretendard"/>
+              </a:rPr>
+              <a:t>A</a:t>
+            </a:r>
+          </a:p>
+        </p:txBody>
+      </p:sp>
+      <p:sp>
+        <p:nvSpPr>
+          <p:cNvPr id="9" name="TextBox 8"/>
+          <p:cNvSpPr txBox="1"/>
+          <p:nvPr/>
+        </p:nvSpPr>
+        <p:spPr>
+          <a:xfrm>
+            <a:off x="819150" y="2762250"/>
+            <a:ext cx="2190750" cy="571500"/>
+          </a:xfrm>
+          <a:prstGeom prst="rect">
+            <a:avLst/>
+          </a:prstGeom>
+          <a:noFill/>
+        </p:spPr>
+        <p:txBody>
+          <a:bodyPr wrap="square" lIns="0" rIns="0" tIns="0" bIns="0" anchor="t">
+            <a:spAutoFit/>
+          </a:bodyPr>
+          <a:lstStyle/>
+          <a:p>
+            <a:pPr algn="l">
+              <a:lnSpc>
+                <a:spcPct val="124200"/>
+              </a:lnSpc>
+            </a:pPr>
+            <a:r>
+              <a:rPr sz="1425" b="1">
+                <a:solidFill>
+                  <a:srgbClr val="16161A"/>
+                </a:solidFill>
+                <a:latin typeface="Pretendard"/>
+                <a:ea typeface="Pretendard"/>
+                <a:cs typeface="Pretendard"/>
+              </a:rPr>
+              <a:t>Claude Code 한 세션</a:t>
+            </a:r>
+          </a:p>
+        </p:txBody>
+      </p:sp>
+      <p:sp>
+        <p:nvSpPr>
+          <p:cNvPr id="10" name="TextBox 9"/>
+          <p:cNvSpPr txBox="1"/>
+          <p:nvPr/>
+        </p:nvSpPr>
+        <p:spPr>
+          <a:xfrm>
+            <a:off x="819150" y="3295650"/>
+            <a:ext cx="2190750" cy="476250"/>
+          </a:xfrm>
+          <a:prstGeom prst="rect">
+            <a:avLst/>
+          </a:prstGeom>
+          <a:noFill/>
+        </p:spPr>
+        <p:txBody>
+          <a:bodyPr wrap="square" lIns="0" rIns="0" tIns="0" bIns="0" anchor="t">
+            <a:spAutoFit/>
+          </a:bodyPr>
+          <a:lstStyle/>
+          <a:p>
+            <a:pPr algn="l">
+              <a:lnSpc>
+                <a:spcPct val="124200"/>
+              </a:lnSpc>
+            </a:pPr>
+            <a:r>
+              <a:rPr sz="1125" b="0">
+                <a:solidFill>
+                  <a:srgbClr val="47474D"/>
+                </a:solidFill>
+                <a:latin typeface="Pretendard"/>
+                <a:ea typeface="Pretendard"/>
+                <a:cs typeface="Pretendard"/>
+              </a:rPr>
+              <a:t>한 사람</a:t>
+            </a:r>
+          </a:p>
+        </p:txBody>
+      </p:sp>
+      <p:sp>
+        <p:nvSpPr>
+          <p:cNvPr id="11" name="Rounded Rectangle 10"/>
+          <p:cNvSpPr/>
+          <p:nvPr/>
+        </p:nvSpPr>
+        <p:spPr>
+          <a:xfrm>
+            <a:off x="3390900" y="1962150"/>
+            <a:ext cx="2590800" cy="1905000"/>
+          </a:xfrm>
+          <a:prstGeom prst="roundRect">
+            <a:avLst>
+              <a:gd name="adj" fmla="val 3000"/>
+            </a:avLst>
+          </a:prstGeom>
+          <a:solidFill>
+            <a:srgbClr val="FFFFFD"/>
+          </a:solidFill>
+          <a:ln w="9525">
+            <a:solidFill>
+              <a:srgbClr val="DEDCD5"/>
+            </a:solidFill>
+          </a:ln>
+          <a:effectLst/>
+        </p:spPr>
+        <p:style>
+          <a:lnRef idx="1">
+            <a:schemeClr val="accent1"/>
+          </a:lnRef>
+          <a:fillRef idx="3">
+            <a:schemeClr val="accent1"/>
+          </a:fillRef>
+          <a:effectRef idx="2">
+            <a:schemeClr val="accent1"/>
+          </a:effectRef>
+          <a:fontRef idx="minor">
+            <a:schemeClr val="lt1"/>
+          </a:fontRef>
+        </p:style>
+        <p:txBody>
+          <a:bodyPr rtlCol="0" anchor="ctr"/>
+          <a:lstStyle/>
+          <a:p>
+            <a:pPr algn="ctr"/>
+          </a:p>
+        </p:txBody>
+      </p:sp>
+      <p:sp>
+        <p:nvSpPr>
+          <p:cNvPr id="12" name="TextBox 11"/>
+          <p:cNvSpPr txBox="1"/>
+          <p:nvPr/>
+        </p:nvSpPr>
+        <p:spPr>
+          <a:xfrm>
+            <a:off x="3600450" y="2152650"/>
+            <a:ext cx="571500" cy="476250"/>
+          </a:xfrm>
+          <a:prstGeom prst="rect">
+            <a:avLst/>
+          </a:prstGeom>
+          <a:noFill/>
+        </p:spPr>
+        <p:txBody>
+          <a:bodyPr wrap="square" lIns="0" rIns="0" tIns="0" bIns="0" anchor="t">
+            <a:spAutoFit/>
+          </a:bodyPr>
+          <a:lstStyle/>
+          <a:p>
+            <a:pPr algn="l">
+              <a:lnSpc>
+                <a:spcPct val="124200"/>
+              </a:lnSpc>
+            </a:pPr>
+            <a:r>
+              <a:rPr sz="3000" b="1">
+                <a:solidFill>
+                  <a:srgbClr val="2A78D6"/>
+                </a:solidFill>
+                <a:latin typeface="Pretendard"/>
+                <a:ea typeface="Pretendard"/>
+                <a:cs typeface="Pretendard"/>
+              </a:rPr>
+              <a:t>B</a:t>
+            </a:r>
+          </a:p>
+        </p:txBody>
+      </p:sp>
+      <p:sp>
+        <p:nvSpPr>
+          <p:cNvPr id="13" name="TextBox 12"/>
+          <p:cNvSpPr txBox="1"/>
+          <p:nvPr/>
+        </p:nvSpPr>
+        <p:spPr>
+          <a:xfrm>
+            <a:off x="3600450" y="2762250"/>
+            <a:ext cx="2190750" cy="571500"/>
+          </a:xfrm>
+          <a:prstGeom prst="rect">
+            <a:avLst/>
+          </a:prstGeom>
+          <a:noFill/>
+        </p:spPr>
+        <p:txBody>
+          <a:bodyPr wrap="square" lIns="0" rIns="0" tIns="0" bIns="0" anchor="t">
+            <a:spAutoFit/>
+          </a:bodyPr>
+          <a:lstStyle/>
+          <a:p>
+            <a:pPr algn="l">
+              <a:lnSpc>
+                <a:spcPct val="124200"/>
+              </a:lnSpc>
+            </a:pPr>
+            <a:r>
+              <a:rPr sz="1425" b="1">
+                <a:solidFill>
+                  <a:srgbClr val="16161A"/>
+                </a:solidFill>
+                <a:latin typeface="Pretendard"/>
+                <a:ea typeface="Pretendard"/>
+                <a:cs typeface="Pretendard"/>
+              </a:rPr>
+              <a:t>Claude Code agent teams</a:t>
+            </a:r>
+          </a:p>
+        </p:txBody>
+      </p:sp>
+      <p:sp>
+        <p:nvSpPr>
+          <p:cNvPr id="14" name="TextBox 13"/>
+          <p:cNvSpPr txBox="1"/>
+          <p:nvPr/>
+        </p:nvSpPr>
+        <p:spPr>
+          <a:xfrm>
+            <a:off x="3600450" y="3295650"/>
+            <a:ext cx="2190750" cy="476250"/>
+          </a:xfrm>
+          <a:prstGeom prst="rect">
+            <a:avLst/>
+          </a:prstGeom>
+          <a:noFill/>
+        </p:spPr>
+        <p:txBody>
+          <a:bodyPr wrap="square" lIns="0" rIns="0" tIns="0" bIns="0" anchor="t">
+            <a:spAutoFit/>
+          </a:bodyPr>
+          <a:lstStyle/>
+          <a:p>
+            <a:pPr algn="l">
+              <a:lnSpc>
+                <a:spcPct val="124200"/>
+              </a:lnSpc>
+            </a:pPr>
+            <a:r>
+              <a:rPr sz="1125" b="0">
+                <a:solidFill>
+                  <a:srgbClr val="47474D"/>
+                </a:solidFill>
+                <a:latin typeface="Pretendard"/>
+                <a:ea typeface="Pretendard"/>
+                <a:cs typeface="Pretendard"/>
+              </a:rPr>
+              <a:t>FE, BE 팀원, 한 사람</a:t>
+            </a:r>
+          </a:p>
+        </p:txBody>
+      </p:sp>
+      <p:sp>
+        <p:nvSpPr>
+          <p:cNvPr id="15" name="Rounded Rectangle 14"/>
+          <p:cNvSpPr/>
+          <p:nvPr/>
+        </p:nvSpPr>
+        <p:spPr>
+          <a:xfrm>
+            <a:off x="6172200" y="1962150"/>
+            <a:ext cx="2590800" cy="1905000"/>
+          </a:xfrm>
+          <a:prstGeom prst="roundRect">
+            <a:avLst>
+              <a:gd name="adj" fmla="val 3000"/>
+            </a:avLst>
+          </a:prstGeom>
+          <a:solidFill>
+            <a:srgbClr val="FFFFFD"/>
+          </a:solidFill>
+          <a:ln w="9525">
+            <a:solidFill>
+              <a:srgbClr val="DEDCD5"/>
+            </a:solidFill>
+          </a:ln>
+          <a:effectLst/>
+        </p:spPr>
+        <p:style>
+          <a:lnRef idx="1">
+            <a:schemeClr val="accent1"/>
+          </a:lnRef>
+          <a:fillRef idx="3">
+            <a:schemeClr val="accent1"/>
+          </a:fillRef>
+          <a:effectRef idx="2">
+            <a:schemeClr val="accent1"/>
+          </a:effectRef>
+          <a:fontRef idx="minor">
+            <a:schemeClr val="lt1"/>
+          </a:fontRef>
+        </p:style>
+        <p:txBody>
+          <a:bodyPr rtlCol="0" anchor="ctr"/>
+          <a:lstStyle/>
+          <a:p>
+            <a:pPr algn="ctr"/>
+          </a:p>
+        </p:txBody>
+      </p:sp>
+      <p:sp>
+        <p:nvSpPr>
+          <p:cNvPr id="16" name="TextBox 15"/>
+          <p:cNvSpPr txBox="1"/>
+          <p:nvPr/>
+        </p:nvSpPr>
+        <p:spPr>
+          <a:xfrm>
+            <a:off x="6381750" y="2152650"/>
+            <a:ext cx="571500" cy="476250"/>
+          </a:xfrm>
+          <a:prstGeom prst="rect">
+            <a:avLst/>
+          </a:prstGeom>
+          <a:noFill/>
+        </p:spPr>
+        <p:txBody>
+          <a:bodyPr wrap="square" lIns="0" rIns="0" tIns="0" bIns="0" anchor="t">
+            <a:spAutoFit/>
+          </a:bodyPr>
+          <a:lstStyle/>
+          <a:p>
+            <a:pPr algn="l">
+              <a:lnSpc>
+                <a:spcPct val="124200"/>
+              </a:lnSpc>
+            </a:pPr>
+            <a:r>
+              <a:rPr sz="3000" b="1">
+                <a:solidFill>
+                  <a:srgbClr val="2A78D6"/>
+                </a:solidFill>
+                <a:latin typeface="Pretendard"/>
+                <a:ea typeface="Pretendard"/>
+                <a:cs typeface="Pretendard"/>
+              </a:rPr>
+              <a:t>C</a:t>
+            </a:r>
+          </a:p>
+        </p:txBody>
+      </p:sp>
+      <p:sp>
+        <p:nvSpPr>
+          <p:cNvPr id="17" name="TextBox 16"/>
+          <p:cNvSpPr txBox="1"/>
+          <p:nvPr/>
+        </p:nvSpPr>
+        <p:spPr>
+          <a:xfrm>
+            <a:off x="6381750" y="2762250"/>
+            <a:ext cx="2190750" cy="571500"/>
+          </a:xfrm>
+          <a:prstGeom prst="rect">
+            <a:avLst/>
+          </a:prstGeom>
+          <a:noFill/>
+        </p:spPr>
+        <p:txBody>
+          <a:bodyPr wrap="square" lIns="0" rIns="0" tIns="0" bIns="0" anchor="t">
+            <a:spAutoFit/>
+          </a:bodyPr>
+          <a:lstStyle/>
+          <a:p>
+            <a:pPr algn="l">
+              <a:lnSpc>
+                <a:spcPct val="124200"/>
+              </a:lnSpc>
+            </a:pPr>
+            <a:r>
+              <a:rPr sz="1425" b="1">
+                <a:solidFill>
+                  <a:srgbClr val="16161A"/>
+                </a:solidFill>
+                <a:latin typeface="Pretendard"/>
+                <a:ea typeface="Pretendard"/>
+                <a:cs typeface="Pretendard"/>
+              </a:rPr>
+              <a:t>NOMOS, 질문 중계 끔</a:t>
+            </a:r>
+          </a:p>
+        </p:txBody>
+      </p:sp>
+      <p:sp>
+        <p:nvSpPr>
+          <p:cNvPr id="18" name="TextBox 17"/>
+          <p:cNvSpPr txBox="1"/>
+          <p:nvPr/>
+        </p:nvSpPr>
+        <p:spPr>
+          <a:xfrm>
+            <a:off x="6381750" y="3295650"/>
+            <a:ext cx="2190750" cy="476250"/>
+          </a:xfrm>
+          <a:prstGeom prst="rect">
+            <a:avLst/>
+          </a:prstGeom>
+          <a:noFill/>
+        </p:spPr>
+        <p:txBody>
+          <a:bodyPr wrap="square" lIns="0" rIns="0" tIns="0" bIns="0" anchor="t">
+            <a:spAutoFit/>
+          </a:bodyPr>
+          <a:lstStyle/>
+          <a:p>
+            <a:pPr algn="l">
+              <a:lnSpc>
+                <a:spcPct val="124200"/>
+              </a:lnSpc>
+            </a:pPr>
+            <a:r>
+              <a:rPr sz="1125" b="0">
+                <a:solidFill>
+                  <a:srgbClr val="47474D"/>
+                </a:solidFill>
+                <a:latin typeface="Pretendard"/>
+                <a:ea typeface="Pretendard"/>
+                <a:cs typeface="Pretendard"/>
+              </a:rPr>
+              <a:t>가정하고 진행(대조군)</a:t>
+            </a:r>
+          </a:p>
+        </p:txBody>
+      </p:sp>
+      <p:sp>
+        <p:nvSpPr>
+          <p:cNvPr id="19" name="Rounded Rectangle 18"/>
+          <p:cNvSpPr/>
+          <p:nvPr/>
+        </p:nvSpPr>
+        <p:spPr>
+          <a:xfrm>
+            <a:off x="8953500" y="1962150"/>
+            <a:ext cx="2590800" cy="1905000"/>
+          </a:xfrm>
+          <a:prstGeom prst="roundRect">
+            <a:avLst>
+              <a:gd name="adj" fmla="val 3000"/>
+            </a:avLst>
+          </a:prstGeom>
+          <a:solidFill>
+            <a:srgbClr val="E3EDFA"/>
+          </a:solidFill>
+          <a:ln w="9525">
+            <a:solidFill>
+              <a:srgbClr val="DEDCD5"/>
+            </a:solidFill>
+          </a:ln>
+          <a:effectLst/>
+        </p:spPr>
+        <p:style>
+          <a:lnRef idx="1">
+            <a:schemeClr val="accent1"/>
+          </a:lnRef>
+          <a:fillRef idx="3">
+            <a:schemeClr val="accent1"/>
+          </a:fillRef>
+          <a:effectRef idx="2">
+            <a:schemeClr val="accent1"/>
+          </a:effectRef>
+          <a:fontRef idx="minor">
+            <a:schemeClr val="lt1"/>
+          </a:fontRef>
+        </p:style>
+        <p:txBody>
+          <a:bodyPr rtlCol="0" anchor="ctr"/>
+          <a:lstStyle/>
+          <a:p>
+            <a:pPr algn="ctr"/>
+          </a:p>
+        </p:txBody>
+      </p:sp>
+      <p:sp>
+        <p:nvSpPr>
+          <p:cNvPr id="20" name="TextBox 19"/>
+          <p:cNvSpPr txBox="1"/>
+          <p:nvPr/>
+        </p:nvSpPr>
+        <p:spPr>
+          <a:xfrm>
+            <a:off x="9163050" y="2152650"/>
+            <a:ext cx="571500" cy="476250"/>
+          </a:xfrm>
+          <a:prstGeom prst="rect">
+            <a:avLst/>
+          </a:prstGeom>
+          <a:noFill/>
+        </p:spPr>
+        <p:txBody>
+          <a:bodyPr wrap="square" lIns="0" rIns="0" tIns="0" bIns="0" anchor="t">
+            <a:spAutoFit/>
+          </a:bodyPr>
+          <a:lstStyle/>
+          <a:p>
+            <a:pPr algn="l">
+              <a:lnSpc>
+                <a:spcPct val="124200"/>
+              </a:lnSpc>
+            </a:pPr>
+            <a:r>
+              <a:rPr sz="3000" b="1">
+                <a:solidFill>
+                  <a:srgbClr val="2A78D6"/>
+                </a:solidFill>
+                <a:latin typeface="Pretendard"/>
+                <a:ea typeface="Pretendard"/>
+                <a:cs typeface="Pretendard"/>
+              </a:rPr>
+              <a:t>D</a:t>
+            </a:r>
+          </a:p>
+        </p:txBody>
+      </p:sp>
+      <p:sp>
+        <p:nvSpPr>
+          <p:cNvPr id="21" name="TextBox 20"/>
+          <p:cNvSpPr txBox="1"/>
+          <p:nvPr/>
+        </p:nvSpPr>
+        <p:spPr>
+          <a:xfrm>
+            <a:off x="9163050" y="2762250"/>
+            <a:ext cx="2190750" cy="571500"/>
+          </a:xfrm>
+          <a:prstGeom prst="rect">
+            <a:avLst/>
+          </a:prstGeom>
+          <a:noFill/>
+        </p:spPr>
+        <p:txBody>
+          <a:bodyPr wrap="square" lIns="0" rIns="0" tIns="0" bIns="0" anchor="t">
+            <a:spAutoFit/>
+          </a:bodyPr>
+          <a:lstStyle/>
+          <a:p>
+            <a:pPr algn="l">
+              <a:lnSpc>
+                <a:spcPct val="124200"/>
+              </a:lnSpc>
+            </a:pPr>
+            <a:r>
+              <a:rPr sz="1425" b="1">
+                <a:solidFill>
+                  <a:srgbClr val="16161A"/>
+                </a:solidFill>
+                <a:latin typeface="Pretendard"/>
+                <a:ea typeface="Pretendard"/>
+                <a:cs typeface="Pretendard"/>
+              </a:rPr>
+              <a:t>NOMOS, 질문 중계 켬</a:t>
+            </a:r>
+          </a:p>
+        </p:txBody>
+      </p:sp>
+      <p:sp>
+        <p:nvSpPr>
+          <p:cNvPr id="22" name="TextBox 21"/>
+          <p:cNvSpPr txBox="1"/>
+          <p:nvPr/>
+        </p:nvSpPr>
+        <p:spPr>
+          <a:xfrm>
+            <a:off x="9163050" y="3295650"/>
+            <a:ext cx="2190750" cy="476250"/>
+          </a:xfrm>
+          <a:prstGeom prst="rect">
+            <a:avLst/>
+          </a:prstGeom>
+          <a:noFill/>
+        </p:spPr>
+        <p:txBody>
+          <a:bodyPr wrap="square" lIns="0" rIns="0" tIns="0" bIns="0" anchor="t">
+            <a:spAutoFit/>
+          </a:bodyPr>
+          <a:lstStyle/>
+          <a:p>
+            <a:pPr algn="l">
+              <a:lnSpc>
+                <a:spcPct val="124200"/>
+              </a:lnSpc>
+            </a:pPr>
+            <a:r>
+              <a:rPr sz="1125" b="0">
+                <a:solidFill>
+                  <a:srgbClr val="47474D"/>
+                </a:solidFill>
+                <a:latin typeface="Pretendard"/>
+                <a:ea typeface="Pretendard"/>
+                <a:cs typeface="Pretendard"/>
+              </a:rPr>
+              <a:t>owner 라우터 v2 + 최소 계약 먼저</a:t>
+            </a:r>
+          </a:p>
+        </p:txBody>
+      </p:sp>
+      <p:sp>
+        <p:nvSpPr>
+          <p:cNvPr id="23" name="TextBox 22"/>
+          <p:cNvSpPr txBox="1"/>
+          <p:nvPr/>
+        </p:nvSpPr>
+        <p:spPr>
+          <a:xfrm>
+            <a:off x="609600" y="4191000"/>
+            <a:ext cx="5715000" cy="285750"/>
+          </a:xfrm>
+          <a:prstGeom prst="rect">
+            <a:avLst/>
+          </a:prstGeom>
+          <a:noFill/>
+        </p:spPr>
+        <p:txBody>
+          <a:bodyPr wrap="square" lIns="0" rIns="0" tIns="0" bIns="0" anchor="t">
+            <a:spAutoFit/>
+          </a:bodyPr>
+          <a:lstStyle/>
+          <a:p>
+            <a:pPr algn="l">
+              <a:lnSpc>
+                <a:spcPct val="124200"/>
+              </a:lnSpc>
+            </a:pPr>
+            <a:r>
+              <a:rPr sz="1200" b="1">
+                <a:solidFill>
+                  <a:srgbClr val="7A7A80"/>
+                </a:solidFill>
+                <a:latin typeface="Pretendard"/>
+                <a:ea typeface="Pretendard"/>
+                <a:cs typeface="Pretendard"/>
+              </a:rPr>
+              <a:t>지표 네 개로 고정</a:t>
+            </a:r>
+          </a:p>
+        </p:txBody>
+      </p:sp>
+      <p:sp>
+        <p:nvSpPr>
+          <p:cNvPr id="24" name="Rectangle 23"/>
+          <p:cNvSpPr/>
+          <p:nvPr/>
+        </p:nvSpPr>
+        <p:spPr>
+          <a:xfrm>
+            <a:off x="609600" y="4572000"/>
+            <a:ext cx="2590800" cy="9525"/>
           </a:xfrm>
           <a:prstGeom prst="rect">
             <a:avLst/>
@@ -7375,22 +8303,102 @@
       </p:sp>
       <p:sp>
         <p:nvSpPr>
-          <p:cNvPr id="8" name="Rounded Rectangle 7"/>
+          <p:cNvPr id="25" name="TextBox 24"/>
+          <p:cNvSpPr txBox="1"/>
+          <p:nvPr/>
+        </p:nvSpPr>
+        <p:spPr>
+          <a:xfrm>
+            <a:off x="609600" y="4705350"/>
+            <a:ext cx="2590800" cy="381000"/>
+          </a:xfrm>
+          <a:prstGeom prst="rect">
+            <a:avLst/>
+          </a:prstGeom>
+          <a:noFill/>
+        </p:spPr>
+        <p:txBody>
+          <a:bodyPr wrap="square" lIns="0" rIns="0" tIns="0" bIns="0" anchor="t">
+            <a:spAutoFit/>
+          </a:bodyPr>
+          <a:lstStyle/>
+          <a:p>
+            <a:pPr algn="l">
+              <a:lnSpc>
+                <a:spcPct val="124200"/>
+              </a:lnSpc>
+            </a:pPr>
+            <a:r>
+              <a:rPr sz="1650" b="1">
+                <a:solidFill>
+                  <a:srgbClr val="16161A"/>
+                </a:solidFill>
+                <a:latin typeface="Pretendard"/>
+                <a:ea typeface="Pretendard"/>
+                <a:cs typeface="Pretendard"/>
+              </a:rPr>
+              <a:t>과제 성공</a:t>
+            </a:r>
+          </a:p>
+        </p:txBody>
+      </p:sp>
+      <p:sp>
+        <p:nvSpPr>
+          <p:cNvPr id="26" name="TextBox 25"/>
+          <p:cNvSpPr txBox="1"/>
+          <p:nvPr/>
+        </p:nvSpPr>
+        <p:spPr>
+          <a:xfrm>
+            <a:off x="609600" y="5105400"/>
+            <a:ext cx="2590800" cy="381000"/>
+          </a:xfrm>
+          <a:prstGeom prst="rect">
+            <a:avLst/>
+          </a:prstGeom>
+          <a:noFill/>
+        </p:spPr>
+        <p:txBody>
+          <a:bodyPr wrap="square" lIns="0" rIns="0" tIns="0" bIns="0" anchor="t">
+            <a:spAutoFit/>
+          </a:bodyPr>
+          <a:lstStyle/>
+          <a:p>
+            <a:pPr algn="l">
+              <a:lnSpc>
+                <a:spcPct val="124200"/>
+              </a:lnSpc>
+            </a:pPr>
+            <a:r>
+              <a:rPr sz="1125" b="0">
+                <a:solidFill>
+                  <a:srgbClr val="47474D"/>
+                </a:solidFill>
+                <a:latin typeface="Pretendard"/>
+                <a:ea typeface="Pretendard"/>
+                <a:cs typeface="Pretendard"/>
+              </a:rPr>
+              <a:t>인수 테스트 통과</a:t>
+            </a:r>
+          </a:p>
+        </p:txBody>
+      </p:sp>
+      <p:sp>
+        <p:nvSpPr>
+          <p:cNvPr id="27" name="Rectangle 26"/>
           <p:cNvSpPr/>
           <p:nvPr/>
         </p:nvSpPr>
         <p:spPr>
           <a:xfrm>
-            <a:off x="609600" y="2781300"/>
-            <a:ext cx="152400" cy="152400"/>
-          </a:xfrm>
-          <a:prstGeom prst="roundRect">
-            <a:avLst>
-              <a:gd name="adj" fmla="val 50000"/>
-            </a:avLst>
+            <a:off x="3390900" y="4572000"/>
+            <a:ext cx="2590800" cy="9525"/>
+          </a:xfrm>
+          <a:prstGeom prst="rect">
+            <a:avLst/>
           </a:prstGeom>
           <a:solidFill>
-            <a:srgbClr val="2A78D6"/>
+            <a:srgbClr val="16161A"/>
           </a:solidFill>
           <a:ln>
             <a:noFill/>
@@ -7421,14 +8429,14 @@
       </p:sp>
       <p:sp>
         <p:nvSpPr>
-          <p:cNvPr id="9" name="TextBox 8"/>
-          <p:cNvSpPr txBox="1"/>
-          <p:nvPr/>
-        </p:nvSpPr>
-        <p:spPr>
-          <a:xfrm>
-            <a:off x="609600" y="2247900"/>
-            <a:ext cx="2000250" cy="381000"/>
+          <p:cNvPr id="28" name="TextBox 27"/>
+          <p:cNvSpPr txBox="1"/>
+          <p:nvPr/>
+        </p:nvSpPr>
+        <p:spPr>
+          <a:xfrm>
+            <a:off x="3390900" y="4705350"/>
+            <a:ext cx="2590800" cy="381000"/>
           </a:xfrm>
           <a:prstGeom prst="rect">
             <a:avLst/>
@@ -7455,40 +8463,40 @@
                 <a:ea typeface="Pretendard"/>
                 <a:cs typeface="Pretendard"/>
               </a:rPr>
-              <a:t>1~2주</a:t>
-            </a:r>
-          </a:p>
-        </p:txBody>
-      </p:sp>
-      <p:sp>
-        <p:nvSpPr>
-          <p:cNvPr id="10" name="TextBox 9"/>
-          <p:cNvSpPr txBox="1"/>
-          <p:nvPr/>
-        </p:nvSpPr>
-        <p:spPr>
-          <a:xfrm>
-            <a:off x="609600" y="3143250"/>
-            <a:ext cx="2000250" cy="1905000"/>
-          </a:xfrm>
-          <a:prstGeom prst="rect">
-            <a:avLst/>
-          </a:prstGeom>
-          <a:noFill/>
-        </p:spPr>
-        <p:txBody>
-          <a:bodyPr wrap="square" lIns="0" rIns="0" tIns="0" bIns="0" anchor="t">
-            <a:spAutoFit/>
-          </a:bodyPr>
-          <a:lstStyle/>
-          <a:p>
-            <a:pPr algn="l">
-              <a:lnSpc>
-                <a:spcPct val="147200"/>
-              </a:lnSpc>
-            </a:pPr>
-            <a:r>
-              <a:rPr sz="1275" b="0">
+              <a:t>완료 시간</a:t>
+            </a:r>
+          </a:p>
+        </p:txBody>
+      </p:sp>
+      <p:sp>
+        <p:nvSpPr>
+          <p:cNvPr id="29" name="TextBox 28"/>
+          <p:cNvSpPr txBox="1"/>
+          <p:nvPr/>
+        </p:nvSpPr>
+        <p:spPr>
+          <a:xfrm>
+            <a:off x="3390900" y="5105400"/>
+            <a:ext cx="2590800" cy="381000"/>
+          </a:xfrm>
+          <a:prstGeom prst="rect">
+            <a:avLst/>
+          </a:prstGeom>
+          <a:noFill/>
+        </p:spPr>
+        <p:txBody>
+          <a:bodyPr wrap="square" lIns="0" rIns="0" tIns="0" bIns="0" anchor="t">
+            <a:spAutoFit/>
+          </a:bodyPr>
+          <a:lstStyle/>
+          <a:p>
+            <a:pPr algn="l">
+              <a:lnSpc>
+                <a:spcPct val="124200"/>
+              </a:lnSpc>
+            </a:pPr>
+            <a:r>
+              <a:rPr sz="1125" b="0">
                 <a:solidFill>
                   <a:srgbClr val="47474D"/>
                 </a:solidFill>
@@ -7496,47 +8504,27 @@
                 <a:ea typeface="Pretendard"/>
                 <a:cs typeface="Pretendard"/>
               </a:rPr>
-              <a:t>사람 검수 300문항(블라인드, 카파)</a:t>
-            </a:r>
-          </a:p>
-          <a:p>
-            <a:pPr algn="l">
-              <a:lnSpc>
-                <a:spcPct val="147200"/>
-              </a:lnSpc>
-            </a:pPr>
-            <a:r>
-              <a:rPr sz="1275" b="0">
-                <a:solidFill>
-                  <a:srgbClr val="47474D"/>
-                </a:solidFill>
-                <a:latin typeface="Pretendard"/>
-                <a:ea typeface="Pretendard"/>
-                <a:cs typeface="Pretendard"/>
-              </a:rPr>
-              <a:t>라우터 v2를 서버에 연결, 넘기기 버튼</a:t>
-            </a:r>
-          </a:p>
-        </p:txBody>
-      </p:sp>
-      <p:sp>
-        <p:nvSpPr>
-          <p:cNvPr id="11" name="Rounded Rectangle 10"/>
+              <a:t>시작부터 끝까지</a:t>
+            </a:r>
+          </a:p>
+        </p:txBody>
+      </p:sp>
+      <p:sp>
+        <p:nvSpPr>
+          <p:cNvPr id="30" name="Rectangle 29"/>
           <p:cNvSpPr/>
           <p:nvPr/>
         </p:nvSpPr>
         <p:spPr>
           <a:xfrm>
-            <a:off x="2819400" y="2781300"/>
-            <a:ext cx="152400" cy="152400"/>
-          </a:xfrm>
-          <a:prstGeom prst="roundRect">
-            <a:avLst>
-              <a:gd name="adj" fmla="val 50000"/>
-            </a:avLst>
+            <a:off x="6172200" y="4572000"/>
+            <a:ext cx="2590800" cy="9525"/>
+          </a:xfrm>
+          <a:prstGeom prst="rect">
+            <a:avLst/>
           </a:prstGeom>
           <a:solidFill>
-            <a:srgbClr val="2A78D6"/>
+            <a:srgbClr val="16161A"/>
           </a:solidFill>
           <a:ln>
             <a:noFill/>
@@ -7567,14 +8555,14 @@
       </p:sp>
       <p:sp>
         <p:nvSpPr>
-          <p:cNvPr id="12" name="TextBox 11"/>
-          <p:cNvSpPr txBox="1"/>
-          <p:nvPr/>
-        </p:nvSpPr>
-        <p:spPr>
-          <a:xfrm>
-            <a:off x="2819400" y="2247900"/>
-            <a:ext cx="2000250" cy="381000"/>
+          <p:cNvPr id="31" name="TextBox 30"/>
+          <p:cNvSpPr txBox="1"/>
+          <p:nvPr/>
+        </p:nvSpPr>
+        <p:spPr>
+          <a:xfrm>
+            <a:off x="6172200" y="4705350"/>
+            <a:ext cx="2590800" cy="381000"/>
           </a:xfrm>
           <a:prstGeom prst="rect">
             <a:avLst/>
@@ -7601,40 +8589,40 @@
                 <a:ea typeface="Pretendard"/>
                 <a:cs typeface="Pretendard"/>
               </a:rPr>
-              <a:t>3~4주</a:t>
-            </a:r>
-          </a:p>
-        </p:txBody>
-      </p:sp>
-      <p:sp>
-        <p:nvSpPr>
-          <p:cNvPr id="13" name="TextBox 12"/>
-          <p:cNvSpPr txBox="1"/>
-          <p:nvPr/>
-        </p:nvSpPr>
-        <p:spPr>
-          <a:xfrm>
-            <a:off x="2819400" y="3143250"/>
-            <a:ext cx="2000250" cy="1905000"/>
-          </a:xfrm>
-          <a:prstGeom prst="rect">
-            <a:avLst/>
-          </a:prstGeom>
-          <a:noFill/>
-        </p:spPr>
-        <p:txBody>
-          <a:bodyPr wrap="square" lIns="0" rIns="0" tIns="0" bIns="0" anchor="t">
-            <a:spAutoFit/>
-          </a:bodyPr>
-          <a:lstStyle/>
-          <a:p>
-            <a:pPr algn="l">
-              <a:lnSpc>
-                <a:spcPct val="147200"/>
-              </a:lnSpc>
-            </a:pPr>
-            <a:r>
-              <a:rPr sz="1275" b="0">
+              <a:t>토큰</a:t>
+            </a:r>
+          </a:p>
+        </p:txBody>
+      </p:sp>
+      <p:sp>
+        <p:nvSpPr>
+          <p:cNvPr id="32" name="TextBox 31"/>
+          <p:cNvSpPr txBox="1"/>
+          <p:nvPr/>
+        </p:nvSpPr>
+        <p:spPr>
+          <a:xfrm>
+            <a:off x="6172200" y="5105400"/>
+            <a:ext cx="2590800" cy="381000"/>
+          </a:xfrm>
+          <a:prstGeom prst="rect">
+            <a:avLst/>
+          </a:prstGeom>
+          <a:noFill/>
+        </p:spPr>
+        <p:txBody>
+          <a:bodyPr wrap="square" lIns="0" rIns="0" tIns="0" bIns="0" anchor="t">
+            <a:spAutoFit/>
+          </a:bodyPr>
+          <a:lstStyle/>
+          <a:p>
+            <a:pPr algn="l">
+              <a:lnSpc>
+                <a:spcPct val="124200"/>
+              </a:lnSpc>
+            </a:pPr>
+            <a:r>
+              <a:rPr sz="1125" b="0">
                 <a:solidFill>
                   <a:srgbClr val="47474D"/>
                 </a:solidFill>
@@ -7642,47 +8630,27 @@
                 <a:ea typeface="Pretendard"/>
                 <a:cs typeface="Pretendard"/>
               </a:rPr>
-              <a:t>과제 3개 확정</a:t>
-            </a:r>
-          </a:p>
-          <a:p>
-            <a:pPr algn="l">
-              <a:lnSpc>
-                <a:spcPct val="147200"/>
-              </a:lnSpc>
-            </a:pPr>
-            <a:r>
-              <a:rPr sz="1275" b="0">
-                <a:solidFill>
-                  <a:srgbClr val="47474D"/>
-                </a:solidFill>
-                <a:latin typeface="Pretendard"/>
-                <a:ea typeface="Pretendard"/>
-                <a:cs typeface="Pretendard"/>
-              </a:rPr>
-              <a:t>조건 A~D 실행 파이프라인과 로그</a:t>
-            </a:r>
-          </a:p>
-        </p:txBody>
-      </p:sp>
-      <p:sp>
-        <p:nvSpPr>
-          <p:cNvPr id="14" name="Rounded Rectangle 13"/>
+              <a:t>비용</a:t>
+            </a:r>
+          </a:p>
+        </p:txBody>
+      </p:sp>
+      <p:sp>
+        <p:nvSpPr>
+          <p:cNvPr id="33" name="Rectangle 32"/>
           <p:cNvSpPr/>
           <p:nvPr/>
         </p:nvSpPr>
         <p:spPr>
           <a:xfrm>
-            <a:off x="5029200" y="2781300"/>
-            <a:ext cx="152400" cy="152400"/>
-          </a:xfrm>
-          <a:prstGeom prst="roundRect">
-            <a:avLst>
-              <a:gd name="adj" fmla="val 50000"/>
-            </a:avLst>
+            <a:off x="8953500" y="4572000"/>
+            <a:ext cx="2590800" cy="9525"/>
+          </a:xfrm>
+          <a:prstGeom prst="rect">
+            <a:avLst/>
           </a:prstGeom>
           <a:solidFill>
-            <a:srgbClr val="2A78D6"/>
+            <a:srgbClr val="16161A"/>
           </a:solidFill>
           <a:ln>
             <a:noFill/>
@@ -7713,14 +8681,14 @@
       </p:sp>
       <p:sp>
         <p:nvSpPr>
-          <p:cNvPr id="15" name="TextBox 14"/>
-          <p:cNvSpPr txBox="1"/>
-          <p:nvPr/>
-        </p:nvSpPr>
-        <p:spPr>
-          <a:xfrm>
-            <a:off x="5029200" y="2247900"/>
-            <a:ext cx="2000250" cy="381000"/>
+          <p:cNvPr id="34" name="TextBox 33"/>
+          <p:cNvSpPr txBox="1"/>
+          <p:nvPr/>
+        </p:nvSpPr>
+        <p:spPr>
+          <a:xfrm>
+            <a:off x="8953500" y="4705350"/>
+            <a:ext cx="2590800" cy="381000"/>
           </a:xfrm>
           <a:prstGeom prst="rect">
             <a:avLst/>
@@ -7747,40 +8715,40 @@
                 <a:ea typeface="Pretendard"/>
                 <a:cs typeface="Pretendard"/>
               </a:rPr>
-              <a:t>5~6주</a:t>
-            </a:r>
-          </a:p>
-        </p:txBody>
-      </p:sp>
-      <p:sp>
-        <p:nvSpPr>
-          <p:cNvPr id="16" name="TextBox 15"/>
-          <p:cNvSpPr txBox="1"/>
-          <p:nvPr/>
-        </p:nvSpPr>
-        <p:spPr>
-          <a:xfrm>
-            <a:off x="5029200" y="3143250"/>
-            <a:ext cx="2000250" cy="1905000"/>
-          </a:xfrm>
-          <a:prstGeom prst="rect">
-            <a:avLst/>
-          </a:prstGeom>
-          <a:noFill/>
-        </p:spPr>
-        <p:txBody>
-          <a:bodyPr wrap="square" lIns="0" rIns="0" tIns="0" bIns="0" anchor="t">
-            <a:spAutoFit/>
-          </a:bodyPr>
-          <a:lstStyle/>
-          <a:p>
-            <a:pPr algn="l">
-              <a:lnSpc>
-                <a:spcPct val="147200"/>
-              </a:lnSpc>
-            </a:pPr>
-            <a:r>
-              <a:rPr sz="1275" b="0">
+              <a:t>결정 재작업</a:t>
+            </a:r>
+          </a:p>
+        </p:txBody>
+      </p:sp>
+      <p:sp>
+        <p:nvSpPr>
+          <p:cNvPr id="35" name="TextBox 34"/>
+          <p:cNvSpPr txBox="1"/>
+          <p:nvPr/>
+        </p:nvSpPr>
+        <p:spPr>
+          <a:xfrm>
+            <a:off x="8953500" y="5105400"/>
+            <a:ext cx="2590800" cy="381000"/>
+          </a:xfrm>
+          <a:prstGeom prst="rect">
+            <a:avLst/>
+          </a:prstGeom>
+          <a:noFill/>
+        </p:spPr>
+        <p:txBody>
+          <a:bodyPr wrap="square" lIns="0" rIns="0" tIns="0" bIns="0" anchor="t">
+            <a:spAutoFit/>
+          </a:bodyPr>
+          <a:lstStyle/>
+          <a:p>
+            <a:pPr algn="l">
+              <a:lnSpc>
+                <a:spcPct val="124200"/>
+              </a:lnSpc>
+            </a:pPr>
+            <a:r>
+              <a:rPr sz="1125" b="0">
                 <a:solidFill>
                   <a:srgbClr val="47474D"/>
                 </a:solidFill>
@@ -7788,17 +8756,40 @@
                 <a:ea typeface="Pretendard"/>
                 <a:cs typeface="Pretendard"/>
               </a:rPr>
-              <a:t>본 실험</a:t>
-            </a:r>
-          </a:p>
-          <a:p>
-            <a:pPr algn="l">
-              <a:lnSpc>
-                <a:spcPct val="147200"/>
-              </a:lnSpc>
-            </a:pPr>
-            <a:r>
-              <a:rPr sz="1275" b="0">
+              <a:t>계약 위반, 반려 횟수</a:t>
+            </a:r>
+          </a:p>
+        </p:txBody>
+      </p:sp>
+      <p:sp>
+        <p:nvSpPr>
+          <p:cNvPr id="36" name="TextBox 35"/>
+          <p:cNvSpPr txBox="1"/>
+          <p:nvPr/>
+        </p:nvSpPr>
+        <p:spPr>
+          <a:xfrm>
+            <a:off x="609600" y="5695950"/>
+            <a:ext cx="10953750" cy="571500"/>
+          </a:xfrm>
+          <a:prstGeom prst="rect">
+            <a:avLst/>
+          </a:prstGeom>
+          <a:noFill/>
+        </p:spPr>
+        <p:txBody>
+          <a:bodyPr wrap="square" lIns="0" rIns="0" tIns="0" bIns="0" anchor="t">
+            <a:spAutoFit/>
+          </a:bodyPr>
+          <a:lstStyle/>
+          <a:p>
+            <a:pPr algn="l">
+              <a:lnSpc>
+                <a:spcPct val="124200"/>
+              </a:lnSpc>
+            </a:pPr>
+            <a:r>
+              <a:rPr sz="1125" b="0">
                 <a:solidFill>
                   <a:srgbClr val="47474D"/>
                 </a:solidFill>
@@ -7806,386 +8797,7 @@
                 <a:ea typeface="Pretendard"/>
                 <a:cs typeface="Pretendard"/>
               </a:rPr>
-              <a:t>결정 장부 재사용, 질문 묶기</a:t>
-            </a:r>
-          </a:p>
-        </p:txBody>
-      </p:sp>
-      <p:sp>
-        <p:nvSpPr>
-          <p:cNvPr id="17" name="Rounded Rectangle 16"/>
-          <p:cNvSpPr/>
-          <p:nvPr/>
-        </p:nvSpPr>
-        <p:spPr>
-          <a:xfrm>
-            <a:off x="7239000" y="2781300"/>
-            <a:ext cx="152400" cy="152400"/>
-          </a:xfrm>
-          <a:prstGeom prst="roundRect">
-            <a:avLst>
-              <a:gd name="adj" fmla="val 50000"/>
-            </a:avLst>
-          </a:prstGeom>
-          <a:solidFill>
-            <a:srgbClr val="2A78D6"/>
-          </a:solidFill>
-          <a:ln>
-            <a:noFill/>
-          </a:ln>
-          <a:effectLst/>
-        </p:spPr>
-        <p:style>
-          <a:lnRef idx="1">
-            <a:schemeClr val="accent1"/>
-          </a:lnRef>
-          <a:fillRef idx="3">
-            <a:schemeClr val="accent1"/>
-          </a:fillRef>
-          <a:effectRef idx="2">
-            <a:schemeClr val="accent1"/>
-          </a:effectRef>
-          <a:fontRef idx="minor">
-            <a:schemeClr val="lt1"/>
-          </a:fontRef>
-        </p:style>
-        <p:txBody>
-          <a:bodyPr rtlCol="0" anchor="ctr"/>
-          <a:lstStyle/>
-          <a:p>
-            <a:pPr algn="ctr"/>
-          </a:p>
-        </p:txBody>
-      </p:sp>
-      <p:sp>
-        <p:nvSpPr>
-          <p:cNvPr id="18" name="TextBox 17"/>
-          <p:cNvSpPr txBox="1"/>
-          <p:nvPr/>
-        </p:nvSpPr>
-        <p:spPr>
-          <a:xfrm>
-            <a:off x="7239000" y="2247900"/>
-            <a:ext cx="2000250" cy="381000"/>
-          </a:xfrm>
-          <a:prstGeom prst="rect">
-            <a:avLst/>
-          </a:prstGeom>
-          <a:noFill/>
-        </p:spPr>
-        <p:txBody>
-          <a:bodyPr wrap="square" lIns="0" rIns="0" tIns="0" bIns="0" anchor="t">
-            <a:spAutoFit/>
-          </a:bodyPr>
-          <a:lstStyle/>
-          <a:p>
-            <a:pPr algn="l">
-              <a:lnSpc>
-                <a:spcPct val="124200"/>
-              </a:lnSpc>
-            </a:pPr>
-            <a:r>
-              <a:rPr sz="1650" b="1">
-                <a:solidFill>
-                  <a:srgbClr val="16161A"/>
-                </a:solidFill>
-                <a:latin typeface="Pretendard"/>
-                <a:ea typeface="Pretendard"/>
-                <a:cs typeface="Pretendard"/>
-              </a:rPr>
-              <a:t>7주</a:t>
-            </a:r>
-          </a:p>
-        </p:txBody>
-      </p:sp>
-      <p:sp>
-        <p:nvSpPr>
-          <p:cNvPr id="19" name="TextBox 18"/>
-          <p:cNvSpPr txBox="1"/>
-          <p:nvPr/>
-        </p:nvSpPr>
-        <p:spPr>
-          <a:xfrm>
-            <a:off x="7239000" y="3143250"/>
-            <a:ext cx="2000250" cy="1905000"/>
-          </a:xfrm>
-          <a:prstGeom prst="rect">
-            <a:avLst/>
-          </a:prstGeom>
-          <a:noFill/>
-        </p:spPr>
-        <p:txBody>
-          <a:bodyPr wrap="square" lIns="0" rIns="0" tIns="0" bIns="0" anchor="t">
-            <a:spAutoFit/>
-          </a:bodyPr>
-          <a:lstStyle/>
-          <a:p>
-            <a:pPr algn="l">
-              <a:lnSpc>
-                <a:spcPct val="147200"/>
-              </a:lnSpc>
-            </a:pPr>
-            <a:r>
-              <a:rPr sz="1275" b="0">
-                <a:solidFill>
-                  <a:srgbClr val="47474D"/>
-                </a:solidFill>
-                <a:latin typeface="Pretendard"/>
-                <a:ea typeface="Pretendard"/>
-                <a:cs typeface="Pretendard"/>
-              </a:rPr>
-              <a:t>분석</a:t>
-            </a:r>
-          </a:p>
-          <a:p>
-            <a:pPr algn="l">
-              <a:lnSpc>
-                <a:spcPct val="147200"/>
-              </a:lnSpc>
-            </a:pPr>
-            <a:r>
-              <a:rPr sz="1275" b="0">
-                <a:solidFill>
-                  <a:srgbClr val="47474D"/>
-                </a:solidFill>
-                <a:latin typeface="Pretendard"/>
-                <a:ea typeface="Pretendard"/>
-                <a:cs typeface="Pretendard"/>
-              </a:rPr>
-              <a:t>Jev 비교 한 번</a:t>
-            </a:r>
-          </a:p>
-        </p:txBody>
-      </p:sp>
-      <p:sp>
-        <p:nvSpPr>
-          <p:cNvPr id="20" name="Rounded Rectangle 19"/>
-          <p:cNvSpPr/>
-          <p:nvPr/>
-        </p:nvSpPr>
-        <p:spPr>
-          <a:xfrm>
-            <a:off x="9448800" y="2781300"/>
-            <a:ext cx="152400" cy="152400"/>
-          </a:xfrm>
-          <a:prstGeom prst="roundRect">
-            <a:avLst>
-              <a:gd name="adj" fmla="val 50000"/>
-            </a:avLst>
-          </a:prstGeom>
-          <a:solidFill>
-            <a:srgbClr val="2A78D6"/>
-          </a:solidFill>
-          <a:ln>
-            <a:noFill/>
-          </a:ln>
-          <a:effectLst/>
-        </p:spPr>
-        <p:style>
-          <a:lnRef idx="1">
-            <a:schemeClr val="accent1"/>
-          </a:lnRef>
-          <a:fillRef idx="3">
-            <a:schemeClr val="accent1"/>
-          </a:fillRef>
-          <a:effectRef idx="2">
-            <a:schemeClr val="accent1"/>
-          </a:effectRef>
-          <a:fontRef idx="minor">
-            <a:schemeClr val="lt1"/>
-          </a:fontRef>
-        </p:style>
-        <p:txBody>
-          <a:bodyPr rtlCol="0" anchor="ctr"/>
-          <a:lstStyle/>
-          <a:p>
-            <a:pPr algn="ctr"/>
-          </a:p>
-        </p:txBody>
-      </p:sp>
-      <p:sp>
-        <p:nvSpPr>
-          <p:cNvPr id="21" name="TextBox 20"/>
-          <p:cNvSpPr txBox="1"/>
-          <p:nvPr/>
-        </p:nvSpPr>
-        <p:spPr>
-          <a:xfrm>
-            <a:off x="9448800" y="2247900"/>
-            <a:ext cx="2000250" cy="381000"/>
-          </a:xfrm>
-          <a:prstGeom prst="rect">
-            <a:avLst/>
-          </a:prstGeom>
-          <a:noFill/>
-        </p:spPr>
-        <p:txBody>
-          <a:bodyPr wrap="square" lIns="0" rIns="0" tIns="0" bIns="0" anchor="t">
-            <a:spAutoFit/>
-          </a:bodyPr>
-          <a:lstStyle/>
-          <a:p>
-            <a:pPr algn="l">
-              <a:lnSpc>
-                <a:spcPct val="124200"/>
-              </a:lnSpc>
-            </a:pPr>
-            <a:r>
-              <a:rPr sz="1650" b="1">
-                <a:solidFill>
-                  <a:srgbClr val="16161A"/>
-                </a:solidFill>
-                <a:latin typeface="Pretendard"/>
-                <a:ea typeface="Pretendard"/>
-                <a:cs typeface="Pretendard"/>
-              </a:rPr>
-              <a:t>8주</a:t>
-            </a:r>
-          </a:p>
-        </p:txBody>
-      </p:sp>
-      <p:sp>
-        <p:nvSpPr>
-          <p:cNvPr id="22" name="TextBox 21"/>
-          <p:cNvSpPr txBox="1"/>
-          <p:nvPr/>
-        </p:nvSpPr>
-        <p:spPr>
-          <a:xfrm>
-            <a:off x="9448800" y="3143250"/>
-            <a:ext cx="2000250" cy="1905000"/>
-          </a:xfrm>
-          <a:prstGeom prst="rect">
-            <a:avLst/>
-          </a:prstGeom>
-          <a:noFill/>
-        </p:spPr>
-        <p:txBody>
-          <a:bodyPr wrap="square" lIns="0" rIns="0" tIns="0" bIns="0" anchor="t">
-            <a:spAutoFit/>
-          </a:bodyPr>
-          <a:lstStyle/>
-          <a:p>
-            <a:pPr algn="l">
-              <a:lnSpc>
-                <a:spcPct val="147200"/>
-              </a:lnSpc>
-            </a:pPr>
-            <a:r>
-              <a:rPr sz="1275" b="0">
-                <a:solidFill>
-                  <a:srgbClr val="47474D"/>
-                </a:solidFill>
-                <a:latin typeface="Pretendard"/>
-                <a:ea typeface="Pretendard"/>
-                <a:cs typeface="Pretendard"/>
-              </a:rPr>
-              <a:t>기말 발표</a:t>
-            </a:r>
-          </a:p>
-          <a:p>
-            <a:pPr algn="l">
-              <a:lnSpc>
-                <a:spcPct val="147200"/>
-              </a:lnSpc>
-            </a:pPr>
-            <a:r>
-              <a:rPr sz="1275" b="0">
-                <a:solidFill>
-                  <a:srgbClr val="47474D"/>
-                </a:solidFill>
-                <a:latin typeface="Pretendard"/>
-                <a:ea typeface="Pretendard"/>
-                <a:cs typeface="Pretendard"/>
-              </a:rPr>
-              <a:t>실측 표와 시연</a:t>
-            </a:r>
-          </a:p>
-        </p:txBody>
-      </p:sp>
-      <p:sp>
-        <p:nvSpPr>
-          <p:cNvPr id="23" name="Rounded Rectangle 22"/>
-          <p:cNvSpPr/>
-          <p:nvPr/>
-        </p:nvSpPr>
-        <p:spPr>
-          <a:xfrm>
-            <a:off x="609600" y="5334000"/>
-            <a:ext cx="10972800" cy="762000"/>
-          </a:xfrm>
-          <a:prstGeom prst="roundRect">
-            <a:avLst>
-              <a:gd name="adj" fmla="val 7500"/>
-            </a:avLst>
-          </a:prstGeom>
-          <a:solidFill>
-            <a:srgbClr val="EFEDE7"/>
-          </a:solidFill>
-          <a:ln>
-            <a:noFill/>
-          </a:ln>
-          <a:effectLst/>
-        </p:spPr>
-        <p:style>
-          <a:lnRef idx="1">
-            <a:schemeClr val="accent1"/>
-          </a:lnRef>
-          <a:fillRef idx="3">
-            <a:schemeClr val="accent1"/>
-          </a:fillRef>
-          <a:effectRef idx="2">
-            <a:schemeClr val="accent1"/>
-          </a:effectRef>
-          <a:fontRef idx="minor">
-            <a:schemeClr val="lt1"/>
-          </a:fontRef>
-        </p:style>
-        <p:txBody>
-          <a:bodyPr rtlCol="0" anchor="ctr"/>
-          <a:lstStyle/>
-          <a:p>
-            <a:pPr algn="ctr"/>
-          </a:p>
-        </p:txBody>
-      </p:sp>
-      <p:sp>
-        <p:nvSpPr>
-          <p:cNvPr id="24" name="TextBox 23"/>
-          <p:cNvSpPr txBox="1"/>
-          <p:nvPr/>
-        </p:nvSpPr>
-        <p:spPr>
-          <a:xfrm>
-            <a:off x="838200" y="5562600"/>
-            <a:ext cx="10572750" cy="381000"/>
-          </a:xfrm>
-          <a:prstGeom prst="rect">
-            <a:avLst/>
-          </a:prstGeom>
-          <a:noFill/>
-        </p:spPr>
-        <p:txBody>
-          <a:bodyPr wrap="square" lIns="0" rIns="0" tIns="0" bIns="0" anchor="t">
-            <a:spAutoFit/>
-          </a:bodyPr>
-          <a:lstStyle/>
-          <a:p>
-            <a:pPr algn="l">
-              <a:lnSpc>
-                <a:spcPct val="124200"/>
-              </a:lnSpc>
-            </a:pPr>
-            <a:r>
-              <a:rPr sz="1350" b="1">
-                <a:solidFill>
-                  <a:srgbClr val="16161A"/>
-                </a:solidFill>
-                <a:latin typeface="Pretendard"/>
-                <a:ea typeface="Pretendard"/>
-                <a:cs typeface="Pretendard"/>
-              </a:rPr>
-              <a:t>기말에 보여 줄 것: 실측 표 하나(A~D × 지표 4개)와 질문이 owner에게 가는 실제 시연</a:t>
+              <a:t>질문 지표(첫 수신자 정확도, 대표 부담, 답 대기 시간)는 C와 D 사이에서 본다. 과제: 정원 마감, 결제 환불, 초대 수락.</a:t>
             </a:r>
           </a:p>
         </p:txBody>
@@ -8252,7 +8864,7 @@
                 <a:ea typeface="Pretendard"/>
                 <a:cs typeface="Pretendard"/>
               </a:rPr>
-              <a:t>더 넣을 것과 미룰 것</a:t>
+              <a:t>일정</a:t>
             </a:r>
           </a:p>
         </p:txBody>
@@ -8293,7 +8905,7 @@
                 <a:ea typeface="Pretendard"/>
                 <a:cs typeface="Pretendard"/>
               </a:rPr>
-              <a:t>13 / 14</a:t>
+              <a:t>13 / 15</a:t>
             </a:r>
           </a:p>
         </p:txBody>
@@ -8334,7 +8946,7 @@
                 <a:ea typeface="Pretendard"/>
                 <a:cs typeface="Pretendard"/>
               </a:rPr>
-              <a:t>대표의 시간을 아끼는 쪽부터</a:t>
+              <a:t>8주 계획</a:t>
             </a:r>
           </a:p>
         </p:txBody>
@@ -8426,55 +9038,14 @@
       </p:sp>
       <p:sp>
         <p:nvSpPr>
-          <p:cNvPr id="7" name="TextBox 6"/>
-          <p:cNvSpPr txBox="1"/>
-          <p:nvPr/>
-        </p:nvSpPr>
-        <p:spPr>
-          <a:xfrm>
-            <a:off x="609600" y="1905000"/>
-            <a:ext cx="3238500" cy="285750"/>
-          </a:xfrm>
-          <a:prstGeom prst="rect">
-            <a:avLst/>
-          </a:prstGeom>
-          <a:noFill/>
-        </p:spPr>
-        <p:txBody>
-          <a:bodyPr wrap="square" lIns="0" rIns="0" tIns="0" bIns="0" anchor="t">
-            <a:spAutoFit/>
-          </a:bodyPr>
-          <a:lstStyle/>
-          <a:p>
-            <a:pPr algn="l">
-              <a:lnSpc>
-                <a:spcPct val="124200"/>
-              </a:lnSpc>
-            </a:pPr>
-            <a:r>
-              <a:rPr sz="1275" b="1">
-                <a:solidFill>
-                  <a:srgbClr val="2A78D6"/>
-                </a:solidFill>
-                <a:latin typeface="Pretendard"/>
-                <a:ea typeface="Pretendard"/>
-                <a:cs typeface="Pretendard"/>
-              </a:rPr>
-              <a:t>이번 학기</a:t>
-            </a:r>
-          </a:p>
-        </p:txBody>
-      </p:sp>
-      <p:sp>
-        <p:nvSpPr>
-          <p:cNvPr id="8" name="Rectangle 7"/>
+          <p:cNvPr id="7" name="Rectangle 6"/>
           <p:cNvSpPr/>
           <p:nvPr/>
         </p:nvSpPr>
         <p:spPr>
           <a:xfrm>
-            <a:off x="609600" y="2247900"/>
-            <a:ext cx="3238500" cy="9525"/>
+            <a:off x="609600" y="2857500"/>
+            <a:ext cx="10972800" cy="19050"/>
           </a:xfrm>
           <a:prstGeom prst="rect">
             <a:avLst/>
@@ -8511,266 +9082,22 @@
       </p:sp>
       <p:sp>
         <p:nvSpPr>
-          <p:cNvPr id="9" name="TextBox 8"/>
-          <p:cNvSpPr txBox="1"/>
-          <p:nvPr/>
-        </p:nvSpPr>
-        <p:spPr>
-          <a:xfrm>
-            <a:off x="609600" y="2400300"/>
-            <a:ext cx="3333750" cy="666750"/>
-          </a:xfrm>
-          <a:prstGeom prst="rect">
-            <a:avLst/>
-          </a:prstGeom>
-          <a:noFill/>
-        </p:spPr>
-        <p:txBody>
-          <a:bodyPr wrap="square" lIns="0" rIns="0" tIns="0" bIns="0" anchor="t">
-            <a:spAutoFit/>
-          </a:bodyPr>
-          <a:lstStyle/>
-          <a:p>
-            <a:pPr algn="l">
-              <a:lnSpc>
-                <a:spcPct val="133400"/>
-              </a:lnSpc>
-            </a:pPr>
-            <a:r>
-              <a:rPr sz="1350" b="0">
-                <a:solidFill>
-                  <a:srgbClr val="16161A"/>
-                </a:solidFill>
-                <a:latin typeface="Pretendard"/>
-                <a:ea typeface="Pretendard"/>
-                <a:cs typeface="Pretendard"/>
-              </a:rPr>
-              <a:t>결정 장부 재사용: 같은 결정은 다시 묻지 않는다</a:t>
-            </a:r>
-          </a:p>
-        </p:txBody>
-      </p:sp>
-      <p:sp>
-        <p:nvSpPr>
-          <p:cNvPr id="10" name="TextBox 9"/>
-          <p:cNvSpPr txBox="1"/>
-          <p:nvPr/>
-        </p:nvSpPr>
-        <p:spPr>
-          <a:xfrm>
-            <a:off x="609600" y="3105150"/>
-            <a:ext cx="3333750" cy="666750"/>
-          </a:xfrm>
-          <a:prstGeom prst="rect">
-            <a:avLst/>
-          </a:prstGeom>
-          <a:noFill/>
-        </p:spPr>
-        <p:txBody>
-          <a:bodyPr wrap="square" lIns="0" rIns="0" tIns="0" bIns="0" anchor="t">
-            <a:spAutoFit/>
-          </a:bodyPr>
-          <a:lstStyle/>
-          <a:p>
-            <a:pPr algn="l">
-              <a:lnSpc>
-                <a:spcPct val="133400"/>
-              </a:lnSpc>
-            </a:pPr>
-            <a:r>
-              <a:rPr sz="1350" b="0">
-                <a:solidFill>
-                  <a:srgbClr val="16161A"/>
-                </a:solidFill>
-                <a:latin typeface="Pretendard"/>
-                <a:ea typeface="Pretendard"/>
-                <a:cs typeface="Pretendard"/>
-              </a:rPr>
-              <a:t>질문 묶기: 같은 사람에게 가는 질문을 한 번에</a:t>
-            </a:r>
-          </a:p>
-        </p:txBody>
-      </p:sp>
-      <p:sp>
-        <p:nvSpPr>
-          <p:cNvPr id="11" name="TextBox 10"/>
-          <p:cNvSpPr txBox="1"/>
-          <p:nvPr/>
-        </p:nvSpPr>
-        <p:spPr>
-          <a:xfrm>
-            <a:off x="609600" y="3810000"/>
-            <a:ext cx="3333750" cy="666750"/>
-          </a:xfrm>
-          <a:prstGeom prst="rect">
-            <a:avLst/>
-          </a:prstGeom>
-          <a:noFill/>
-        </p:spPr>
-        <p:txBody>
-          <a:bodyPr wrap="square" lIns="0" rIns="0" tIns="0" bIns="0" anchor="t">
-            <a:spAutoFit/>
-          </a:bodyPr>
-          <a:lstStyle/>
-          <a:p>
-            <a:pPr algn="l">
-              <a:lnSpc>
-                <a:spcPct val="133400"/>
-              </a:lnSpc>
-            </a:pPr>
-            <a:r>
-              <a:rPr sz="1350" b="0">
-                <a:solidFill>
-                  <a:srgbClr val="16161A"/>
-                </a:solidFill>
-                <a:latin typeface="Pretendard"/>
-                <a:ea typeface="Pretendard"/>
-                <a:cs typeface="Pretendard"/>
-              </a:rPr>
-              <a:t>추천 수락 후 진행, 사후 확인(추천 수락률 78%)</a:t>
-            </a:r>
-          </a:p>
-        </p:txBody>
-      </p:sp>
-      <p:sp>
-        <p:nvSpPr>
-          <p:cNvPr id="12" name="TextBox 11"/>
-          <p:cNvSpPr txBox="1"/>
-          <p:nvPr/>
-        </p:nvSpPr>
-        <p:spPr>
-          <a:xfrm>
-            <a:off x="609600" y="4514850"/>
-            <a:ext cx="3333750" cy="666750"/>
-          </a:xfrm>
-          <a:prstGeom prst="rect">
-            <a:avLst/>
-          </a:prstGeom>
-          <a:noFill/>
-        </p:spPr>
-        <p:txBody>
-          <a:bodyPr wrap="square" lIns="0" rIns="0" tIns="0" bIns="0" anchor="t">
-            <a:spAutoFit/>
-          </a:bodyPr>
-          <a:lstStyle/>
-          <a:p>
-            <a:pPr algn="l">
-              <a:lnSpc>
-                <a:spcPct val="133400"/>
-              </a:lnSpc>
-            </a:pPr>
-            <a:r>
-              <a:rPr sz="1350" b="0">
-                <a:solidFill>
-                  <a:srgbClr val="16161A"/>
-                </a:solidFill>
-                <a:latin typeface="Pretendard"/>
-                <a:ea typeface="Pretendard"/>
-                <a:cs typeface="Pretendard"/>
-              </a:rPr>
-              <a:t>넘기기 버튼과 재배정 로그</a:t>
-            </a:r>
-          </a:p>
-        </p:txBody>
-      </p:sp>
-      <p:sp>
-        <p:nvSpPr>
-          <p:cNvPr id="13" name="TextBox 12"/>
-          <p:cNvSpPr txBox="1"/>
-          <p:nvPr/>
-        </p:nvSpPr>
-        <p:spPr>
-          <a:xfrm>
-            <a:off x="609600" y="5219700"/>
-            <a:ext cx="3333750" cy="666750"/>
-          </a:xfrm>
-          <a:prstGeom prst="rect">
-            <a:avLst/>
-          </a:prstGeom>
-          <a:noFill/>
-        </p:spPr>
-        <p:txBody>
-          <a:bodyPr wrap="square" lIns="0" rIns="0" tIns="0" bIns="0" anchor="t">
-            <a:spAutoFit/>
-          </a:bodyPr>
-          <a:lstStyle/>
-          <a:p>
-            <a:pPr algn="l">
-              <a:lnSpc>
-                <a:spcPct val="133400"/>
-              </a:lnSpc>
-            </a:pPr>
-            <a:r>
-              <a:rPr sz="1350" b="0">
-                <a:solidFill>
-                  <a:srgbClr val="16161A"/>
-                </a:solidFill>
-                <a:latin typeface="Pretendard"/>
-                <a:ea typeface="Pretendard"/>
-                <a:cs typeface="Pretendard"/>
-              </a:rPr>
-              <a:t>답 대기 기준 시간과 자동 상향</a:t>
-            </a:r>
-          </a:p>
-        </p:txBody>
-      </p:sp>
-      <p:sp>
-        <p:nvSpPr>
-          <p:cNvPr id="14" name="TextBox 13"/>
-          <p:cNvSpPr txBox="1"/>
-          <p:nvPr/>
-        </p:nvSpPr>
-        <p:spPr>
-          <a:xfrm>
-            <a:off x="4762500" y="1905000"/>
-            <a:ext cx="3238500" cy="285750"/>
-          </a:xfrm>
-          <a:prstGeom prst="rect">
-            <a:avLst/>
-          </a:prstGeom>
-          <a:noFill/>
-        </p:spPr>
-        <p:txBody>
-          <a:bodyPr wrap="square" lIns="0" rIns="0" tIns="0" bIns="0" anchor="t">
-            <a:spAutoFit/>
-          </a:bodyPr>
-          <a:lstStyle/>
-          <a:p>
-            <a:pPr algn="l">
-              <a:lnSpc>
-                <a:spcPct val="124200"/>
-              </a:lnSpc>
-            </a:pPr>
-            <a:r>
-              <a:rPr sz="1275" b="1">
-                <a:solidFill>
-                  <a:srgbClr val="47474D"/>
-                </a:solidFill>
-                <a:latin typeface="Pretendard"/>
-                <a:ea typeface="Pretendard"/>
-                <a:cs typeface="Pretendard"/>
-              </a:rPr>
-              <a:t>기말에 비교만</a:t>
-            </a:r>
-          </a:p>
-        </p:txBody>
-      </p:sp>
-      <p:sp>
-        <p:nvSpPr>
-          <p:cNvPr id="15" name="Rectangle 14"/>
+          <p:cNvPr id="8" name="Rounded Rectangle 7"/>
           <p:cNvSpPr/>
           <p:nvPr/>
         </p:nvSpPr>
         <p:spPr>
           <a:xfrm>
-            <a:off x="4762500" y="2247900"/>
-            <a:ext cx="3238500" cy="9525"/>
-          </a:xfrm>
-          <a:prstGeom prst="rect">
-            <a:avLst/>
+            <a:off x="609600" y="2781300"/>
+            <a:ext cx="152400" cy="152400"/>
+          </a:xfrm>
+          <a:prstGeom prst="roundRect">
+            <a:avLst>
+              <a:gd name="adj" fmla="val 50000"/>
+            </a:avLst>
           </a:prstGeom>
           <a:solidFill>
-            <a:srgbClr val="16161A"/>
+            <a:srgbClr val="2A78D6"/>
           </a:solidFill>
           <a:ln>
             <a:noFill/>
@@ -8801,33 +9128,33 @@
       </p:sp>
       <p:sp>
         <p:nvSpPr>
-          <p:cNvPr id="16" name="TextBox 15"/>
-          <p:cNvSpPr txBox="1"/>
-          <p:nvPr/>
-        </p:nvSpPr>
-        <p:spPr>
-          <a:xfrm>
-            <a:off x="4762500" y="2400300"/>
-            <a:ext cx="3333750" cy="666750"/>
-          </a:xfrm>
-          <a:prstGeom prst="rect">
-            <a:avLst/>
-          </a:prstGeom>
-          <a:noFill/>
-        </p:spPr>
-        <p:txBody>
-          <a:bodyPr wrap="square" lIns="0" rIns="0" tIns="0" bIns="0" anchor="t">
-            <a:spAutoFit/>
-          </a:bodyPr>
-          <a:lstStyle/>
-          <a:p>
-            <a:pPr algn="l">
-              <a:lnSpc>
-                <a:spcPct val="133400"/>
-              </a:lnSpc>
-            </a:pPr>
-            <a:r>
-              <a:rPr sz="1350" b="0">
+          <p:cNvPr id="9" name="TextBox 8"/>
+          <p:cNvSpPr txBox="1"/>
+          <p:nvPr/>
+        </p:nvSpPr>
+        <p:spPr>
+          <a:xfrm>
+            <a:off x="609600" y="2247900"/>
+            <a:ext cx="2000250" cy="381000"/>
+          </a:xfrm>
+          <a:prstGeom prst="rect">
+            <a:avLst/>
+          </a:prstGeom>
+          <a:noFill/>
+        </p:spPr>
+        <p:txBody>
+          <a:bodyPr wrap="square" lIns="0" rIns="0" tIns="0" bIns="0" anchor="t">
+            <a:spAutoFit/>
+          </a:bodyPr>
+          <a:lstStyle/>
+          <a:p>
+            <a:pPr algn="l">
+              <a:lnSpc>
+                <a:spcPct val="124200"/>
+              </a:lnSpc>
+            </a:pPr>
+            <a:r>
+              <a:rPr sz="1650" b="1">
                 <a:solidFill>
                   <a:srgbClr val="16161A"/>
                 </a:solidFill>
@@ -8835,109 +9162,106 @@
                 <a:ea typeface="Pretendard"/>
                 <a:cs typeface="Pretendard"/>
               </a:rPr>
-              <a:t>Jev 같은 System 1 모델: 기말 비교 한 번</a:t>
-            </a:r>
-          </a:p>
-        </p:txBody>
-      </p:sp>
-      <p:sp>
-        <p:nvSpPr>
-          <p:cNvPr id="17" name="TextBox 16"/>
-          <p:cNvSpPr txBox="1"/>
-          <p:nvPr/>
-        </p:nvSpPr>
-        <p:spPr>
-          <a:xfrm>
-            <a:off x="4762500" y="3105150"/>
-            <a:ext cx="3333750" cy="666750"/>
-          </a:xfrm>
-          <a:prstGeom prst="rect">
-            <a:avLst/>
-          </a:prstGeom>
-          <a:noFill/>
-        </p:spPr>
-        <p:txBody>
-          <a:bodyPr wrap="square" lIns="0" rIns="0" tIns="0" bIns="0" anchor="t">
-            <a:spAutoFit/>
-          </a:bodyPr>
-          <a:lstStyle/>
-          <a:p>
-            <a:pPr algn="l">
-              <a:lnSpc>
-                <a:spcPct val="133400"/>
-              </a:lnSpc>
-            </a:pPr>
-            <a:r>
-              <a:rPr sz="1350" b="0">
-                <a:solidFill>
-                  <a:srgbClr val="16161A"/>
-                </a:solidFill>
-                <a:latin typeface="Pretendard"/>
-                <a:ea typeface="Pretendard"/>
-                <a:cs typeface="Pretendard"/>
-              </a:rPr>
-              <a:t>질문 품질 검사(맥락, 선택지 누락)</a:t>
-            </a:r>
-          </a:p>
-        </p:txBody>
-      </p:sp>
-      <p:sp>
-        <p:nvSpPr>
-          <p:cNvPr id="18" name="TextBox 17"/>
-          <p:cNvSpPr txBox="1"/>
-          <p:nvPr/>
-        </p:nvSpPr>
-        <p:spPr>
-          <a:xfrm>
-            <a:off x="8286750" y="1905000"/>
-            <a:ext cx="3238500" cy="285750"/>
-          </a:xfrm>
-          <a:prstGeom prst="rect">
-            <a:avLst/>
-          </a:prstGeom>
-          <a:noFill/>
-        </p:spPr>
-        <p:txBody>
-          <a:bodyPr wrap="square" lIns="0" rIns="0" tIns="0" bIns="0" anchor="t">
-            <a:spAutoFit/>
-          </a:bodyPr>
-          <a:lstStyle/>
-          <a:p>
-            <a:pPr algn="l">
-              <a:lnSpc>
-                <a:spcPct val="124200"/>
-              </a:lnSpc>
-            </a:pPr>
-            <a:r>
-              <a:rPr sz="1275" b="1">
-                <a:solidFill>
-                  <a:srgbClr val="7A7A80"/>
-                </a:solidFill>
-                <a:latin typeface="Pretendard"/>
-                <a:ea typeface="Pretendard"/>
-                <a:cs typeface="Pretendard"/>
-              </a:rPr>
-              <a:t>보류</a:t>
-            </a:r>
-          </a:p>
-        </p:txBody>
-      </p:sp>
-      <p:sp>
-        <p:nvSpPr>
-          <p:cNvPr id="19" name="Rectangle 18"/>
+              <a:t>1~2주</a:t>
+            </a:r>
+          </a:p>
+        </p:txBody>
+      </p:sp>
+      <p:sp>
+        <p:nvSpPr>
+          <p:cNvPr id="10" name="TextBox 9"/>
+          <p:cNvSpPr txBox="1"/>
+          <p:nvPr/>
+        </p:nvSpPr>
+        <p:spPr>
+          <a:xfrm>
+            <a:off x="609600" y="3143250"/>
+            <a:ext cx="2000250" cy="1905000"/>
+          </a:xfrm>
+          <a:prstGeom prst="rect">
+            <a:avLst/>
+          </a:prstGeom>
+          <a:noFill/>
+        </p:spPr>
+        <p:txBody>
+          <a:bodyPr wrap="square" lIns="0" rIns="0" tIns="0" bIns="0" anchor="t">
+            <a:spAutoFit/>
+          </a:bodyPr>
+          <a:lstStyle/>
+          <a:p>
+            <a:pPr algn="l">
+              <a:lnSpc>
+                <a:spcPct val="147200"/>
+              </a:lnSpc>
+            </a:pPr>
+            <a:r>
+              <a:rPr sz="1275" b="0">
+                <a:solidFill>
+                  <a:srgbClr val="47474D"/>
+                </a:solidFill>
+                <a:latin typeface="Pretendard"/>
+                <a:ea typeface="Pretendard"/>
+                <a:cs typeface="Pretendard"/>
+              </a:rPr>
+              <a:t>사람 검수 300문항(블라인드, 카파)</a:t>
+            </a:r>
+          </a:p>
+          <a:p>
+            <a:pPr algn="l">
+              <a:lnSpc>
+                <a:spcPct val="147200"/>
+              </a:lnSpc>
+            </a:pPr>
+            <a:r>
+              <a:rPr sz="1275" b="0">
+                <a:solidFill>
+                  <a:srgbClr val="47474D"/>
+                </a:solidFill>
+                <a:latin typeface="Pretendard"/>
+                <a:ea typeface="Pretendard"/>
+                <a:cs typeface="Pretendard"/>
+              </a:rPr>
+              <a:t>라우터 v2 연결, 넘기기 버튼</a:t>
+            </a:r>
+          </a:p>
+          <a:p>
+            <a:pPr algn="l">
+              <a:lnSpc>
+                <a:spcPct val="147200"/>
+              </a:lnSpc>
+            </a:pPr>
+            <a:r>
+              <a:rPr sz="1275" b="0">
+                <a:solidFill>
+                  <a:srgbClr val="47474D"/>
+                </a:solidFill>
+                <a:latin typeface="Pretendard"/>
+                <a:ea typeface="Pretendard"/>
+                <a:cs typeface="Pretendard"/>
+              </a:rPr>
+              <a:t>계약 대조(V1A) 켜기</a:t>
+            </a:r>
+          </a:p>
+        </p:txBody>
+      </p:sp>
+      <p:sp>
+        <p:nvSpPr>
+          <p:cNvPr id="11" name="Rounded Rectangle 10"/>
           <p:cNvSpPr/>
           <p:nvPr/>
         </p:nvSpPr>
         <p:spPr>
           <a:xfrm>
-            <a:off x="8286750" y="2247900"/>
-            <a:ext cx="3238500" cy="9525"/>
-          </a:xfrm>
-          <a:prstGeom prst="rect">
-            <a:avLst/>
+            <a:off x="2819400" y="2781300"/>
+            <a:ext cx="152400" cy="152400"/>
+          </a:xfrm>
+          <a:prstGeom prst="roundRect">
+            <a:avLst>
+              <a:gd name="adj" fmla="val 50000"/>
+            </a:avLst>
           </a:prstGeom>
           <a:solidFill>
-            <a:srgbClr val="16161A"/>
+            <a:srgbClr val="2A78D6"/>
           </a:solidFill>
           <a:ln>
             <a:noFill/>
@@ -8968,33 +9292,33 @@
       </p:sp>
       <p:sp>
         <p:nvSpPr>
-          <p:cNvPr id="20" name="TextBox 19"/>
-          <p:cNvSpPr txBox="1"/>
-          <p:nvPr/>
-        </p:nvSpPr>
-        <p:spPr>
-          <a:xfrm>
-            <a:off x="8286750" y="2400300"/>
-            <a:ext cx="3333750" cy="666750"/>
-          </a:xfrm>
-          <a:prstGeom prst="rect">
-            <a:avLst/>
-          </a:prstGeom>
-          <a:noFill/>
-        </p:spPr>
-        <p:txBody>
-          <a:bodyPr wrap="square" lIns="0" rIns="0" tIns="0" bIns="0" anchor="t">
-            <a:spAutoFit/>
-          </a:bodyPr>
-          <a:lstStyle/>
-          <a:p>
-            <a:pPr algn="l">
-              <a:lnSpc>
-                <a:spcPct val="133400"/>
-              </a:lnSpc>
-            </a:pPr>
-            <a:r>
-              <a:rPr sz="1350" b="0">
+          <p:cNvPr id="12" name="TextBox 11"/>
+          <p:cNvSpPr txBox="1"/>
+          <p:nvPr/>
+        </p:nvSpPr>
+        <p:spPr>
+          <a:xfrm>
+            <a:off x="2819400" y="2247900"/>
+            <a:ext cx="2000250" cy="381000"/>
+          </a:xfrm>
+          <a:prstGeom prst="rect">
+            <a:avLst/>
+          </a:prstGeom>
+          <a:noFill/>
+        </p:spPr>
+        <p:txBody>
+          <a:bodyPr wrap="square" lIns="0" rIns="0" tIns="0" bIns="0" anchor="t">
+            <a:spAutoFit/>
+          </a:bodyPr>
+          <a:lstStyle/>
+          <a:p>
+            <a:pPr algn="l">
+              <a:lnSpc>
+                <a:spcPct val="124200"/>
+              </a:lnSpc>
+            </a:pPr>
+            <a:r>
+              <a:rPr sz="1650" b="1">
                 <a:solidFill>
                   <a:srgbClr val="16161A"/>
                 </a:solidFill>
@@ -9002,8 +9326,405 @@
                 <a:ea typeface="Pretendard"/>
                 <a:cs typeface="Pretendard"/>
               </a:rPr>
-              <a:t>역할 5개 이상으로 확장</a:t>
-            </a:r>
+              <a:t>3~4주</a:t>
+            </a:r>
+          </a:p>
+        </p:txBody>
+      </p:sp>
+      <p:sp>
+        <p:nvSpPr>
+          <p:cNvPr id="13" name="TextBox 12"/>
+          <p:cNvSpPr txBox="1"/>
+          <p:nvPr/>
+        </p:nvSpPr>
+        <p:spPr>
+          <a:xfrm>
+            <a:off x="2819400" y="3143250"/>
+            <a:ext cx="2000250" cy="1905000"/>
+          </a:xfrm>
+          <a:prstGeom prst="rect">
+            <a:avLst/>
+          </a:prstGeom>
+          <a:noFill/>
+        </p:spPr>
+        <p:txBody>
+          <a:bodyPr wrap="square" lIns="0" rIns="0" tIns="0" bIns="0" anchor="t">
+            <a:spAutoFit/>
+          </a:bodyPr>
+          <a:lstStyle/>
+          <a:p>
+            <a:pPr algn="l">
+              <a:lnSpc>
+                <a:spcPct val="147200"/>
+              </a:lnSpc>
+            </a:pPr>
+            <a:r>
+              <a:rPr sz="1275" b="0">
+                <a:solidFill>
+                  <a:srgbClr val="47474D"/>
+                </a:solidFill>
+                <a:latin typeface="Pretendard"/>
+                <a:ea typeface="Pretendard"/>
+                <a:cs typeface="Pretendard"/>
+              </a:rPr>
+              <a:t>과제 3개 확정</a:t>
+            </a:r>
+          </a:p>
+          <a:p>
+            <a:pPr algn="l">
+              <a:lnSpc>
+                <a:spcPct val="147200"/>
+              </a:lnSpc>
+            </a:pPr>
+            <a:r>
+              <a:rPr sz="1275" b="0">
+                <a:solidFill>
+                  <a:srgbClr val="47474D"/>
+                </a:solidFill>
+                <a:latin typeface="Pretendard"/>
+                <a:ea typeface="Pretendard"/>
+                <a:cs typeface="Pretendard"/>
+              </a:rPr>
+              <a:t>조건 A~D 실행 파이프라인과 로그</a:t>
+            </a:r>
+          </a:p>
+        </p:txBody>
+      </p:sp>
+      <p:sp>
+        <p:nvSpPr>
+          <p:cNvPr id="14" name="Rounded Rectangle 13"/>
+          <p:cNvSpPr/>
+          <p:nvPr/>
+        </p:nvSpPr>
+        <p:spPr>
+          <a:xfrm>
+            <a:off x="5029200" y="2781300"/>
+            <a:ext cx="152400" cy="152400"/>
+          </a:xfrm>
+          <a:prstGeom prst="roundRect">
+            <a:avLst>
+              <a:gd name="adj" fmla="val 50000"/>
+            </a:avLst>
+          </a:prstGeom>
+          <a:solidFill>
+            <a:srgbClr val="2A78D6"/>
+          </a:solidFill>
+          <a:ln>
+            <a:noFill/>
+          </a:ln>
+          <a:effectLst/>
+        </p:spPr>
+        <p:style>
+          <a:lnRef idx="1">
+            <a:schemeClr val="accent1"/>
+          </a:lnRef>
+          <a:fillRef idx="3">
+            <a:schemeClr val="accent1"/>
+          </a:fillRef>
+          <a:effectRef idx="2">
+            <a:schemeClr val="accent1"/>
+          </a:effectRef>
+          <a:fontRef idx="minor">
+            <a:schemeClr val="lt1"/>
+          </a:fontRef>
+        </p:style>
+        <p:txBody>
+          <a:bodyPr rtlCol="0" anchor="ctr"/>
+          <a:lstStyle/>
+          <a:p>
+            <a:pPr algn="ctr"/>
+          </a:p>
+        </p:txBody>
+      </p:sp>
+      <p:sp>
+        <p:nvSpPr>
+          <p:cNvPr id="15" name="TextBox 14"/>
+          <p:cNvSpPr txBox="1"/>
+          <p:nvPr/>
+        </p:nvSpPr>
+        <p:spPr>
+          <a:xfrm>
+            <a:off x="5029200" y="2247900"/>
+            <a:ext cx="2000250" cy="381000"/>
+          </a:xfrm>
+          <a:prstGeom prst="rect">
+            <a:avLst/>
+          </a:prstGeom>
+          <a:noFill/>
+        </p:spPr>
+        <p:txBody>
+          <a:bodyPr wrap="square" lIns="0" rIns="0" tIns="0" bIns="0" anchor="t">
+            <a:spAutoFit/>
+          </a:bodyPr>
+          <a:lstStyle/>
+          <a:p>
+            <a:pPr algn="l">
+              <a:lnSpc>
+                <a:spcPct val="124200"/>
+              </a:lnSpc>
+            </a:pPr>
+            <a:r>
+              <a:rPr sz="1650" b="1">
+                <a:solidFill>
+                  <a:srgbClr val="16161A"/>
+                </a:solidFill>
+                <a:latin typeface="Pretendard"/>
+                <a:ea typeface="Pretendard"/>
+                <a:cs typeface="Pretendard"/>
+              </a:rPr>
+              <a:t>5~6주</a:t>
+            </a:r>
+          </a:p>
+        </p:txBody>
+      </p:sp>
+      <p:sp>
+        <p:nvSpPr>
+          <p:cNvPr id="16" name="TextBox 15"/>
+          <p:cNvSpPr txBox="1"/>
+          <p:nvPr/>
+        </p:nvSpPr>
+        <p:spPr>
+          <a:xfrm>
+            <a:off x="5029200" y="3143250"/>
+            <a:ext cx="2000250" cy="1905000"/>
+          </a:xfrm>
+          <a:prstGeom prst="rect">
+            <a:avLst/>
+          </a:prstGeom>
+          <a:noFill/>
+        </p:spPr>
+        <p:txBody>
+          <a:bodyPr wrap="square" lIns="0" rIns="0" tIns="0" bIns="0" anchor="t">
+            <a:spAutoFit/>
+          </a:bodyPr>
+          <a:lstStyle/>
+          <a:p>
+            <a:pPr algn="l">
+              <a:lnSpc>
+                <a:spcPct val="147200"/>
+              </a:lnSpc>
+            </a:pPr>
+            <a:r>
+              <a:rPr sz="1275" b="0">
+                <a:solidFill>
+                  <a:srgbClr val="47474D"/>
+                </a:solidFill>
+                <a:latin typeface="Pretendard"/>
+                <a:ea typeface="Pretendard"/>
+                <a:cs typeface="Pretendard"/>
+              </a:rPr>
+              <a:t>본 실험</a:t>
+            </a:r>
+          </a:p>
+          <a:p>
+            <a:pPr algn="l">
+              <a:lnSpc>
+                <a:spcPct val="147200"/>
+              </a:lnSpc>
+            </a:pPr>
+            <a:r>
+              <a:rPr sz="1275" b="0">
+                <a:solidFill>
+                  <a:srgbClr val="47474D"/>
+                </a:solidFill>
+                <a:latin typeface="Pretendard"/>
+                <a:ea typeface="Pretendard"/>
+                <a:cs typeface="Pretendard"/>
+              </a:rPr>
+              <a:t>결정 장부 재사용, 질문 묶기</a:t>
+            </a:r>
+          </a:p>
+        </p:txBody>
+      </p:sp>
+      <p:sp>
+        <p:nvSpPr>
+          <p:cNvPr id="17" name="Rounded Rectangle 16"/>
+          <p:cNvSpPr/>
+          <p:nvPr/>
+        </p:nvSpPr>
+        <p:spPr>
+          <a:xfrm>
+            <a:off x="7239000" y="2781300"/>
+            <a:ext cx="152400" cy="152400"/>
+          </a:xfrm>
+          <a:prstGeom prst="roundRect">
+            <a:avLst>
+              <a:gd name="adj" fmla="val 50000"/>
+            </a:avLst>
+          </a:prstGeom>
+          <a:solidFill>
+            <a:srgbClr val="2A78D6"/>
+          </a:solidFill>
+          <a:ln>
+            <a:noFill/>
+          </a:ln>
+          <a:effectLst/>
+        </p:spPr>
+        <p:style>
+          <a:lnRef idx="1">
+            <a:schemeClr val="accent1"/>
+          </a:lnRef>
+          <a:fillRef idx="3">
+            <a:schemeClr val="accent1"/>
+          </a:fillRef>
+          <a:effectRef idx="2">
+            <a:schemeClr val="accent1"/>
+          </a:effectRef>
+          <a:fontRef idx="minor">
+            <a:schemeClr val="lt1"/>
+          </a:fontRef>
+        </p:style>
+        <p:txBody>
+          <a:bodyPr rtlCol="0" anchor="ctr"/>
+          <a:lstStyle/>
+          <a:p>
+            <a:pPr algn="ctr"/>
+          </a:p>
+        </p:txBody>
+      </p:sp>
+      <p:sp>
+        <p:nvSpPr>
+          <p:cNvPr id="18" name="TextBox 17"/>
+          <p:cNvSpPr txBox="1"/>
+          <p:nvPr/>
+        </p:nvSpPr>
+        <p:spPr>
+          <a:xfrm>
+            <a:off x="7239000" y="2247900"/>
+            <a:ext cx="2000250" cy="381000"/>
+          </a:xfrm>
+          <a:prstGeom prst="rect">
+            <a:avLst/>
+          </a:prstGeom>
+          <a:noFill/>
+        </p:spPr>
+        <p:txBody>
+          <a:bodyPr wrap="square" lIns="0" rIns="0" tIns="0" bIns="0" anchor="t">
+            <a:spAutoFit/>
+          </a:bodyPr>
+          <a:lstStyle/>
+          <a:p>
+            <a:pPr algn="l">
+              <a:lnSpc>
+                <a:spcPct val="124200"/>
+              </a:lnSpc>
+            </a:pPr>
+            <a:r>
+              <a:rPr sz="1650" b="1">
+                <a:solidFill>
+                  <a:srgbClr val="16161A"/>
+                </a:solidFill>
+                <a:latin typeface="Pretendard"/>
+                <a:ea typeface="Pretendard"/>
+                <a:cs typeface="Pretendard"/>
+              </a:rPr>
+              <a:t>7주</a:t>
+            </a:r>
+          </a:p>
+        </p:txBody>
+      </p:sp>
+      <p:sp>
+        <p:nvSpPr>
+          <p:cNvPr id="19" name="TextBox 18"/>
+          <p:cNvSpPr txBox="1"/>
+          <p:nvPr/>
+        </p:nvSpPr>
+        <p:spPr>
+          <a:xfrm>
+            <a:off x="7239000" y="3143250"/>
+            <a:ext cx="2000250" cy="1905000"/>
+          </a:xfrm>
+          <a:prstGeom prst="rect">
+            <a:avLst/>
+          </a:prstGeom>
+          <a:noFill/>
+        </p:spPr>
+        <p:txBody>
+          <a:bodyPr wrap="square" lIns="0" rIns="0" tIns="0" bIns="0" anchor="t">
+            <a:spAutoFit/>
+          </a:bodyPr>
+          <a:lstStyle/>
+          <a:p>
+            <a:pPr algn="l">
+              <a:lnSpc>
+                <a:spcPct val="147200"/>
+              </a:lnSpc>
+            </a:pPr>
+            <a:r>
+              <a:rPr sz="1275" b="0">
+                <a:solidFill>
+                  <a:srgbClr val="47474D"/>
+                </a:solidFill>
+                <a:latin typeface="Pretendard"/>
+                <a:ea typeface="Pretendard"/>
+                <a:cs typeface="Pretendard"/>
+              </a:rPr>
+              <a:t>분석</a:t>
+            </a:r>
+          </a:p>
+          <a:p>
+            <a:pPr algn="l">
+              <a:lnSpc>
+                <a:spcPct val="147200"/>
+              </a:lnSpc>
+            </a:pPr>
+            <a:r>
+              <a:rPr sz="1275" b="0">
+                <a:solidFill>
+                  <a:srgbClr val="47474D"/>
+                </a:solidFill>
+                <a:latin typeface="Pretendard"/>
+                <a:ea typeface="Pretendard"/>
+                <a:cs typeface="Pretendard"/>
+              </a:rPr>
+              <a:t>Jev 비교 한 번</a:t>
+            </a:r>
+          </a:p>
+        </p:txBody>
+      </p:sp>
+      <p:sp>
+        <p:nvSpPr>
+          <p:cNvPr id="20" name="Rounded Rectangle 19"/>
+          <p:cNvSpPr/>
+          <p:nvPr/>
+        </p:nvSpPr>
+        <p:spPr>
+          <a:xfrm>
+            <a:off x="9448800" y="2781300"/>
+            <a:ext cx="152400" cy="152400"/>
+          </a:xfrm>
+          <a:prstGeom prst="roundRect">
+            <a:avLst>
+              <a:gd name="adj" fmla="val 50000"/>
+            </a:avLst>
+          </a:prstGeom>
+          <a:solidFill>
+            <a:srgbClr val="2A78D6"/>
+          </a:solidFill>
+          <a:ln>
+            <a:noFill/>
+          </a:ln>
+          <a:effectLst/>
+        </p:spPr>
+        <p:style>
+          <a:lnRef idx="1">
+            <a:schemeClr val="accent1"/>
+          </a:lnRef>
+          <a:fillRef idx="3">
+            <a:schemeClr val="accent1"/>
+          </a:fillRef>
+          <a:effectRef idx="2">
+            <a:schemeClr val="accent1"/>
+          </a:effectRef>
+          <a:fontRef idx="minor">
+            <a:schemeClr val="lt1"/>
+          </a:fontRef>
+        </p:style>
+        <p:txBody>
+          <a:bodyPr rtlCol="0" anchor="ctr"/>
+          <a:lstStyle/>
+          <a:p>
+            <a:pPr algn="ctr"/>
           </a:p>
         </p:txBody>
       </p:sp>
@@ -9015,27 +9736,27 @@
         </p:nvSpPr>
         <p:spPr>
           <a:xfrm>
-            <a:off x="8286750" y="3105150"/>
-            <a:ext cx="3333750" cy="666750"/>
-          </a:xfrm>
-          <a:prstGeom prst="rect">
-            <a:avLst/>
-          </a:prstGeom>
-          <a:noFill/>
-        </p:spPr>
-        <p:txBody>
-          <a:bodyPr wrap="square" lIns="0" rIns="0" tIns="0" bIns="0" anchor="t">
-            <a:spAutoFit/>
-          </a:bodyPr>
-          <a:lstStyle/>
-          <a:p>
-            <a:pPr algn="l">
-              <a:lnSpc>
-                <a:spcPct val="133400"/>
-              </a:lnSpc>
-            </a:pPr>
-            <a:r>
-              <a:rPr sz="1350" b="0">
+            <a:off x="9448800" y="2247900"/>
+            <a:ext cx="2000250" cy="381000"/>
+          </a:xfrm>
+          <a:prstGeom prst="rect">
+            <a:avLst/>
+          </a:prstGeom>
+          <a:noFill/>
+        </p:spPr>
+        <p:txBody>
+          <a:bodyPr wrap="square" lIns="0" rIns="0" tIns="0" bIns="0" anchor="t">
+            <a:spAutoFit/>
+          </a:bodyPr>
+          <a:lstStyle/>
+          <a:p>
+            <a:pPr algn="l">
+              <a:lnSpc>
+                <a:spcPct val="124200"/>
+              </a:lnSpc>
+            </a:pPr>
+            <a:r>
+              <a:rPr sz="1650" b="1">
                 <a:solidFill>
                   <a:srgbClr val="16161A"/>
                 </a:solidFill>
@@ -9043,7 +9764,153 @@
                 <a:ea typeface="Pretendard"/>
                 <a:cs typeface="Pretendard"/>
               </a:rPr>
-              <a:t>비판, ERD, 스케줄러 전용 에이전트</a:t>
+              <a:t>8주</a:t>
+            </a:r>
+          </a:p>
+        </p:txBody>
+      </p:sp>
+      <p:sp>
+        <p:nvSpPr>
+          <p:cNvPr id="22" name="TextBox 21"/>
+          <p:cNvSpPr txBox="1"/>
+          <p:nvPr/>
+        </p:nvSpPr>
+        <p:spPr>
+          <a:xfrm>
+            <a:off x="9448800" y="3143250"/>
+            <a:ext cx="2000250" cy="1905000"/>
+          </a:xfrm>
+          <a:prstGeom prst="rect">
+            <a:avLst/>
+          </a:prstGeom>
+          <a:noFill/>
+        </p:spPr>
+        <p:txBody>
+          <a:bodyPr wrap="square" lIns="0" rIns="0" tIns="0" bIns="0" anchor="t">
+            <a:spAutoFit/>
+          </a:bodyPr>
+          <a:lstStyle/>
+          <a:p>
+            <a:pPr algn="l">
+              <a:lnSpc>
+                <a:spcPct val="147200"/>
+              </a:lnSpc>
+            </a:pPr>
+            <a:r>
+              <a:rPr sz="1275" b="0">
+                <a:solidFill>
+                  <a:srgbClr val="47474D"/>
+                </a:solidFill>
+                <a:latin typeface="Pretendard"/>
+                <a:ea typeface="Pretendard"/>
+                <a:cs typeface="Pretendard"/>
+              </a:rPr>
+              <a:t>기말 발표</a:t>
+            </a:r>
+          </a:p>
+          <a:p>
+            <a:pPr algn="l">
+              <a:lnSpc>
+                <a:spcPct val="147200"/>
+              </a:lnSpc>
+            </a:pPr>
+            <a:r>
+              <a:rPr sz="1275" b="0">
+                <a:solidFill>
+                  <a:srgbClr val="47474D"/>
+                </a:solidFill>
+                <a:latin typeface="Pretendard"/>
+                <a:ea typeface="Pretendard"/>
+                <a:cs typeface="Pretendard"/>
+              </a:rPr>
+              <a:t>실측 표와 시연</a:t>
+            </a:r>
+          </a:p>
+        </p:txBody>
+      </p:sp>
+      <p:sp>
+        <p:nvSpPr>
+          <p:cNvPr id="23" name="Rounded Rectangle 22"/>
+          <p:cNvSpPr/>
+          <p:nvPr/>
+        </p:nvSpPr>
+        <p:spPr>
+          <a:xfrm>
+            <a:off x="609600" y="5334000"/>
+            <a:ext cx="10972800" cy="762000"/>
+          </a:xfrm>
+          <a:prstGeom prst="roundRect">
+            <a:avLst>
+              <a:gd name="adj" fmla="val 7500"/>
+            </a:avLst>
+          </a:prstGeom>
+          <a:solidFill>
+            <a:srgbClr val="EFEDE7"/>
+          </a:solidFill>
+          <a:ln>
+            <a:noFill/>
+          </a:ln>
+          <a:effectLst/>
+        </p:spPr>
+        <p:style>
+          <a:lnRef idx="1">
+            <a:schemeClr val="accent1"/>
+          </a:lnRef>
+          <a:fillRef idx="3">
+            <a:schemeClr val="accent1"/>
+          </a:fillRef>
+          <a:effectRef idx="2">
+            <a:schemeClr val="accent1"/>
+          </a:effectRef>
+          <a:fontRef idx="minor">
+            <a:schemeClr val="lt1"/>
+          </a:fontRef>
+        </p:style>
+        <p:txBody>
+          <a:bodyPr rtlCol="0" anchor="ctr"/>
+          <a:lstStyle/>
+          <a:p>
+            <a:pPr algn="ctr"/>
+          </a:p>
+        </p:txBody>
+      </p:sp>
+      <p:sp>
+        <p:nvSpPr>
+          <p:cNvPr id="24" name="TextBox 23"/>
+          <p:cNvSpPr txBox="1"/>
+          <p:nvPr/>
+        </p:nvSpPr>
+        <p:spPr>
+          <a:xfrm>
+            <a:off x="838200" y="5562600"/>
+            <a:ext cx="10572750" cy="381000"/>
+          </a:xfrm>
+          <a:prstGeom prst="rect">
+            <a:avLst/>
+          </a:prstGeom>
+          <a:noFill/>
+        </p:spPr>
+        <p:txBody>
+          <a:bodyPr wrap="square" lIns="0" rIns="0" tIns="0" bIns="0" anchor="t">
+            <a:spAutoFit/>
+          </a:bodyPr>
+          <a:lstStyle/>
+          <a:p>
+            <a:pPr algn="l">
+              <a:lnSpc>
+                <a:spcPct val="124200"/>
+              </a:lnSpc>
+            </a:pPr>
+            <a:r>
+              <a:rPr sz="1350" b="1">
+                <a:solidFill>
+                  <a:srgbClr val="16161A"/>
+                </a:solidFill>
+                <a:latin typeface="Pretendard"/>
+                <a:ea typeface="Pretendard"/>
+                <a:cs typeface="Pretendard"/>
+              </a:rPr>
+              <a:t>기말에 보여 줄 것: 실측 표 하나(A~D × 지표 4개)와 질문이 owner에게 가는 실제 시연</a:t>
             </a:r>
           </a:p>
         </p:txBody>
@@ -9057,6 +9924,864 @@
 </file>
 
 <file path=ppt/slides/slide14.xml><?xml version="1.0" encoding="utf-8"?>
+<p:sld xmlns:a="http://schemas.openxmlformats.org/drawingml/2006/main" xmlns:p="http://schemas.openxmlformats.org/presentationml/2006/main" xmlns:r="http://schemas.openxmlformats.org/officeDocument/2006/relationships">
+  <p:cSld>
+    <p:bg>
+      <p:bgPr>
+        <a:solidFill>
+          <a:srgbClr val="F7F6F2"/>
+        </a:solidFill>
+        <a:effectLst/>
+      </p:bgPr>
+    </p:bg>
+    <p:spTree>
+      <p:nvGrpSpPr>
+        <p:cNvPr id="1" name=""/>
+        <p:cNvGrpSpPr/>
+        <p:nvPr/>
+      </p:nvGrpSpPr>
+      <p:grpSpPr/>
+      <p:sp>
+        <p:nvSpPr>
+          <p:cNvPr id="2" name="TextBox 1"/>
+          <p:cNvSpPr txBox="1"/>
+          <p:nvPr/>
+        </p:nvSpPr>
+        <p:spPr>
+          <a:xfrm>
+            <a:off x="609600" y="381000"/>
+            <a:ext cx="6667500" cy="228600"/>
+          </a:xfrm>
+          <a:prstGeom prst="rect">
+            <a:avLst/>
+          </a:prstGeom>
+          <a:noFill/>
+        </p:spPr>
+        <p:txBody>
+          <a:bodyPr wrap="square" lIns="0" rIns="0" tIns="0" bIns="0" anchor="t">
+            <a:spAutoFit/>
+          </a:bodyPr>
+          <a:lstStyle/>
+          <a:p>
+            <a:pPr algn="l">
+              <a:lnSpc>
+                <a:spcPct val="124200"/>
+              </a:lnSpc>
+            </a:pPr>
+            <a:r>
+              <a:rPr sz="1050" b="1">
+                <a:solidFill>
+                  <a:srgbClr val="7A7A80"/>
+                </a:solidFill>
+                <a:latin typeface="Pretendard"/>
+                <a:ea typeface="Pretendard"/>
+                <a:cs typeface="Pretendard"/>
+              </a:rPr>
+              <a:t>더 넣을 것과 미룰 것</a:t>
+            </a:r>
+          </a:p>
+        </p:txBody>
+      </p:sp>
+      <p:sp>
+        <p:nvSpPr>
+          <p:cNvPr id="3" name="TextBox 2"/>
+          <p:cNvSpPr txBox="1"/>
+          <p:nvPr/>
+        </p:nvSpPr>
+        <p:spPr>
+          <a:xfrm>
+            <a:off x="9525000" y="381000"/>
+            <a:ext cx="2057400" cy="228600"/>
+          </a:xfrm>
+          <a:prstGeom prst="rect">
+            <a:avLst/>
+          </a:prstGeom>
+          <a:noFill/>
+        </p:spPr>
+        <p:txBody>
+          <a:bodyPr wrap="square" lIns="0" rIns="0" tIns="0" bIns="0" anchor="t">
+            <a:spAutoFit/>
+          </a:bodyPr>
+          <a:lstStyle/>
+          <a:p>
+            <a:pPr algn="r">
+              <a:lnSpc>
+                <a:spcPct val="124200"/>
+              </a:lnSpc>
+            </a:pPr>
+            <a:r>
+              <a:rPr sz="975" b="0">
+                <a:solidFill>
+                  <a:srgbClr val="7A7A80"/>
+                </a:solidFill>
+                <a:latin typeface="Pretendard"/>
+                <a:ea typeface="Pretendard"/>
+                <a:cs typeface="Pretendard"/>
+              </a:rPr>
+              <a:t>14 / 15</a:t>
+            </a:r>
+          </a:p>
+        </p:txBody>
+      </p:sp>
+      <p:sp>
+        <p:nvSpPr>
+          <p:cNvPr id="4" name="TextBox 3"/>
+          <p:cNvSpPr txBox="1"/>
+          <p:nvPr/>
+        </p:nvSpPr>
+        <p:spPr>
+          <a:xfrm>
+            <a:off x="609600" y="704850"/>
+            <a:ext cx="10953750" cy="1047750"/>
+          </a:xfrm>
+          <a:prstGeom prst="rect">
+            <a:avLst/>
+          </a:prstGeom>
+          <a:noFill/>
+        </p:spPr>
+        <p:txBody>
+          <a:bodyPr wrap="square" lIns="0" rIns="0" tIns="0" bIns="0" anchor="t">
+            <a:spAutoFit/>
+          </a:bodyPr>
+          <a:lstStyle/>
+          <a:p>
+            <a:pPr algn="l">
+              <a:lnSpc>
+                <a:spcPct val="112240"/>
+              </a:lnSpc>
+            </a:pPr>
+            <a:r>
+              <a:rPr sz="2850" b="1">
+                <a:solidFill>
+                  <a:srgbClr val="16161A"/>
+                </a:solidFill>
+                <a:latin typeface="Pretendard"/>
+                <a:ea typeface="Pretendard"/>
+                <a:cs typeface="Pretendard"/>
+              </a:rPr>
+              <a:t>대표의 시간을 아끼는 쪽부터</a:t>
+            </a:r>
+          </a:p>
+        </p:txBody>
+      </p:sp>
+      <p:sp>
+        <p:nvSpPr>
+          <p:cNvPr id="5" name="Rectangle 4"/>
+          <p:cNvSpPr/>
+          <p:nvPr/>
+        </p:nvSpPr>
+        <p:spPr>
+          <a:xfrm>
+            <a:off x="609600" y="6553200"/>
+            <a:ext cx="10972800" cy="9525"/>
+          </a:xfrm>
+          <a:prstGeom prst="rect">
+            <a:avLst/>
+          </a:prstGeom>
+          <a:solidFill>
+            <a:srgbClr val="DEDCD5"/>
+          </a:solidFill>
+          <a:ln>
+            <a:noFill/>
+          </a:ln>
+          <a:effectLst/>
+        </p:spPr>
+        <p:style>
+          <a:lnRef idx="1">
+            <a:schemeClr val="accent1"/>
+          </a:lnRef>
+          <a:fillRef idx="3">
+            <a:schemeClr val="accent1"/>
+          </a:fillRef>
+          <a:effectRef idx="2">
+            <a:schemeClr val="accent1"/>
+          </a:effectRef>
+          <a:fontRef idx="minor">
+            <a:schemeClr val="lt1"/>
+          </a:fontRef>
+        </p:style>
+        <p:txBody>
+          <a:bodyPr rtlCol="0" anchor="ctr"/>
+          <a:lstStyle/>
+          <a:p>
+            <a:pPr algn="ctr"/>
+          </a:p>
+        </p:txBody>
+      </p:sp>
+      <p:sp>
+        <p:nvSpPr>
+          <p:cNvPr id="6" name="TextBox 5"/>
+          <p:cNvSpPr txBox="1"/>
+          <p:nvPr/>
+        </p:nvSpPr>
+        <p:spPr>
+          <a:xfrm>
+            <a:off x="609600" y="6610350"/>
+            <a:ext cx="5715000" cy="190500"/>
+          </a:xfrm>
+          <a:prstGeom prst="rect">
+            <a:avLst/>
+          </a:prstGeom>
+          <a:noFill/>
+        </p:spPr>
+        <p:txBody>
+          <a:bodyPr wrap="square" lIns="0" rIns="0" tIns="0" bIns="0" anchor="t">
+            <a:spAutoFit/>
+          </a:bodyPr>
+          <a:lstStyle/>
+          <a:p>
+            <a:pPr algn="l">
+              <a:lnSpc>
+                <a:spcPct val="124200"/>
+              </a:lnSpc>
+            </a:pPr>
+            <a:r>
+              <a:rPr sz="825" b="0">
+                <a:solidFill>
+                  <a:srgbClr val="7A7A80"/>
+                </a:solidFill>
+                <a:latin typeface="Pretendard"/>
+                <a:ea typeface="Pretendard"/>
+                <a:cs typeface="Pretendard"/>
+              </a:rPr>
+              <a:t>NOMOS 중간발표  2026.10.16</a:t>
+            </a:r>
+          </a:p>
+        </p:txBody>
+      </p:sp>
+      <p:sp>
+        <p:nvSpPr>
+          <p:cNvPr id="7" name="TextBox 6"/>
+          <p:cNvSpPr txBox="1"/>
+          <p:nvPr/>
+        </p:nvSpPr>
+        <p:spPr>
+          <a:xfrm>
+            <a:off x="609600" y="1905000"/>
+            <a:ext cx="3238500" cy="285750"/>
+          </a:xfrm>
+          <a:prstGeom prst="rect">
+            <a:avLst/>
+          </a:prstGeom>
+          <a:noFill/>
+        </p:spPr>
+        <p:txBody>
+          <a:bodyPr wrap="square" lIns="0" rIns="0" tIns="0" bIns="0" anchor="t">
+            <a:spAutoFit/>
+          </a:bodyPr>
+          <a:lstStyle/>
+          <a:p>
+            <a:pPr algn="l">
+              <a:lnSpc>
+                <a:spcPct val="124200"/>
+              </a:lnSpc>
+            </a:pPr>
+            <a:r>
+              <a:rPr sz="1275" b="1">
+                <a:solidFill>
+                  <a:srgbClr val="2A78D6"/>
+                </a:solidFill>
+                <a:latin typeface="Pretendard"/>
+                <a:ea typeface="Pretendard"/>
+                <a:cs typeface="Pretendard"/>
+              </a:rPr>
+              <a:t>이번 학기</a:t>
+            </a:r>
+          </a:p>
+        </p:txBody>
+      </p:sp>
+      <p:sp>
+        <p:nvSpPr>
+          <p:cNvPr id="8" name="Rectangle 7"/>
+          <p:cNvSpPr/>
+          <p:nvPr/>
+        </p:nvSpPr>
+        <p:spPr>
+          <a:xfrm>
+            <a:off x="609600" y="2247900"/>
+            <a:ext cx="3238500" cy="9525"/>
+          </a:xfrm>
+          <a:prstGeom prst="rect">
+            <a:avLst/>
+          </a:prstGeom>
+          <a:solidFill>
+            <a:srgbClr val="16161A"/>
+          </a:solidFill>
+          <a:ln>
+            <a:noFill/>
+          </a:ln>
+          <a:effectLst/>
+        </p:spPr>
+        <p:style>
+          <a:lnRef idx="1">
+            <a:schemeClr val="accent1"/>
+          </a:lnRef>
+          <a:fillRef idx="3">
+            <a:schemeClr val="accent1"/>
+          </a:fillRef>
+          <a:effectRef idx="2">
+            <a:schemeClr val="accent1"/>
+          </a:effectRef>
+          <a:fontRef idx="minor">
+            <a:schemeClr val="lt1"/>
+          </a:fontRef>
+        </p:style>
+        <p:txBody>
+          <a:bodyPr rtlCol="0" anchor="ctr"/>
+          <a:lstStyle/>
+          <a:p>
+            <a:pPr algn="ctr"/>
+          </a:p>
+        </p:txBody>
+      </p:sp>
+      <p:sp>
+        <p:nvSpPr>
+          <p:cNvPr id="9" name="TextBox 8"/>
+          <p:cNvSpPr txBox="1"/>
+          <p:nvPr/>
+        </p:nvSpPr>
+        <p:spPr>
+          <a:xfrm>
+            <a:off x="609600" y="2400300"/>
+            <a:ext cx="3333750" cy="666750"/>
+          </a:xfrm>
+          <a:prstGeom prst="rect">
+            <a:avLst/>
+          </a:prstGeom>
+          <a:noFill/>
+        </p:spPr>
+        <p:txBody>
+          <a:bodyPr wrap="square" lIns="0" rIns="0" tIns="0" bIns="0" anchor="t">
+            <a:spAutoFit/>
+          </a:bodyPr>
+          <a:lstStyle/>
+          <a:p>
+            <a:pPr algn="l">
+              <a:lnSpc>
+                <a:spcPct val="133400"/>
+              </a:lnSpc>
+            </a:pPr>
+            <a:r>
+              <a:rPr sz="1350" b="0">
+                <a:solidFill>
+                  <a:srgbClr val="16161A"/>
+                </a:solidFill>
+                <a:latin typeface="Pretendard"/>
+                <a:ea typeface="Pretendard"/>
+                <a:cs typeface="Pretendard"/>
+              </a:rPr>
+              <a:t>결정 장부 재사용: 같은 결정은 다시 묻지 않는다</a:t>
+            </a:r>
+          </a:p>
+        </p:txBody>
+      </p:sp>
+      <p:sp>
+        <p:nvSpPr>
+          <p:cNvPr id="10" name="TextBox 9"/>
+          <p:cNvSpPr txBox="1"/>
+          <p:nvPr/>
+        </p:nvSpPr>
+        <p:spPr>
+          <a:xfrm>
+            <a:off x="609600" y="3105150"/>
+            <a:ext cx="3333750" cy="666750"/>
+          </a:xfrm>
+          <a:prstGeom prst="rect">
+            <a:avLst/>
+          </a:prstGeom>
+          <a:noFill/>
+        </p:spPr>
+        <p:txBody>
+          <a:bodyPr wrap="square" lIns="0" rIns="0" tIns="0" bIns="0" anchor="t">
+            <a:spAutoFit/>
+          </a:bodyPr>
+          <a:lstStyle/>
+          <a:p>
+            <a:pPr algn="l">
+              <a:lnSpc>
+                <a:spcPct val="133400"/>
+              </a:lnSpc>
+            </a:pPr>
+            <a:r>
+              <a:rPr sz="1350" b="0">
+                <a:solidFill>
+                  <a:srgbClr val="16161A"/>
+                </a:solidFill>
+                <a:latin typeface="Pretendard"/>
+                <a:ea typeface="Pretendard"/>
+                <a:cs typeface="Pretendard"/>
+              </a:rPr>
+              <a:t>질문 묶기: 같은 사람에게 가는 질문을 한 번에</a:t>
+            </a:r>
+          </a:p>
+        </p:txBody>
+      </p:sp>
+      <p:sp>
+        <p:nvSpPr>
+          <p:cNvPr id="11" name="TextBox 10"/>
+          <p:cNvSpPr txBox="1"/>
+          <p:nvPr/>
+        </p:nvSpPr>
+        <p:spPr>
+          <a:xfrm>
+            <a:off x="609600" y="3810000"/>
+            <a:ext cx="3333750" cy="666750"/>
+          </a:xfrm>
+          <a:prstGeom prst="rect">
+            <a:avLst/>
+          </a:prstGeom>
+          <a:noFill/>
+        </p:spPr>
+        <p:txBody>
+          <a:bodyPr wrap="square" lIns="0" rIns="0" tIns="0" bIns="0" anchor="t">
+            <a:spAutoFit/>
+          </a:bodyPr>
+          <a:lstStyle/>
+          <a:p>
+            <a:pPr algn="l">
+              <a:lnSpc>
+                <a:spcPct val="133400"/>
+              </a:lnSpc>
+            </a:pPr>
+            <a:r>
+              <a:rPr sz="1350" b="0">
+                <a:solidFill>
+                  <a:srgbClr val="16161A"/>
+                </a:solidFill>
+                <a:latin typeface="Pretendard"/>
+                <a:ea typeface="Pretendard"/>
+                <a:cs typeface="Pretendard"/>
+              </a:rPr>
+              <a:t>추천 수락 후 진행, 사후 확인(추천 수락률 78%)</a:t>
+            </a:r>
+          </a:p>
+        </p:txBody>
+      </p:sp>
+      <p:sp>
+        <p:nvSpPr>
+          <p:cNvPr id="12" name="TextBox 11"/>
+          <p:cNvSpPr txBox="1"/>
+          <p:nvPr/>
+        </p:nvSpPr>
+        <p:spPr>
+          <a:xfrm>
+            <a:off x="609600" y="4514850"/>
+            <a:ext cx="3333750" cy="666750"/>
+          </a:xfrm>
+          <a:prstGeom prst="rect">
+            <a:avLst/>
+          </a:prstGeom>
+          <a:noFill/>
+        </p:spPr>
+        <p:txBody>
+          <a:bodyPr wrap="square" lIns="0" rIns="0" tIns="0" bIns="0" anchor="t">
+            <a:spAutoFit/>
+          </a:bodyPr>
+          <a:lstStyle/>
+          <a:p>
+            <a:pPr algn="l">
+              <a:lnSpc>
+                <a:spcPct val="133400"/>
+              </a:lnSpc>
+            </a:pPr>
+            <a:r>
+              <a:rPr sz="1350" b="0">
+                <a:solidFill>
+                  <a:srgbClr val="16161A"/>
+                </a:solidFill>
+                <a:latin typeface="Pretendard"/>
+                <a:ea typeface="Pretendard"/>
+                <a:cs typeface="Pretendard"/>
+              </a:rPr>
+              <a:t>넘기기 버튼과 재배정 로그</a:t>
+            </a:r>
+          </a:p>
+        </p:txBody>
+      </p:sp>
+      <p:sp>
+        <p:nvSpPr>
+          <p:cNvPr id="13" name="TextBox 12"/>
+          <p:cNvSpPr txBox="1"/>
+          <p:nvPr/>
+        </p:nvSpPr>
+        <p:spPr>
+          <a:xfrm>
+            <a:off x="609600" y="5219700"/>
+            <a:ext cx="3333750" cy="666750"/>
+          </a:xfrm>
+          <a:prstGeom prst="rect">
+            <a:avLst/>
+          </a:prstGeom>
+          <a:noFill/>
+        </p:spPr>
+        <p:txBody>
+          <a:bodyPr wrap="square" lIns="0" rIns="0" tIns="0" bIns="0" anchor="t">
+            <a:spAutoFit/>
+          </a:bodyPr>
+          <a:lstStyle/>
+          <a:p>
+            <a:pPr algn="l">
+              <a:lnSpc>
+                <a:spcPct val="133400"/>
+              </a:lnSpc>
+            </a:pPr>
+            <a:r>
+              <a:rPr sz="1350" b="0">
+                <a:solidFill>
+                  <a:srgbClr val="16161A"/>
+                </a:solidFill>
+                <a:latin typeface="Pretendard"/>
+                <a:ea typeface="Pretendard"/>
+                <a:cs typeface="Pretendard"/>
+              </a:rPr>
+              <a:t>답 대기 기준 시간과 자동 상향</a:t>
+            </a:r>
+          </a:p>
+        </p:txBody>
+      </p:sp>
+      <p:sp>
+        <p:nvSpPr>
+          <p:cNvPr id="14" name="TextBox 13"/>
+          <p:cNvSpPr txBox="1"/>
+          <p:nvPr/>
+        </p:nvSpPr>
+        <p:spPr>
+          <a:xfrm>
+            <a:off x="4762500" y="1905000"/>
+            <a:ext cx="3238500" cy="285750"/>
+          </a:xfrm>
+          <a:prstGeom prst="rect">
+            <a:avLst/>
+          </a:prstGeom>
+          <a:noFill/>
+        </p:spPr>
+        <p:txBody>
+          <a:bodyPr wrap="square" lIns="0" rIns="0" tIns="0" bIns="0" anchor="t">
+            <a:spAutoFit/>
+          </a:bodyPr>
+          <a:lstStyle/>
+          <a:p>
+            <a:pPr algn="l">
+              <a:lnSpc>
+                <a:spcPct val="124200"/>
+              </a:lnSpc>
+            </a:pPr>
+            <a:r>
+              <a:rPr sz="1275" b="1">
+                <a:solidFill>
+                  <a:srgbClr val="47474D"/>
+                </a:solidFill>
+                <a:latin typeface="Pretendard"/>
+                <a:ea typeface="Pretendard"/>
+                <a:cs typeface="Pretendard"/>
+              </a:rPr>
+              <a:t>기말에 비교만</a:t>
+            </a:r>
+          </a:p>
+        </p:txBody>
+      </p:sp>
+      <p:sp>
+        <p:nvSpPr>
+          <p:cNvPr id="15" name="Rectangle 14"/>
+          <p:cNvSpPr/>
+          <p:nvPr/>
+        </p:nvSpPr>
+        <p:spPr>
+          <a:xfrm>
+            <a:off x="4762500" y="2247900"/>
+            <a:ext cx="3238500" cy="9525"/>
+          </a:xfrm>
+          <a:prstGeom prst="rect">
+            <a:avLst/>
+          </a:prstGeom>
+          <a:solidFill>
+            <a:srgbClr val="16161A"/>
+          </a:solidFill>
+          <a:ln>
+            <a:noFill/>
+          </a:ln>
+          <a:effectLst/>
+        </p:spPr>
+        <p:style>
+          <a:lnRef idx="1">
+            <a:schemeClr val="accent1"/>
+          </a:lnRef>
+          <a:fillRef idx="3">
+            <a:schemeClr val="accent1"/>
+          </a:fillRef>
+          <a:effectRef idx="2">
+            <a:schemeClr val="accent1"/>
+          </a:effectRef>
+          <a:fontRef idx="minor">
+            <a:schemeClr val="lt1"/>
+          </a:fontRef>
+        </p:style>
+        <p:txBody>
+          <a:bodyPr rtlCol="0" anchor="ctr"/>
+          <a:lstStyle/>
+          <a:p>
+            <a:pPr algn="ctr"/>
+          </a:p>
+        </p:txBody>
+      </p:sp>
+      <p:sp>
+        <p:nvSpPr>
+          <p:cNvPr id="16" name="TextBox 15"/>
+          <p:cNvSpPr txBox="1"/>
+          <p:nvPr/>
+        </p:nvSpPr>
+        <p:spPr>
+          <a:xfrm>
+            <a:off x="4762500" y="2400300"/>
+            <a:ext cx="3333750" cy="666750"/>
+          </a:xfrm>
+          <a:prstGeom prst="rect">
+            <a:avLst/>
+          </a:prstGeom>
+          <a:noFill/>
+        </p:spPr>
+        <p:txBody>
+          <a:bodyPr wrap="square" lIns="0" rIns="0" tIns="0" bIns="0" anchor="t">
+            <a:spAutoFit/>
+          </a:bodyPr>
+          <a:lstStyle/>
+          <a:p>
+            <a:pPr algn="l">
+              <a:lnSpc>
+                <a:spcPct val="133400"/>
+              </a:lnSpc>
+            </a:pPr>
+            <a:r>
+              <a:rPr sz="1350" b="0">
+                <a:solidFill>
+                  <a:srgbClr val="16161A"/>
+                </a:solidFill>
+                <a:latin typeface="Pretendard"/>
+                <a:ea typeface="Pretendard"/>
+                <a:cs typeface="Pretendard"/>
+              </a:rPr>
+              <a:t>Jev 같은 System 1 모델: 기말 비교 한 번</a:t>
+            </a:r>
+          </a:p>
+        </p:txBody>
+      </p:sp>
+      <p:sp>
+        <p:nvSpPr>
+          <p:cNvPr id="17" name="TextBox 16"/>
+          <p:cNvSpPr txBox="1"/>
+          <p:nvPr/>
+        </p:nvSpPr>
+        <p:spPr>
+          <a:xfrm>
+            <a:off x="4762500" y="3105150"/>
+            <a:ext cx="3333750" cy="666750"/>
+          </a:xfrm>
+          <a:prstGeom prst="rect">
+            <a:avLst/>
+          </a:prstGeom>
+          <a:noFill/>
+        </p:spPr>
+        <p:txBody>
+          <a:bodyPr wrap="square" lIns="0" rIns="0" tIns="0" bIns="0" anchor="t">
+            <a:spAutoFit/>
+          </a:bodyPr>
+          <a:lstStyle/>
+          <a:p>
+            <a:pPr algn="l">
+              <a:lnSpc>
+                <a:spcPct val="133400"/>
+              </a:lnSpc>
+            </a:pPr>
+            <a:r>
+              <a:rPr sz="1350" b="0">
+                <a:solidFill>
+                  <a:srgbClr val="16161A"/>
+                </a:solidFill>
+                <a:latin typeface="Pretendard"/>
+                <a:ea typeface="Pretendard"/>
+                <a:cs typeface="Pretendard"/>
+              </a:rPr>
+              <a:t>질문 품질 검사(맥락, 선택지 누락)</a:t>
+            </a:r>
+          </a:p>
+        </p:txBody>
+      </p:sp>
+      <p:sp>
+        <p:nvSpPr>
+          <p:cNvPr id="18" name="TextBox 17"/>
+          <p:cNvSpPr txBox="1"/>
+          <p:nvPr/>
+        </p:nvSpPr>
+        <p:spPr>
+          <a:xfrm>
+            <a:off x="8286750" y="1905000"/>
+            <a:ext cx="3238500" cy="285750"/>
+          </a:xfrm>
+          <a:prstGeom prst="rect">
+            <a:avLst/>
+          </a:prstGeom>
+          <a:noFill/>
+        </p:spPr>
+        <p:txBody>
+          <a:bodyPr wrap="square" lIns="0" rIns="0" tIns="0" bIns="0" anchor="t">
+            <a:spAutoFit/>
+          </a:bodyPr>
+          <a:lstStyle/>
+          <a:p>
+            <a:pPr algn="l">
+              <a:lnSpc>
+                <a:spcPct val="124200"/>
+              </a:lnSpc>
+            </a:pPr>
+            <a:r>
+              <a:rPr sz="1275" b="1">
+                <a:solidFill>
+                  <a:srgbClr val="7A7A80"/>
+                </a:solidFill>
+                <a:latin typeface="Pretendard"/>
+                <a:ea typeface="Pretendard"/>
+                <a:cs typeface="Pretendard"/>
+              </a:rPr>
+              <a:t>보류</a:t>
+            </a:r>
+          </a:p>
+        </p:txBody>
+      </p:sp>
+      <p:sp>
+        <p:nvSpPr>
+          <p:cNvPr id="19" name="Rectangle 18"/>
+          <p:cNvSpPr/>
+          <p:nvPr/>
+        </p:nvSpPr>
+        <p:spPr>
+          <a:xfrm>
+            <a:off x="8286750" y="2247900"/>
+            <a:ext cx="3238500" cy="9525"/>
+          </a:xfrm>
+          <a:prstGeom prst="rect">
+            <a:avLst/>
+          </a:prstGeom>
+          <a:solidFill>
+            <a:srgbClr val="16161A"/>
+          </a:solidFill>
+          <a:ln>
+            <a:noFill/>
+          </a:ln>
+          <a:effectLst/>
+        </p:spPr>
+        <p:style>
+          <a:lnRef idx="1">
+            <a:schemeClr val="accent1"/>
+          </a:lnRef>
+          <a:fillRef idx="3">
+            <a:schemeClr val="accent1"/>
+          </a:fillRef>
+          <a:effectRef idx="2">
+            <a:schemeClr val="accent1"/>
+          </a:effectRef>
+          <a:fontRef idx="minor">
+            <a:schemeClr val="lt1"/>
+          </a:fontRef>
+        </p:style>
+        <p:txBody>
+          <a:bodyPr rtlCol="0" anchor="ctr"/>
+          <a:lstStyle/>
+          <a:p>
+            <a:pPr algn="ctr"/>
+          </a:p>
+        </p:txBody>
+      </p:sp>
+      <p:sp>
+        <p:nvSpPr>
+          <p:cNvPr id="20" name="TextBox 19"/>
+          <p:cNvSpPr txBox="1"/>
+          <p:nvPr/>
+        </p:nvSpPr>
+        <p:spPr>
+          <a:xfrm>
+            <a:off x="8286750" y="2400300"/>
+            <a:ext cx="3333750" cy="666750"/>
+          </a:xfrm>
+          <a:prstGeom prst="rect">
+            <a:avLst/>
+          </a:prstGeom>
+          <a:noFill/>
+        </p:spPr>
+        <p:txBody>
+          <a:bodyPr wrap="square" lIns="0" rIns="0" tIns="0" bIns="0" anchor="t">
+            <a:spAutoFit/>
+          </a:bodyPr>
+          <a:lstStyle/>
+          <a:p>
+            <a:pPr algn="l">
+              <a:lnSpc>
+                <a:spcPct val="133400"/>
+              </a:lnSpc>
+            </a:pPr>
+            <a:r>
+              <a:rPr sz="1350" b="0">
+                <a:solidFill>
+                  <a:srgbClr val="16161A"/>
+                </a:solidFill>
+                <a:latin typeface="Pretendard"/>
+                <a:ea typeface="Pretendard"/>
+                <a:cs typeface="Pretendard"/>
+              </a:rPr>
+              <a:t>역할 5개 이상으로 확장</a:t>
+            </a:r>
+          </a:p>
+        </p:txBody>
+      </p:sp>
+      <p:sp>
+        <p:nvSpPr>
+          <p:cNvPr id="21" name="TextBox 20"/>
+          <p:cNvSpPr txBox="1"/>
+          <p:nvPr/>
+        </p:nvSpPr>
+        <p:spPr>
+          <a:xfrm>
+            <a:off x="8286750" y="3105150"/>
+            <a:ext cx="3333750" cy="666750"/>
+          </a:xfrm>
+          <a:prstGeom prst="rect">
+            <a:avLst/>
+          </a:prstGeom>
+          <a:noFill/>
+        </p:spPr>
+        <p:txBody>
+          <a:bodyPr wrap="square" lIns="0" rIns="0" tIns="0" bIns="0" anchor="t">
+            <a:spAutoFit/>
+          </a:bodyPr>
+          <a:lstStyle/>
+          <a:p>
+            <a:pPr algn="l">
+              <a:lnSpc>
+                <a:spcPct val="133400"/>
+              </a:lnSpc>
+            </a:pPr>
+            <a:r>
+              <a:rPr sz="1350" b="0">
+                <a:solidFill>
+                  <a:srgbClr val="16161A"/>
+                </a:solidFill>
+                <a:latin typeface="Pretendard"/>
+                <a:ea typeface="Pretendard"/>
+                <a:cs typeface="Pretendard"/>
+              </a:rPr>
+              <a:t>비판, ERD, 스케줄러 전용 에이전트</a:t>
+            </a:r>
+          </a:p>
+        </p:txBody>
+      </p:sp>
+    </p:spTree>
+  </p:cSld>
+  <p:clrMapOvr>
+    <a:masterClrMapping/>
+  </p:clrMapOvr>
+</p:sld>
+</file>
+
+<file path=ppt/slides/slide15.xml><?xml version="1.0" encoding="utf-8"?>
 <p:sld xmlns:a="http://schemas.openxmlformats.org/drawingml/2006/main" xmlns:p="http://schemas.openxmlformats.org/presentationml/2006/main" xmlns:r="http://schemas.openxmlformats.org/officeDocument/2006/relationships">
   <p:cSld>
     <p:bg>
@@ -9416,7 +11141,7 @@
                 <a:ea typeface="Pretendard"/>
                 <a:cs typeface="Pretendard"/>
               </a:rPr>
-              <a:t>02 / 14</a:t>
+              <a:t>02 / 15</a:t>
             </a:r>
           </a:p>
         </p:txBody>
@@ -10256,7 +11981,7 @@
                 <a:ea typeface="Pretendard"/>
                 <a:cs typeface="Pretendard"/>
               </a:rPr>
-              <a:t>03 / 14</a:t>
+              <a:t>03 / 15</a:t>
             </a:r>
           </a:p>
         </p:txBody>
@@ -11612,7 +13337,7 @@
                 <a:ea typeface="Pretendard"/>
                 <a:cs typeface="Pretendard"/>
               </a:rPr>
-              <a:t>04 / 14</a:t>
+              <a:t>04 / 15</a:t>
             </a:r>
           </a:p>
         </p:txBody>
@@ -12742,7 +14467,7 @@
                 <a:ea typeface="Pretendard"/>
                 <a:cs typeface="Pretendard"/>
               </a:rPr>
-              <a:t>05 / 14</a:t>
+              <a:t>05 / 15</a:t>
             </a:r>
           </a:p>
         </p:txBody>
@@ -14031,7 +15756,7 @@
                 <a:ea typeface="Pretendard"/>
                 <a:cs typeface="Pretendard"/>
               </a:rPr>
-              <a:t>06 / 14</a:t>
+              <a:t>06 / 15</a:t>
             </a:r>
           </a:p>
         </p:txBody>
@@ -14979,7 +16704,7 @@
                 <a:ea typeface="Pretendard"/>
                 <a:cs typeface="Pretendard"/>
               </a:rPr>
-              <a:t>07 / 14</a:t>
+              <a:t>07 / 15</a:t>
             </a:r>
           </a:p>
         </p:txBody>
@@ -16649,7 +18374,7 @@
                 <a:ea typeface="Pretendard"/>
                 <a:cs typeface="Pretendard"/>
               </a:rPr>
-              <a:t>08 / 14</a:t>
+              <a:t>08 / 15</a:t>
             </a:r>
           </a:p>
         </p:txBody>
@@ -17396,7 +19121,7 @@
                 <a:ea typeface="Pretendard"/>
                 <a:cs typeface="Pretendard"/>
               </a:rPr>
-              <a:t>09 / 14</a:t>
+              <a:t>09 / 15</a:t>
             </a:r>
           </a:p>
         </p:txBody>

--- a/docs/midterm/midterm-deck.pptx
+++ b/docs/midterm/midterm-deck.pptx
@@ -10243,26 +10243,26 @@
         <p:spPr>
           <a:xfrm>
             <a:off x="609600" y="2400300"/>
-            <a:ext cx="3333750" cy="666750"/>
-          </a:xfrm>
-          <a:prstGeom prst="rect">
-            <a:avLst/>
-          </a:prstGeom>
-          <a:noFill/>
-        </p:spPr>
-        <p:txBody>
-          <a:bodyPr wrap="square" lIns="0" rIns="0" tIns="0" bIns="0" anchor="t">
-            <a:spAutoFit/>
-          </a:bodyPr>
-          <a:lstStyle/>
-          <a:p>
-            <a:pPr algn="l">
-              <a:lnSpc>
-                <a:spcPct val="133400"/>
-              </a:lnSpc>
-            </a:pPr>
-            <a:r>
-              <a:rPr sz="1350" b="0">
+            <a:ext cx="3333750" cy="609600"/>
+          </a:xfrm>
+          <a:prstGeom prst="rect">
+            <a:avLst/>
+          </a:prstGeom>
+          <a:noFill/>
+        </p:spPr>
+        <p:txBody>
+          <a:bodyPr wrap="square" lIns="0" rIns="0" tIns="0" bIns="0" anchor="t">
+            <a:spAutoFit/>
+          </a:bodyPr>
+          <a:lstStyle/>
+          <a:p>
+            <a:pPr algn="l">
+              <a:lnSpc>
+                <a:spcPct val="128800"/>
+              </a:lnSpc>
+            </a:pPr>
+            <a:r>
+              <a:rPr sz="1275" b="0">
                 <a:solidFill>
                   <a:srgbClr val="16161A"/>
                 </a:solidFill>
@@ -10283,27 +10283,27 @@
         </p:nvSpPr>
         <p:spPr>
           <a:xfrm>
-            <a:off x="609600" y="3105150"/>
-            <a:ext cx="3333750" cy="666750"/>
-          </a:xfrm>
-          <a:prstGeom prst="rect">
-            <a:avLst/>
-          </a:prstGeom>
-          <a:noFill/>
-        </p:spPr>
-        <p:txBody>
-          <a:bodyPr wrap="square" lIns="0" rIns="0" tIns="0" bIns="0" anchor="t">
-            <a:spAutoFit/>
-          </a:bodyPr>
-          <a:lstStyle/>
-          <a:p>
-            <a:pPr algn="l">
-              <a:lnSpc>
-                <a:spcPct val="133400"/>
-              </a:lnSpc>
-            </a:pPr>
-            <a:r>
-              <a:rPr sz="1350" b="0">
+            <a:off x="609600" y="3028950"/>
+            <a:ext cx="3333750" cy="609600"/>
+          </a:xfrm>
+          <a:prstGeom prst="rect">
+            <a:avLst/>
+          </a:prstGeom>
+          <a:noFill/>
+        </p:spPr>
+        <p:txBody>
+          <a:bodyPr wrap="square" lIns="0" rIns="0" tIns="0" bIns="0" anchor="t">
+            <a:spAutoFit/>
+          </a:bodyPr>
+          <a:lstStyle/>
+          <a:p>
+            <a:pPr algn="l">
+              <a:lnSpc>
+                <a:spcPct val="128800"/>
+              </a:lnSpc>
+            </a:pPr>
+            <a:r>
+              <a:rPr sz="1275" b="0">
                 <a:solidFill>
                   <a:srgbClr val="16161A"/>
                 </a:solidFill>
@@ -10324,27 +10324,27 @@
         </p:nvSpPr>
         <p:spPr>
           <a:xfrm>
-            <a:off x="609600" y="3810000"/>
-            <a:ext cx="3333750" cy="666750"/>
-          </a:xfrm>
-          <a:prstGeom prst="rect">
-            <a:avLst/>
-          </a:prstGeom>
-          <a:noFill/>
-        </p:spPr>
-        <p:txBody>
-          <a:bodyPr wrap="square" lIns="0" rIns="0" tIns="0" bIns="0" anchor="t">
-            <a:spAutoFit/>
-          </a:bodyPr>
-          <a:lstStyle/>
-          <a:p>
-            <a:pPr algn="l">
-              <a:lnSpc>
-                <a:spcPct val="133400"/>
-              </a:lnSpc>
-            </a:pPr>
-            <a:r>
-              <a:rPr sz="1350" b="0">
+            <a:off x="609600" y="3657600"/>
+            <a:ext cx="3333750" cy="609600"/>
+          </a:xfrm>
+          <a:prstGeom prst="rect">
+            <a:avLst/>
+          </a:prstGeom>
+          <a:noFill/>
+        </p:spPr>
+        <p:txBody>
+          <a:bodyPr wrap="square" lIns="0" rIns="0" tIns="0" bIns="0" anchor="t">
+            <a:spAutoFit/>
+          </a:bodyPr>
+          <a:lstStyle/>
+          <a:p>
+            <a:pPr algn="l">
+              <a:lnSpc>
+                <a:spcPct val="128800"/>
+              </a:lnSpc>
+            </a:pPr>
+            <a:r>
+              <a:rPr sz="1275" b="0">
                 <a:solidFill>
                   <a:srgbClr val="16161A"/>
                 </a:solidFill>
@@ -10365,27 +10365,27 @@
         </p:nvSpPr>
         <p:spPr>
           <a:xfrm>
-            <a:off x="609600" y="4514850"/>
-            <a:ext cx="3333750" cy="666750"/>
-          </a:xfrm>
-          <a:prstGeom prst="rect">
-            <a:avLst/>
-          </a:prstGeom>
-          <a:noFill/>
-        </p:spPr>
-        <p:txBody>
-          <a:bodyPr wrap="square" lIns="0" rIns="0" tIns="0" bIns="0" anchor="t">
-            <a:spAutoFit/>
-          </a:bodyPr>
-          <a:lstStyle/>
-          <a:p>
-            <a:pPr algn="l">
-              <a:lnSpc>
-                <a:spcPct val="133400"/>
-              </a:lnSpc>
-            </a:pPr>
-            <a:r>
-              <a:rPr sz="1350" b="0">
+            <a:off x="609600" y="4286250"/>
+            <a:ext cx="3333750" cy="609600"/>
+          </a:xfrm>
+          <a:prstGeom prst="rect">
+            <a:avLst/>
+          </a:prstGeom>
+          <a:noFill/>
+        </p:spPr>
+        <p:txBody>
+          <a:bodyPr wrap="square" lIns="0" rIns="0" tIns="0" bIns="0" anchor="t">
+            <a:spAutoFit/>
+          </a:bodyPr>
+          <a:lstStyle/>
+          <a:p>
+            <a:pPr algn="l">
+              <a:lnSpc>
+                <a:spcPct val="128800"/>
+              </a:lnSpc>
+            </a:pPr>
+            <a:r>
+              <a:rPr sz="1275" b="0">
                 <a:solidFill>
                   <a:srgbClr val="16161A"/>
                 </a:solidFill>
@@ -10406,27 +10406,27 @@
         </p:nvSpPr>
         <p:spPr>
           <a:xfrm>
-            <a:off x="609600" y="5219700"/>
-            <a:ext cx="3333750" cy="666750"/>
-          </a:xfrm>
-          <a:prstGeom prst="rect">
-            <a:avLst/>
-          </a:prstGeom>
-          <a:noFill/>
-        </p:spPr>
-        <p:txBody>
-          <a:bodyPr wrap="square" lIns="0" rIns="0" tIns="0" bIns="0" anchor="t">
-            <a:spAutoFit/>
-          </a:bodyPr>
-          <a:lstStyle/>
-          <a:p>
-            <a:pPr algn="l">
-              <a:lnSpc>
-                <a:spcPct val="133400"/>
-              </a:lnSpc>
-            </a:pPr>
-            <a:r>
-              <a:rPr sz="1350" b="0">
+            <a:off x="609600" y="4914900"/>
+            <a:ext cx="3333750" cy="609600"/>
+          </a:xfrm>
+          <a:prstGeom prst="rect">
+            <a:avLst/>
+          </a:prstGeom>
+          <a:noFill/>
+        </p:spPr>
+        <p:txBody>
+          <a:bodyPr wrap="square" lIns="0" rIns="0" tIns="0" bIns="0" anchor="t">
+            <a:spAutoFit/>
+          </a:bodyPr>
+          <a:lstStyle/>
+          <a:p>
+            <a:pPr algn="l">
+              <a:lnSpc>
+                <a:spcPct val="128800"/>
+              </a:lnSpc>
+            </a:pPr>
+            <a:r>
+              <a:rPr sz="1275" b="0">
                 <a:solidFill>
                   <a:srgbClr val="16161A"/>
                 </a:solidFill>
@@ -10434,6 +10434,47 @@
                 <a:ea typeface="Pretendard"/>
                 <a:cs typeface="Pretendard"/>
               </a:rPr>
+              <a:t>작은 모델 세 번 판정해 다수결(haiku는 21%가 실행마다 바뀜)</a:t>
+            </a:r>
+          </a:p>
+        </p:txBody>
+      </p:sp>
+      <p:sp>
+        <p:nvSpPr>
+          <p:cNvPr id="14" name="TextBox 13"/>
+          <p:cNvSpPr txBox="1"/>
+          <p:nvPr/>
+        </p:nvSpPr>
+        <p:spPr>
+          <a:xfrm>
+            <a:off x="609600" y="5543550"/>
+            <a:ext cx="3333750" cy="609600"/>
+          </a:xfrm>
+          <a:prstGeom prst="rect">
+            <a:avLst/>
+          </a:prstGeom>
+          <a:noFill/>
+        </p:spPr>
+        <p:txBody>
+          <a:bodyPr wrap="square" lIns="0" rIns="0" tIns="0" bIns="0" anchor="t">
+            <a:spAutoFit/>
+          </a:bodyPr>
+          <a:lstStyle/>
+          <a:p>
+            <a:pPr algn="l">
+              <a:lnSpc>
+                <a:spcPct val="128800"/>
+              </a:lnSpc>
+            </a:pPr>
+            <a:r>
+              <a:rPr sz="1275" b="0">
+                <a:solidFill>
+                  <a:srgbClr val="16161A"/>
+                </a:solidFill>
+                <a:latin typeface="Pretendard"/>
+                <a:ea typeface="Pretendard"/>
+                <a:cs typeface="Pretendard"/>
+              </a:rPr>
               <a:t>답 대기 기준 시간과 자동 상향</a:t>
             </a:r>
           </a:p>
@@ -10441,7 +10482,7 @@
       </p:sp>
       <p:sp>
         <p:nvSpPr>
-          <p:cNvPr id="14" name="TextBox 13"/>
+          <p:cNvPr id="15" name="TextBox 14"/>
           <p:cNvSpPr txBox="1"/>
           <p:nvPr/>
         </p:nvSpPr>
@@ -10482,7 +10523,7 @@
       </p:sp>
       <p:sp>
         <p:nvSpPr>
-          <p:cNvPr id="15" name="Rectangle 14"/>
+          <p:cNvPr id="16" name="Rectangle 15"/>
           <p:cNvSpPr/>
           <p:nvPr/>
         </p:nvSpPr>
@@ -10526,33 +10567,33 @@
       </p:sp>
       <p:sp>
         <p:nvSpPr>
-          <p:cNvPr id="16" name="TextBox 15"/>
+          <p:cNvPr id="17" name="TextBox 16"/>
           <p:cNvSpPr txBox="1"/>
           <p:nvPr/>
         </p:nvSpPr>
         <p:spPr>
           <a:xfrm>
             <a:off x="4762500" y="2400300"/>
-            <a:ext cx="3333750" cy="666750"/>
-          </a:xfrm>
-          <a:prstGeom prst="rect">
-            <a:avLst/>
-          </a:prstGeom>
-          <a:noFill/>
-        </p:spPr>
-        <p:txBody>
-          <a:bodyPr wrap="square" lIns="0" rIns="0" tIns="0" bIns="0" anchor="t">
-            <a:spAutoFit/>
-          </a:bodyPr>
-          <a:lstStyle/>
-          <a:p>
-            <a:pPr algn="l">
-              <a:lnSpc>
-                <a:spcPct val="133400"/>
-              </a:lnSpc>
-            </a:pPr>
-            <a:r>
-              <a:rPr sz="1350" b="0">
+            <a:ext cx="3333750" cy="609600"/>
+          </a:xfrm>
+          <a:prstGeom prst="rect">
+            <a:avLst/>
+          </a:prstGeom>
+          <a:noFill/>
+        </p:spPr>
+        <p:txBody>
+          <a:bodyPr wrap="square" lIns="0" rIns="0" tIns="0" bIns="0" anchor="t">
+            <a:spAutoFit/>
+          </a:bodyPr>
+          <a:lstStyle/>
+          <a:p>
+            <a:pPr algn="l">
+              <a:lnSpc>
+                <a:spcPct val="128800"/>
+              </a:lnSpc>
+            </a:pPr>
+            <a:r>
+              <a:rPr sz="1275" b="0">
                 <a:solidFill>
                   <a:srgbClr val="16161A"/>
                 </a:solidFill>
@@ -10567,33 +10608,33 @@
       </p:sp>
       <p:sp>
         <p:nvSpPr>
-          <p:cNvPr id="17" name="TextBox 16"/>
-          <p:cNvSpPr txBox="1"/>
-          <p:nvPr/>
-        </p:nvSpPr>
-        <p:spPr>
-          <a:xfrm>
-            <a:off x="4762500" y="3105150"/>
-            <a:ext cx="3333750" cy="666750"/>
-          </a:xfrm>
-          <a:prstGeom prst="rect">
-            <a:avLst/>
-          </a:prstGeom>
-          <a:noFill/>
-        </p:spPr>
-        <p:txBody>
-          <a:bodyPr wrap="square" lIns="0" rIns="0" tIns="0" bIns="0" anchor="t">
-            <a:spAutoFit/>
-          </a:bodyPr>
-          <a:lstStyle/>
-          <a:p>
-            <a:pPr algn="l">
-              <a:lnSpc>
-                <a:spcPct val="133400"/>
-              </a:lnSpc>
-            </a:pPr>
-            <a:r>
-              <a:rPr sz="1350" b="0">
+          <p:cNvPr id="18" name="TextBox 17"/>
+          <p:cNvSpPr txBox="1"/>
+          <p:nvPr/>
+        </p:nvSpPr>
+        <p:spPr>
+          <a:xfrm>
+            <a:off x="4762500" y="3028950"/>
+            <a:ext cx="3333750" cy="609600"/>
+          </a:xfrm>
+          <a:prstGeom prst="rect">
+            <a:avLst/>
+          </a:prstGeom>
+          <a:noFill/>
+        </p:spPr>
+        <p:txBody>
+          <a:bodyPr wrap="square" lIns="0" rIns="0" tIns="0" bIns="0" anchor="t">
+            <a:spAutoFit/>
+          </a:bodyPr>
+          <a:lstStyle/>
+          <a:p>
+            <a:pPr algn="l">
+              <a:lnSpc>
+                <a:spcPct val="128800"/>
+              </a:lnSpc>
+            </a:pPr>
+            <a:r>
+              <a:rPr sz="1275" b="0">
                 <a:solidFill>
                   <a:srgbClr val="16161A"/>
                 </a:solidFill>
@@ -10608,7 +10649,7 @@
       </p:sp>
       <p:sp>
         <p:nvSpPr>
-          <p:cNvPr id="18" name="TextBox 17"/>
+          <p:cNvPr id="19" name="TextBox 18"/>
           <p:cNvSpPr txBox="1"/>
           <p:nvPr/>
         </p:nvSpPr>
@@ -10649,7 +10690,7 @@
       </p:sp>
       <p:sp>
         <p:nvSpPr>
-          <p:cNvPr id="19" name="Rectangle 18"/>
+          <p:cNvPr id="20" name="Rectangle 19"/>
           <p:cNvSpPr/>
           <p:nvPr/>
         </p:nvSpPr>
@@ -10693,33 +10734,33 @@
       </p:sp>
       <p:sp>
         <p:nvSpPr>
-          <p:cNvPr id="20" name="TextBox 19"/>
+          <p:cNvPr id="21" name="TextBox 20"/>
           <p:cNvSpPr txBox="1"/>
           <p:nvPr/>
         </p:nvSpPr>
         <p:spPr>
           <a:xfrm>
             <a:off x="8286750" y="2400300"/>
-            <a:ext cx="3333750" cy="666750"/>
-          </a:xfrm>
-          <a:prstGeom prst="rect">
-            <a:avLst/>
-          </a:prstGeom>
-          <a:noFill/>
-        </p:spPr>
-        <p:txBody>
-          <a:bodyPr wrap="square" lIns="0" rIns="0" tIns="0" bIns="0" anchor="t">
-            <a:spAutoFit/>
-          </a:bodyPr>
-          <a:lstStyle/>
-          <a:p>
-            <a:pPr algn="l">
-              <a:lnSpc>
-                <a:spcPct val="133400"/>
-              </a:lnSpc>
-            </a:pPr>
-            <a:r>
-              <a:rPr sz="1350" b="0">
+            <a:ext cx="3333750" cy="609600"/>
+          </a:xfrm>
+          <a:prstGeom prst="rect">
+            <a:avLst/>
+          </a:prstGeom>
+          <a:noFill/>
+        </p:spPr>
+        <p:txBody>
+          <a:bodyPr wrap="square" lIns="0" rIns="0" tIns="0" bIns="0" anchor="t">
+            <a:spAutoFit/>
+          </a:bodyPr>
+          <a:lstStyle/>
+          <a:p>
+            <a:pPr algn="l">
+              <a:lnSpc>
+                <a:spcPct val="128800"/>
+              </a:lnSpc>
+            </a:pPr>
+            <a:r>
+              <a:rPr sz="1275" b="0">
                 <a:solidFill>
                   <a:srgbClr val="16161A"/>
                 </a:solidFill>
@@ -10734,33 +10775,33 @@
       </p:sp>
       <p:sp>
         <p:nvSpPr>
-          <p:cNvPr id="21" name="TextBox 20"/>
-          <p:cNvSpPr txBox="1"/>
-          <p:nvPr/>
-        </p:nvSpPr>
-        <p:spPr>
-          <a:xfrm>
-            <a:off x="8286750" y="3105150"/>
-            <a:ext cx="3333750" cy="666750"/>
-          </a:xfrm>
-          <a:prstGeom prst="rect">
-            <a:avLst/>
-          </a:prstGeom>
-          <a:noFill/>
-        </p:spPr>
-        <p:txBody>
-          <a:bodyPr wrap="square" lIns="0" rIns="0" tIns="0" bIns="0" anchor="t">
-            <a:spAutoFit/>
-          </a:bodyPr>
-          <a:lstStyle/>
-          <a:p>
-            <a:pPr algn="l">
-              <a:lnSpc>
-                <a:spcPct val="133400"/>
-              </a:lnSpc>
-            </a:pPr>
-            <a:r>
-              <a:rPr sz="1350" b="0">
+          <p:cNvPr id="22" name="TextBox 21"/>
+          <p:cNvSpPr txBox="1"/>
+          <p:nvPr/>
+        </p:nvSpPr>
+        <p:spPr>
+          <a:xfrm>
+            <a:off x="8286750" y="3028950"/>
+            <a:ext cx="3333750" cy="609600"/>
+          </a:xfrm>
+          <a:prstGeom prst="rect">
+            <a:avLst/>
+          </a:prstGeom>
+          <a:noFill/>
+        </p:spPr>
+        <p:txBody>
+          <a:bodyPr wrap="square" lIns="0" rIns="0" tIns="0" bIns="0" anchor="t">
+            <a:spAutoFit/>
+          </a:bodyPr>
+          <a:lstStyle/>
+          <a:p>
+            <a:pPr algn="l">
+              <a:lnSpc>
+                <a:spcPct val="128800"/>
+              </a:lnSpc>
+            </a:pPr>
+            <a:r>
+              <a:rPr sz="1275" b="0">
                 <a:solidFill>
                   <a:srgbClr val="16161A"/>
                 </a:solidFill>

--- a/docs/midterm/midterm-deck.pptx
+++ b/docs/midterm/midterm-deck.pptx
@@ -10434,7 +10434,7 @@
                 <a:ea typeface="Pretendard"/>
                 <a:cs typeface="Pretendard"/>
               </a:rPr>
-              <a:t>작은 모델 세 번 판정해 다수결(haiku는 21%가 실행마다 바뀜)</a:t>
+              <a:t>판정이 갈리는 질문에 확인 필요 표시(haiku 세 번 중 갈린 24%는 정확도 81%)</a:t>
             </a:r>
           </a:p>
         </p:txBody>

--- a/docs/midterm/midterm-deck.pptx
+++ b/docs/midterm/midterm-deck.pptx
@@ -936,7 +936,7 @@
           <a:lstStyle/>
           <a:p>
             <a:r>
-              <a:t>정리하면, 질문의 다수는 대표에게 가야 하고, owner는 LLM이 9할 이상 맞힙니다. 남은 건 대표의 시간을 아끼는 것과 실제 팀 실험으로 증명하는 것입니다.</a:t>
+              <a:t>정리하면, 질문의 다수는 대표에게 가야 하고, owner는 LLM이 9할 이상 맞힙니다. 남은 건 대표의 시간을 아끼고, 꺼져 있는 계약 대조를 켜고, 실제 팀 실험으로 증명하는 것입니다.</a:t>
             </a:r>
           </a:p>
         </p:txBody>
@@ -10953,7 +10953,25 @@
                 <a:ea typeface="Pretendard"/>
                 <a:cs typeface="Pretendard"/>
               </a:rPr>
-              <a:t>남은 일은 대표의 시간을 아끼는 것과</a:t>
+              <a:t>남은 일은 대표의 시간을 아끼고,</a:t>
+            </a:r>
+          </a:p>
+          <a:p>
+            <a:pPr algn="l">
+              <a:lnSpc>
+                <a:spcPct val="124200"/>
+              </a:lnSpc>
+            </a:pPr>
+            <a:r>
+              <a:rPr sz="3300" b="1">
+                <a:solidFill>
+                  <a:srgbClr val="FFFFFF"/>
+                </a:solidFill>
+                <a:latin typeface="Pretendard"/>
+                <a:ea typeface="Pretendard"/>
+                <a:cs typeface="Pretendard"/>
+              </a:rPr>
+              <a:t>계약 대조를 켜고,</a:t>
             </a:r>
           </a:p>
           <a:p>

--- a/docs/midterm/midterm-deck.pptx
+++ b/docs/midterm/midterm-deck.pptx
@@ -10283,7 +10283,7 @@
         </p:nvSpPr>
         <p:spPr>
           <a:xfrm>
-            <a:off x="609600" y="3028950"/>
+            <a:off x="609600" y="3067050"/>
             <a:ext cx="3333750" cy="609600"/>
           </a:xfrm>
           <a:prstGeom prst="rect">
@@ -10324,7 +10324,7 @@
         </p:nvSpPr>
         <p:spPr>
           <a:xfrm>
-            <a:off x="609600" y="3657600"/>
+            <a:off x="609600" y="3733800"/>
             <a:ext cx="3333750" cy="609600"/>
           </a:xfrm>
           <a:prstGeom prst="rect">
@@ -10365,7 +10365,7 @@
         </p:nvSpPr>
         <p:spPr>
           <a:xfrm>
-            <a:off x="609600" y="4286250"/>
+            <a:off x="609600" y="4400550"/>
             <a:ext cx="3333750" cy="609600"/>
           </a:xfrm>
           <a:prstGeom prst="rect">
@@ -10406,7 +10406,7 @@
         </p:nvSpPr>
         <p:spPr>
           <a:xfrm>
-            <a:off x="609600" y="4914900"/>
+            <a:off x="609600" y="5067300"/>
             <a:ext cx="3333750" cy="609600"/>
           </a:xfrm>
           <a:prstGeom prst="rect">
@@ -10447,7 +10447,7 @@
         </p:nvSpPr>
         <p:spPr>
           <a:xfrm>
-            <a:off x="609600" y="5543550"/>
+            <a:off x="609600" y="5734050"/>
             <a:ext cx="3333750" cy="609600"/>
           </a:xfrm>
           <a:prstGeom prst="rect">
@@ -10614,7 +10614,7 @@
         </p:nvSpPr>
         <p:spPr>
           <a:xfrm>
-            <a:off x="4762500" y="3028950"/>
+            <a:off x="4762500" y="3067050"/>
             <a:ext cx="3333750" cy="609600"/>
           </a:xfrm>
           <a:prstGeom prst="rect">
@@ -10781,7 +10781,7 @@
         </p:nvSpPr>
         <p:spPr>
           <a:xfrm>
-            <a:off x="8286750" y="3028950"/>
+            <a:off x="8286750" y="3067050"/>
             <a:ext cx="3333750" cy="609600"/>
           </a:xfrm>
           <a:prstGeom prst="rect">
